--- a/Lecture slides/NYT C04 - Action Research.pptx
+++ b/Lecture slides/NYT C04 - Action Research.pptx
@@ -9437,7 +9437,7 @@
             </a:pPr>
             <a:r>
               <a:rPr lang="en"/>
-              <a:t>Dirk Riehle, Univ. Erlangen</a:t>
+              <a:t>Dirk Riehle, FAU Erlangen</a:t>
             </a:r>
             <a:endParaRPr/>
           </a:p>
@@ -12499,7 +12499,7 @@
             <a:tbl>
               <a:tblPr>
                 <a:noFill/>
-                <a:tableStyleId>{925B8F33-B0B0-4CD8-9CE5-3976699F01E9}</a:tableStyleId>
+                <a:tableStyleId>{093D59FF-5EC2-42E6-801D-1FF52FC918EA}</a:tableStyleId>
               </a:tblPr>
               <a:tblGrid>
                 <a:gridCol w="2148850"/>

--- a/Lecture slides/NYT C04 - Action Research.pptx
+++ b/Lecture slides/NYT C04 - Action Research.pptx
@@ -743,7 +743,7 @@
   <p:cSld>
     <p:spTree>
       <p:nvGrpSpPr>
-        <p:cNvPr id="33" name="Shape 33"/>
+        <p:cNvPr id="32" name="Shape 32"/>
         <p:cNvGrpSpPr/>
         <p:nvPr/>
       </p:nvGrpSpPr>
@@ -757,7 +757,7 @@
       </p:grpSpPr>
       <p:sp>
         <p:nvSpPr>
-          <p:cNvPr id="34" name="Google Shape;34;g2c3601aed9a_0_188:notes"/>
+          <p:cNvPr id="33" name="Google Shape;33;g2c3601aed9a_0_188:notes"/>
           <p:cNvSpPr/>
           <p:nvPr>
             <p:ph idx="2" type="sldImg"/>
@@ -792,7 +792,7 @@
       </p:sp>
       <p:sp>
         <p:nvSpPr>
-          <p:cNvPr id="35" name="Google Shape;35;g2c3601aed9a_0_188:notes"/>
+          <p:cNvPr id="34" name="Google Shape;34;g2c3601aed9a_0_188:notes"/>
           <p:cNvSpPr txBox="1"/>
           <p:nvPr>
             <p:ph idx="1" type="body"/>
@@ -842,7 +842,7 @@
   <p:cSld>
     <p:spTree>
       <p:nvGrpSpPr>
-        <p:cNvPr id="95" name="Shape 95"/>
+        <p:cNvPr id="94" name="Shape 94"/>
         <p:cNvGrpSpPr/>
         <p:nvPr/>
       </p:nvGrpSpPr>
@@ -856,7 +856,7 @@
       </p:grpSpPr>
       <p:sp>
         <p:nvSpPr>
-          <p:cNvPr id="96" name="Google Shape;96;g124ad2ef21c_0_41:notes"/>
+          <p:cNvPr id="95" name="Google Shape;95;g124ad2ef21c_0_41:notes"/>
           <p:cNvSpPr/>
           <p:nvPr>
             <p:ph idx="2" type="sldImg"/>
@@ -891,7 +891,7 @@
       </p:sp>
       <p:sp>
         <p:nvSpPr>
-          <p:cNvPr id="97" name="Google Shape;97;g124ad2ef21c_0_41:notes"/>
+          <p:cNvPr id="96" name="Google Shape;96;g124ad2ef21c_0_41:notes"/>
           <p:cNvSpPr txBox="1"/>
           <p:nvPr>
             <p:ph idx="1" type="body"/>
@@ -941,7 +941,7 @@
   <p:cSld>
     <p:spTree>
       <p:nvGrpSpPr>
-        <p:cNvPr id="102" name="Shape 102"/>
+        <p:cNvPr id="101" name="Shape 101"/>
         <p:cNvGrpSpPr/>
         <p:nvPr/>
       </p:nvGrpSpPr>
@@ -955,7 +955,7 @@
       </p:grpSpPr>
       <p:sp>
         <p:nvSpPr>
-          <p:cNvPr id="103" name="Google Shape;103;g2179b616e8b_0_0:notes"/>
+          <p:cNvPr id="102" name="Google Shape;102;g2179b616e8b_0_0:notes"/>
           <p:cNvSpPr/>
           <p:nvPr>
             <p:ph idx="2" type="sldImg"/>
@@ -990,7 +990,7 @@
       </p:sp>
       <p:sp>
         <p:nvSpPr>
-          <p:cNvPr id="104" name="Google Shape;104;g2179b616e8b_0_0:notes"/>
+          <p:cNvPr id="103" name="Google Shape;103;g2179b616e8b_0_0:notes"/>
           <p:cNvSpPr txBox="1"/>
           <p:nvPr>
             <p:ph idx="1" type="body"/>
@@ -1040,7 +1040,7 @@
   <p:cSld>
     <p:spTree>
       <p:nvGrpSpPr>
-        <p:cNvPr id="110" name="Shape 110"/>
+        <p:cNvPr id="109" name="Shape 109"/>
         <p:cNvGrpSpPr/>
         <p:nvPr/>
       </p:nvGrpSpPr>
@@ -1054,7 +1054,7 @@
       </p:grpSpPr>
       <p:sp>
         <p:nvSpPr>
-          <p:cNvPr id="111" name="Google Shape;111;g11bb148f78e_0_25:notes"/>
+          <p:cNvPr id="110" name="Google Shape;110;g11bb148f78e_0_25:notes"/>
           <p:cNvSpPr/>
           <p:nvPr>
             <p:ph idx="2" type="sldImg"/>
@@ -1089,7 +1089,7 @@
       </p:sp>
       <p:sp>
         <p:nvSpPr>
-          <p:cNvPr id="112" name="Google Shape;112;g11bb148f78e_0_25:notes"/>
+          <p:cNvPr id="111" name="Google Shape;111;g11bb148f78e_0_25:notes"/>
           <p:cNvSpPr txBox="1"/>
           <p:nvPr>
             <p:ph idx="1" type="body"/>
@@ -1139,7 +1139,7 @@
   <p:cSld>
     <p:spTree>
       <p:nvGrpSpPr>
-        <p:cNvPr id="117" name="Shape 117"/>
+        <p:cNvPr id="116" name="Shape 116"/>
         <p:cNvGrpSpPr/>
         <p:nvPr/>
       </p:nvGrpSpPr>
@@ -1153,7 +1153,7 @@
       </p:grpSpPr>
       <p:sp>
         <p:nvSpPr>
-          <p:cNvPr id="118" name="Google Shape;118;g133abade362_0_43:notes"/>
+          <p:cNvPr id="117" name="Google Shape;117;g133abade362_0_43:notes"/>
           <p:cNvSpPr/>
           <p:nvPr>
             <p:ph idx="2" type="sldImg"/>
@@ -1188,7 +1188,7 @@
       </p:sp>
       <p:sp>
         <p:nvSpPr>
-          <p:cNvPr id="119" name="Google Shape;119;g133abade362_0_43:notes"/>
+          <p:cNvPr id="118" name="Google Shape;118;g133abade362_0_43:notes"/>
           <p:cNvSpPr txBox="1"/>
           <p:nvPr>
             <p:ph idx="1" type="body"/>
@@ -1238,7 +1238,7 @@
   <p:cSld>
     <p:spTree>
       <p:nvGrpSpPr>
-        <p:cNvPr id="124" name="Shape 124"/>
+        <p:cNvPr id="123" name="Shape 123"/>
         <p:cNvGrpSpPr/>
         <p:nvPr/>
       </p:nvGrpSpPr>
@@ -1252,7 +1252,7 @@
       </p:grpSpPr>
       <p:sp>
         <p:nvSpPr>
-          <p:cNvPr id="125" name="Google Shape;125;g11bb148f78e_0_0:notes"/>
+          <p:cNvPr id="124" name="Google Shape;124;g11bb148f78e_0_0:notes"/>
           <p:cNvSpPr/>
           <p:nvPr>
             <p:ph idx="2" type="sldImg"/>
@@ -1287,7 +1287,7 @@
       </p:sp>
       <p:sp>
         <p:nvSpPr>
-          <p:cNvPr id="126" name="Google Shape;126;g11bb148f78e_0_0:notes"/>
+          <p:cNvPr id="125" name="Google Shape;125;g11bb148f78e_0_0:notes"/>
           <p:cNvSpPr txBox="1"/>
           <p:nvPr>
             <p:ph idx="1" type="body"/>
@@ -1337,7 +1337,7 @@
   <p:cSld>
     <p:spTree>
       <p:nvGrpSpPr>
-        <p:cNvPr id="129" name="Shape 129"/>
+        <p:cNvPr id="128" name="Shape 128"/>
         <p:cNvGrpSpPr/>
         <p:nvPr/>
       </p:nvGrpSpPr>
@@ -1351,7 +1351,7 @@
       </p:grpSpPr>
       <p:sp>
         <p:nvSpPr>
-          <p:cNvPr id="130" name="Google Shape;130;g11bb148f78e_0_12:notes"/>
+          <p:cNvPr id="129" name="Google Shape;129;g11bb148f78e_0_12:notes"/>
           <p:cNvSpPr/>
           <p:nvPr>
             <p:ph idx="2" type="sldImg"/>
@@ -1386,7 +1386,7 @@
       </p:sp>
       <p:sp>
         <p:nvSpPr>
-          <p:cNvPr id="131" name="Google Shape;131;g11bb148f78e_0_12:notes"/>
+          <p:cNvPr id="130" name="Google Shape;130;g11bb148f78e_0_12:notes"/>
           <p:cNvSpPr txBox="1"/>
           <p:nvPr>
             <p:ph idx="1" type="body"/>
@@ -1436,7 +1436,7 @@
   <p:cSld>
     <p:spTree>
       <p:nvGrpSpPr>
-        <p:cNvPr id="137" name="Shape 137"/>
+        <p:cNvPr id="136" name="Shape 136"/>
         <p:cNvGrpSpPr/>
         <p:nvPr/>
       </p:nvGrpSpPr>
@@ -1450,7 +1450,7 @@
       </p:grpSpPr>
       <p:sp>
         <p:nvSpPr>
-          <p:cNvPr id="138" name="Google Shape;138;g11bb148f78e_0_18:notes"/>
+          <p:cNvPr id="137" name="Google Shape;137;g11bb148f78e_0_18:notes"/>
           <p:cNvSpPr/>
           <p:nvPr>
             <p:ph idx="2" type="sldImg"/>
@@ -1485,7 +1485,7 @@
       </p:sp>
       <p:sp>
         <p:nvSpPr>
-          <p:cNvPr id="139" name="Google Shape;139;g11bb148f78e_0_18:notes"/>
+          <p:cNvPr id="138" name="Google Shape;138;g11bb148f78e_0_18:notes"/>
           <p:cNvSpPr txBox="1"/>
           <p:nvPr>
             <p:ph idx="1" type="body"/>
@@ -1535,7 +1535,7 @@
   <p:cSld>
     <p:spTree>
       <p:nvGrpSpPr>
-        <p:cNvPr id="145" name="Shape 145"/>
+        <p:cNvPr id="144" name="Shape 144"/>
         <p:cNvGrpSpPr/>
         <p:nvPr/>
       </p:nvGrpSpPr>
@@ -1549,7 +1549,7 @@
       </p:grpSpPr>
       <p:sp>
         <p:nvSpPr>
-          <p:cNvPr id="146" name="Google Shape;146;g133abade362_0_18:notes"/>
+          <p:cNvPr id="145" name="Google Shape;145;g133abade362_0_18:notes"/>
           <p:cNvSpPr/>
           <p:nvPr>
             <p:ph idx="2" type="sldImg"/>
@@ -1584,7 +1584,7 @@
       </p:sp>
       <p:sp>
         <p:nvSpPr>
-          <p:cNvPr id="147" name="Google Shape;147;g133abade362_0_18:notes"/>
+          <p:cNvPr id="146" name="Google Shape;146;g133abade362_0_18:notes"/>
           <p:cNvSpPr txBox="1"/>
           <p:nvPr>
             <p:ph idx="1" type="body"/>
@@ -1634,7 +1634,7 @@
   <p:cSld>
     <p:spTree>
       <p:nvGrpSpPr>
-        <p:cNvPr id="152" name="Shape 152"/>
+        <p:cNvPr id="151" name="Shape 151"/>
         <p:cNvGrpSpPr/>
         <p:nvPr/>
       </p:nvGrpSpPr>
@@ -1648,7 +1648,7 @@
       </p:grpSpPr>
       <p:sp>
         <p:nvSpPr>
-          <p:cNvPr id="153" name="Google Shape;153;g2179b616e8b_0_9:notes"/>
+          <p:cNvPr id="152" name="Google Shape;152;g2179b616e8b_0_9:notes"/>
           <p:cNvSpPr/>
           <p:nvPr>
             <p:ph idx="2" type="sldImg"/>
@@ -1683,7 +1683,7 @@
       </p:sp>
       <p:sp>
         <p:nvSpPr>
-          <p:cNvPr id="154" name="Google Shape;154;g2179b616e8b_0_9:notes"/>
+          <p:cNvPr id="153" name="Google Shape;153;g2179b616e8b_0_9:notes"/>
           <p:cNvSpPr txBox="1"/>
           <p:nvPr>
             <p:ph idx="1" type="body"/>
@@ -1733,7 +1733,7 @@
   <p:cSld>
     <p:spTree>
       <p:nvGrpSpPr>
-        <p:cNvPr id="159" name="Shape 159"/>
+        <p:cNvPr id="158" name="Shape 158"/>
         <p:cNvGrpSpPr/>
         <p:nvPr/>
       </p:nvGrpSpPr>
@@ -1747,7 +1747,7 @@
       </p:grpSpPr>
       <p:sp>
         <p:nvSpPr>
-          <p:cNvPr id="160" name="Google Shape;160;g133abade362_0_36:notes"/>
+          <p:cNvPr id="159" name="Google Shape;159;g133abade362_0_36:notes"/>
           <p:cNvSpPr/>
           <p:nvPr>
             <p:ph idx="2" type="sldImg"/>
@@ -1782,7 +1782,7 @@
       </p:sp>
       <p:sp>
         <p:nvSpPr>
-          <p:cNvPr id="161" name="Google Shape;161;g133abade362_0_36:notes"/>
+          <p:cNvPr id="160" name="Google Shape;160;g133abade362_0_36:notes"/>
           <p:cNvSpPr txBox="1"/>
           <p:nvPr>
             <p:ph idx="1" type="body"/>
@@ -1832,7 +1832,7 @@
   <p:cSld>
     <p:spTree>
       <p:nvGrpSpPr>
-        <p:cNvPr id="39" name="Shape 39"/>
+        <p:cNvPr id="38" name="Shape 38"/>
         <p:cNvGrpSpPr/>
         <p:nvPr/>
       </p:nvGrpSpPr>
@@ -1846,7 +1846,7 @@
       </p:grpSpPr>
       <p:sp>
         <p:nvSpPr>
-          <p:cNvPr id="40" name="Google Shape;40;g127e14a2292_0_0:notes"/>
+          <p:cNvPr id="39" name="Google Shape;39;g127e14a2292_0_0:notes"/>
           <p:cNvSpPr/>
           <p:nvPr>
             <p:ph idx="2" type="sldImg"/>
@@ -1881,7 +1881,7 @@
       </p:sp>
       <p:sp>
         <p:nvSpPr>
-          <p:cNvPr id="41" name="Google Shape;41;g127e14a2292_0_0:notes"/>
+          <p:cNvPr id="40" name="Google Shape;40;g127e14a2292_0_0:notes"/>
           <p:cNvSpPr txBox="1"/>
           <p:nvPr>
             <p:ph idx="1" type="body"/>
@@ -1931,7 +1931,7 @@
   <p:cSld>
     <p:spTree>
       <p:nvGrpSpPr>
-        <p:cNvPr id="167" name="Shape 167"/>
+        <p:cNvPr id="166" name="Shape 166"/>
         <p:cNvGrpSpPr/>
         <p:nvPr/>
       </p:nvGrpSpPr>
@@ -1945,7 +1945,7 @@
       </p:grpSpPr>
       <p:sp>
         <p:nvSpPr>
-          <p:cNvPr id="168" name="Google Shape;168;g133be5e16e8_0_26:notes"/>
+          <p:cNvPr id="167" name="Google Shape;167;g133be5e16e8_0_26:notes"/>
           <p:cNvSpPr/>
           <p:nvPr>
             <p:ph idx="2" type="sldImg"/>
@@ -1980,7 +1980,7 @@
       </p:sp>
       <p:sp>
         <p:nvSpPr>
-          <p:cNvPr id="169" name="Google Shape;169;g133be5e16e8_0_26:notes"/>
+          <p:cNvPr id="168" name="Google Shape;168;g133be5e16e8_0_26:notes"/>
           <p:cNvSpPr txBox="1"/>
           <p:nvPr>
             <p:ph idx="1" type="body"/>
@@ -2030,7 +2030,7 @@
   <p:cSld>
     <p:spTree>
       <p:nvGrpSpPr>
-        <p:cNvPr id="174" name="Shape 174"/>
+        <p:cNvPr id="173" name="Shape 173"/>
         <p:cNvGrpSpPr/>
         <p:nvPr/>
       </p:nvGrpSpPr>
@@ -2044,7 +2044,7 @@
       </p:grpSpPr>
       <p:sp>
         <p:nvSpPr>
-          <p:cNvPr id="175" name="Google Shape;175;g133be5e16e8_0_0:notes"/>
+          <p:cNvPr id="174" name="Google Shape;174;g133be5e16e8_0_0:notes"/>
           <p:cNvSpPr/>
           <p:nvPr>
             <p:ph idx="2" type="sldImg"/>
@@ -2079,7 +2079,7 @@
       </p:sp>
       <p:sp>
         <p:nvSpPr>
-          <p:cNvPr id="176" name="Google Shape;176;g133be5e16e8_0_0:notes"/>
+          <p:cNvPr id="175" name="Google Shape;175;g133be5e16e8_0_0:notes"/>
           <p:cNvSpPr txBox="1"/>
           <p:nvPr>
             <p:ph idx="1" type="body"/>
@@ -2129,7 +2129,7 @@
   <p:cSld>
     <p:spTree>
       <p:nvGrpSpPr>
-        <p:cNvPr id="182" name="Shape 182"/>
+        <p:cNvPr id="181" name="Shape 181"/>
         <p:cNvGrpSpPr/>
         <p:nvPr/>
       </p:nvGrpSpPr>
@@ -2143,7 +2143,7 @@
       </p:grpSpPr>
       <p:sp>
         <p:nvSpPr>
-          <p:cNvPr id="183" name="Google Shape;183;g2c3601aed9a_0_17:notes"/>
+          <p:cNvPr id="182" name="Google Shape;182;g2c3601aed9a_0_17:notes"/>
           <p:cNvSpPr/>
           <p:nvPr>
             <p:ph idx="2" type="sldImg"/>
@@ -2178,7 +2178,7 @@
       </p:sp>
       <p:sp>
         <p:nvSpPr>
-          <p:cNvPr id="184" name="Google Shape;184;g2c3601aed9a_0_17:notes"/>
+          <p:cNvPr id="183" name="Google Shape;183;g2c3601aed9a_0_17:notes"/>
           <p:cNvSpPr txBox="1"/>
           <p:nvPr>
             <p:ph idx="1" type="body"/>
@@ -2228,7 +2228,7 @@
   <p:cSld>
     <p:spTree>
       <p:nvGrpSpPr>
-        <p:cNvPr id="187" name="Shape 187"/>
+        <p:cNvPr id="186" name="Shape 186"/>
         <p:cNvGrpSpPr/>
         <p:nvPr/>
       </p:nvGrpSpPr>
@@ -2242,7 +2242,7 @@
       </p:grpSpPr>
       <p:sp>
         <p:nvSpPr>
-          <p:cNvPr id="188" name="Google Shape;188;gf428e7a1d1_0_19:notes"/>
+          <p:cNvPr id="187" name="Google Shape;187;gf428e7a1d1_0_19:notes"/>
           <p:cNvSpPr/>
           <p:nvPr>
             <p:ph idx="2" type="sldImg"/>
@@ -2277,7 +2277,7 @@
       </p:sp>
       <p:sp>
         <p:nvSpPr>
-          <p:cNvPr id="189" name="Google Shape;189;gf428e7a1d1_0_19:notes"/>
+          <p:cNvPr id="188" name="Google Shape;188;gf428e7a1d1_0_19:notes"/>
           <p:cNvSpPr txBox="1"/>
           <p:nvPr>
             <p:ph idx="1" type="body"/>
@@ -2327,7 +2327,7 @@
   <p:cSld>
     <p:spTree>
       <p:nvGrpSpPr>
-        <p:cNvPr id="194" name="Shape 194"/>
+        <p:cNvPr id="193" name="Shape 193"/>
         <p:cNvGrpSpPr/>
         <p:nvPr/>
       </p:nvGrpSpPr>
@@ -2341,7 +2341,7 @@
       </p:grpSpPr>
       <p:sp>
         <p:nvSpPr>
-          <p:cNvPr id="195" name="Google Shape;195;gf428e7a1d1_0_1:notes"/>
+          <p:cNvPr id="194" name="Google Shape;194;gf428e7a1d1_0_1:notes"/>
           <p:cNvSpPr/>
           <p:nvPr>
             <p:ph idx="2" type="sldImg"/>
@@ -2376,7 +2376,7 @@
       </p:sp>
       <p:sp>
         <p:nvSpPr>
-          <p:cNvPr id="196" name="Google Shape;196;gf428e7a1d1_0_1:notes"/>
+          <p:cNvPr id="195" name="Google Shape;195;gf428e7a1d1_0_1:notes"/>
           <p:cNvSpPr txBox="1"/>
           <p:nvPr>
             <p:ph idx="1" type="body"/>
@@ -2426,7 +2426,7 @@
   <p:cSld>
     <p:spTree>
       <p:nvGrpSpPr>
-        <p:cNvPr id="202" name="Shape 202"/>
+        <p:cNvPr id="200" name="Shape 200"/>
         <p:cNvGrpSpPr/>
         <p:nvPr/>
       </p:nvGrpSpPr>
@@ -2440,7 +2440,7 @@
       </p:grpSpPr>
       <p:sp>
         <p:nvSpPr>
-          <p:cNvPr id="203" name="Google Shape;203;g2c3601aed9a_0_51:notes"/>
+          <p:cNvPr id="201" name="Google Shape;201;g2c3601aed9a_0_51:notes"/>
           <p:cNvSpPr/>
           <p:nvPr>
             <p:ph idx="2" type="sldImg"/>
@@ -2475,7 +2475,7 @@
       </p:sp>
       <p:sp>
         <p:nvSpPr>
-          <p:cNvPr id="204" name="Google Shape;204;g2c3601aed9a_0_51:notes"/>
+          <p:cNvPr id="202" name="Google Shape;202;g2c3601aed9a_0_51:notes"/>
           <p:cNvSpPr txBox="1"/>
           <p:nvPr>
             <p:ph idx="1" type="body"/>
@@ -2525,7 +2525,7 @@
   <p:cSld>
     <p:spTree>
       <p:nvGrpSpPr>
-        <p:cNvPr id="207" name="Shape 207"/>
+        <p:cNvPr id="205" name="Shape 205"/>
         <p:cNvGrpSpPr/>
         <p:nvPr/>
       </p:nvGrpSpPr>
@@ -2539,7 +2539,7 @@
       </p:grpSpPr>
       <p:sp>
         <p:nvSpPr>
-          <p:cNvPr id="208" name="Google Shape;208;g2c3601aed9a_0_9:notes"/>
+          <p:cNvPr id="206" name="Google Shape;206;g2c3601aed9a_0_9:notes"/>
           <p:cNvSpPr/>
           <p:nvPr>
             <p:ph idx="2" type="sldImg"/>
@@ -2574,7 +2574,7 @@
       </p:sp>
       <p:sp>
         <p:nvSpPr>
-          <p:cNvPr id="209" name="Google Shape;209;g2c3601aed9a_0_9:notes"/>
+          <p:cNvPr id="207" name="Google Shape;207;g2c3601aed9a_0_9:notes"/>
           <p:cNvSpPr txBox="1"/>
           <p:nvPr>
             <p:ph idx="1" type="body"/>
@@ -2624,7 +2624,7 @@
   <p:cSld>
     <p:spTree>
       <p:nvGrpSpPr>
-        <p:cNvPr id="214" name="Shape 214"/>
+        <p:cNvPr id="212" name="Shape 212"/>
         <p:cNvGrpSpPr/>
         <p:nvPr/>
       </p:nvGrpSpPr>
@@ -2638,7 +2638,7 @@
       </p:grpSpPr>
       <p:sp>
         <p:nvSpPr>
-          <p:cNvPr id="215" name="Google Shape;215;g2c3601aed9a_0_45:notes"/>
+          <p:cNvPr id="213" name="Google Shape;213;g2c3601aed9a_0_45:notes"/>
           <p:cNvSpPr/>
           <p:nvPr>
             <p:ph idx="2" type="sldImg"/>
@@ -2673,7 +2673,7 @@
       </p:sp>
       <p:sp>
         <p:nvSpPr>
-          <p:cNvPr id="216" name="Google Shape;216;g2c3601aed9a_0_45:notes"/>
+          <p:cNvPr id="214" name="Google Shape;214;g2c3601aed9a_0_45:notes"/>
           <p:cNvSpPr txBox="1"/>
           <p:nvPr>
             <p:ph idx="1" type="body"/>
@@ -2723,7 +2723,7 @@
   <p:cSld>
     <p:spTree>
       <p:nvGrpSpPr>
-        <p:cNvPr id="221" name="Shape 221"/>
+        <p:cNvPr id="219" name="Shape 219"/>
         <p:cNvGrpSpPr/>
         <p:nvPr/>
       </p:nvGrpSpPr>
@@ -2737,7 +2737,7 @@
       </p:grpSpPr>
       <p:sp>
         <p:nvSpPr>
-          <p:cNvPr id="222" name="Google Shape;222;g2c3601aed9a_0_21:notes"/>
+          <p:cNvPr id="220" name="Google Shape;220;g2c3601aed9a_0_21:notes"/>
           <p:cNvSpPr/>
           <p:nvPr>
             <p:ph idx="2" type="sldImg"/>
@@ -2772,7 +2772,7 @@
       </p:sp>
       <p:sp>
         <p:nvSpPr>
-          <p:cNvPr id="223" name="Google Shape;223;g2c3601aed9a_0_21:notes"/>
+          <p:cNvPr id="221" name="Google Shape;221;g2c3601aed9a_0_21:notes"/>
           <p:cNvSpPr txBox="1"/>
           <p:nvPr>
             <p:ph idx="1" type="body"/>
@@ -2822,7 +2822,7 @@
   <p:cSld>
     <p:spTree>
       <p:nvGrpSpPr>
-        <p:cNvPr id="229" name="Shape 229"/>
+        <p:cNvPr id="227" name="Shape 227"/>
         <p:cNvGrpSpPr/>
         <p:nvPr/>
       </p:nvGrpSpPr>
@@ -2836,7 +2836,7 @@
       </p:grpSpPr>
       <p:sp>
         <p:nvSpPr>
-          <p:cNvPr id="230" name="Google Shape;230;g2c3601aed9a_0_32:notes"/>
+          <p:cNvPr id="228" name="Google Shape;228;g2c3601aed9a_0_32:notes"/>
           <p:cNvSpPr/>
           <p:nvPr>
             <p:ph idx="2" type="sldImg"/>
@@ -2871,7 +2871,7 @@
       </p:sp>
       <p:sp>
         <p:nvSpPr>
-          <p:cNvPr id="231" name="Google Shape;231;g2c3601aed9a_0_32:notes"/>
+          <p:cNvPr id="229" name="Google Shape;229;g2c3601aed9a_0_32:notes"/>
           <p:cNvSpPr txBox="1"/>
           <p:nvPr>
             <p:ph idx="1" type="body"/>
@@ -2921,7 +2921,7 @@
   <p:cSld>
     <p:spTree>
       <p:nvGrpSpPr>
-        <p:cNvPr id="46" name="Shape 46"/>
+        <p:cNvPr id="45" name="Shape 45"/>
         <p:cNvGrpSpPr/>
         <p:nvPr/>
       </p:nvGrpSpPr>
@@ -2935,7 +2935,7 @@
       </p:grpSpPr>
       <p:sp>
         <p:nvSpPr>
-          <p:cNvPr id="47" name="Google Shape;47;gf9bad1e87a_0_0:notes"/>
+          <p:cNvPr id="46" name="Google Shape;46;gf9bad1e87a_0_0:notes"/>
           <p:cNvSpPr/>
           <p:nvPr>
             <p:ph idx="2" type="sldImg"/>
@@ -2970,7 +2970,7 @@
       </p:sp>
       <p:sp>
         <p:nvSpPr>
-          <p:cNvPr id="48" name="Google Shape;48;gf9bad1e87a_0_0:notes"/>
+          <p:cNvPr id="47" name="Google Shape;47;gf9bad1e87a_0_0:notes"/>
           <p:cNvSpPr txBox="1"/>
           <p:nvPr>
             <p:ph idx="1" type="body"/>
@@ -3020,7 +3020,7 @@
   <p:cSld>
     <p:spTree>
       <p:nvGrpSpPr>
-        <p:cNvPr id="236" name="Shape 236"/>
+        <p:cNvPr id="234" name="Shape 234"/>
         <p:cNvGrpSpPr/>
         <p:nvPr/>
       </p:nvGrpSpPr>
@@ -3034,7 +3034,7 @@
       </p:grpSpPr>
       <p:sp>
         <p:nvSpPr>
-          <p:cNvPr id="237" name="Google Shape;237;g2c4bb9ecca5_0_0:notes"/>
+          <p:cNvPr id="235" name="Google Shape;235;g2c4bb9ecca5_0_0:notes"/>
           <p:cNvSpPr/>
           <p:nvPr>
             <p:ph idx="2" type="sldImg"/>
@@ -3069,7 +3069,7 @@
       </p:sp>
       <p:sp>
         <p:nvSpPr>
-          <p:cNvPr id="238" name="Google Shape;238;g2c4bb9ecca5_0_0:notes"/>
+          <p:cNvPr id="236" name="Google Shape;236;g2c4bb9ecca5_0_0:notes"/>
           <p:cNvSpPr txBox="1"/>
           <p:nvPr>
             <p:ph idx="1" type="body"/>
@@ -3119,7 +3119,7 @@
   <p:cSld>
     <p:spTree>
       <p:nvGrpSpPr>
-        <p:cNvPr id="243" name="Shape 243"/>
+        <p:cNvPr id="241" name="Shape 241"/>
         <p:cNvGrpSpPr/>
         <p:nvPr/>
       </p:nvGrpSpPr>
@@ -3133,7 +3133,7 @@
       </p:grpSpPr>
       <p:sp>
         <p:nvSpPr>
-          <p:cNvPr id="244" name="Google Shape;244;g2c7a6e2504f_0_0:notes"/>
+          <p:cNvPr id="242" name="Google Shape;242;g2c7a6e2504f_0_0:notes"/>
           <p:cNvSpPr/>
           <p:nvPr>
             <p:ph idx="2" type="sldImg"/>
@@ -3168,7 +3168,7 @@
       </p:sp>
       <p:sp>
         <p:nvSpPr>
-          <p:cNvPr id="245" name="Google Shape;245;g2c7a6e2504f_0_0:notes"/>
+          <p:cNvPr id="243" name="Google Shape;243;g2c7a6e2504f_0_0:notes"/>
           <p:cNvSpPr txBox="1"/>
           <p:nvPr>
             <p:ph idx="1" type="body"/>
@@ -3218,7 +3218,7 @@
   <p:cSld>
     <p:spTree>
       <p:nvGrpSpPr>
-        <p:cNvPr id="250" name="Shape 250"/>
+        <p:cNvPr id="248" name="Shape 248"/>
         <p:cNvGrpSpPr/>
         <p:nvPr/>
       </p:nvGrpSpPr>
@@ -3232,7 +3232,7 @@
       </p:grpSpPr>
       <p:sp>
         <p:nvSpPr>
-          <p:cNvPr id="251" name="Google Shape;251;g2c3601aed9a_0_4:notes"/>
+          <p:cNvPr id="249" name="Google Shape;249;g2c3601aed9a_0_4:notes"/>
           <p:cNvSpPr/>
           <p:nvPr>
             <p:ph idx="2" type="sldImg"/>
@@ -3267,7 +3267,7 @@
       </p:sp>
       <p:sp>
         <p:nvSpPr>
-          <p:cNvPr id="252" name="Google Shape;252;g2c3601aed9a_0_4:notes"/>
+          <p:cNvPr id="250" name="Google Shape;250;g2c3601aed9a_0_4:notes"/>
           <p:cNvSpPr txBox="1"/>
           <p:nvPr>
             <p:ph idx="1" type="body"/>
@@ -3317,7 +3317,7 @@
   <p:cSld>
     <p:spTree>
       <p:nvGrpSpPr>
-        <p:cNvPr id="255" name="Shape 255"/>
+        <p:cNvPr id="253" name="Shape 253"/>
         <p:cNvGrpSpPr/>
         <p:nvPr/>
       </p:nvGrpSpPr>
@@ -3331,7 +3331,7 @@
       </p:grpSpPr>
       <p:sp>
         <p:nvSpPr>
-          <p:cNvPr id="256" name="Google Shape;256;gf428e7a1d1_0_7:notes"/>
+          <p:cNvPr id="254" name="Google Shape;254;gf428e7a1d1_0_7:notes"/>
           <p:cNvSpPr/>
           <p:nvPr>
             <p:ph idx="2" type="sldImg"/>
@@ -3366,7 +3366,7 @@
       </p:sp>
       <p:sp>
         <p:nvSpPr>
-          <p:cNvPr id="257" name="Google Shape;257;gf428e7a1d1_0_7:notes"/>
+          <p:cNvPr id="255" name="Google Shape;255;gf428e7a1d1_0_7:notes"/>
           <p:cNvSpPr txBox="1"/>
           <p:nvPr>
             <p:ph idx="1" type="body"/>
@@ -3416,7 +3416,7 @@
   <p:cSld>
     <p:spTree>
       <p:nvGrpSpPr>
-        <p:cNvPr id="262" name="Shape 262"/>
+        <p:cNvPr id="260" name="Shape 260"/>
         <p:cNvGrpSpPr/>
         <p:nvPr/>
       </p:nvGrpSpPr>
@@ -3430,7 +3430,7 @@
       </p:grpSpPr>
       <p:sp>
         <p:nvSpPr>
-          <p:cNvPr id="263" name="Google Shape;263;gf428e7a1d1_0_13:notes"/>
+          <p:cNvPr id="261" name="Google Shape;261;gf428e7a1d1_0_13:notes"/>
           <p:cNvSpPr/>
           <p:nvPr>
             <p:ph idx="2" type="sldImg"/>
@@ -3465,7 +3465,7 @@
       </p:sp>
       <p:sp>
         <p:nvSpPr>
-          <p:cNvPr id="264" name="Google Shape;264;gf428e7a1d1_0_13:notes"/>
+          <p:cNvPr id="262" name="Google Shape;262;gf428e7a1d1_0_13:notes"/>
           <p:cNvSpPr txBox="1"/>
           <p:nvPr>
             <p:ph idx="1" type="body"/>
@@ -3515,7 +3515,7 @@
   <p:cSld>
     <p:spTree>
       <p:nvGrpSpPr>
-        <p:cNvPr id="269" name="Shape 269"/>
+        <p:cNvPr id="267" name="Shape 267"/>
         <p:cNvGrpSpPr/>
         <p:nvPr/>
       </p:nvGrpSpPr>
@@ -3529,7 +3529,7 @@
       </p:grpSpPr>
       <p:sp>
         <p:nvSpPr>
-          <p:cNvPr id="270" name="Google Shape;270;g2c3601aed9a_0_78:notes"/>
+          <p:cNvPr id="268" name="Google Shape;268;g2c3601aed9a_0_78:notes"/>
           <p:cNvSpPr/>
           <p:nvPr>
             <p:ph idx="2" type="sldImg"/>
@@ -3564,7 +3564,7 @@
       </p:sp>
       <p:sp>
         <p:nvSpPr>
-          <p:cNvPr id="271" name="Google Shape;271;g2c3601aed9a_0_78:notes"/>
+          <p:cNvPr id="269" name="Google Shape;269;g2c3601aed9a_0_78:notes"/>
           <p:cNvSpPr txBox="1"/>
           <p:nvPr>
             <p:ph idx="1" type="body"/>
@@ -3614,7 +3614,7 @@
   <p:cSld>
     <p:spTree>
       <p:nvGrpSpPr>
-        <p:cNvPr id="277" name="Shape 277"/>
+        <p:cNvPr id="274" name="Shape 274"/>
         <p:cNvGrpSpPr/>
         <p:nvPr/>
       </p:nvGrpSpPr>
@@ -3628,7 +3628,7 @@
       </p:grpSpPr>
       <p:sp>
         <p:nvSpPr>
-          <p:cNvPr id="278" name="Google Shape;278;g133be5e16e8_0_8:notes"/>
+          <p:cNvPr id="275" name="Google Shape;275;g133be5e16e8_0_8:notes"/>
           <p:cNvSpPr/>
           <p:nvPr>
             <p:ph idx="2" type="sldImg"/>
@@ -3663,7 +3663,7 @@
       </p:sp>
       <p:sp>
         <p:nvSpPr>
-          <p:cNvPr id="279" name="Google Shape;279;g133be5e16e8_0_8:notes"/>
+          <p:cNvPr id="276" name="Google Shape;276;g133be5e16e8_0_8:notes"/>
           <p:cNvSpPr txBox="1"/>
           <p:nvPr>
             <p:ph idx="1" type="body"/>
@@ -3713,7 +3713,7 @@
   <p:cSld>
     <p:spTree>
       <p:nvGrpSpPr>
-        <p:cNvPr id="284" name="Shape 284"/>
+        <p:cNvPr id="281" name="Shape 281"/>
         <p:cNvGrpSpPr/>
         <p:nvPr/>
       </p:nvGrpSpPr>
@@ -3727,7 +3727,7 @@
       </p:grpSpPr>
       <p:sp>
         <p:nvSpPr>
-          <p:cNvPr id="285" name="Google Shape;285;g133be5e16e8_0_40:notes"/>
+          <p:cNvPr id="282" name="Google Shape;282;g133be5e16e8_0_40:notes"/>
           <p:cNvSpPr/>
           <p:nvPr>
             <p:ph idx="2" type="sldImg"/>
@@ -3762,7 +3762,7 @@
       </p:sp>
       <p:sp>
         <p:nvSpPr>
-          <p:cNvPr id="286" name="Google Shape;286;g133be5e16e8_0_40:notes"/>
+          <p:cNvPr id="283" name="Google Shape;283;g133be5e16e8_0_40:notes"/>
           <p:cNvSpPr txBox="1"/>
           <p:nvPr>
             <p:ph idx="1" type="body"/>
@@ -3812,7 +3812,7 @@
   <p:cSld>
     <p:spTree>
       <p:nvGrpSpPr>
-        <p:cNvPr id="291" name="Shape 291"/>
+        <p:cNvPr id="288" name="Shape 288"/>
         <p:cNvGrpSpPr/>
         <p:nvPr/>
       </p:nvGrpSpPr>
@@ -3826,7 +3826,7 @@
       </p:grpSpPr>
       <p:sp>
         <p:nvSpPr>
-          <p:cNvPr id="292" name="Google Shape;292;g2c3601aed9a_0_86:notes"/>
+          <p:cNvPr id="289" name="Google Shape;289;g2c3601aed9a_0_86:notes"/>
           <p:cNvSpPr/>
           <p:nvPr>
             <p:ph idx="2" type="sldImg"/>
@@ -3861,7 +3861,7 @@
       </p:sp>
       <p:sp>
         <p:nvSpPr>
-          <p:cNvPr id="293" name="Google Shape;293;g2c3601aed9a_0_86:notes"/>
+          <p:cNvPr id="290" name="Google Shape;290;g2c3601aed9a_0_86:notes"/>
           <p:cNvSpPr txBox="1"/>
           <p:nvPr>
             <p:ph idx="1" type="body"/>
@@ -3911,7 +3911,7 @@
   <p:cSld>
     <p:spTree>
       <p:nvGrpSpPr>
-        <p:cNvPr id="299" name="Shape 299"/>
+        <p:cNvPr id="295" name="Shape 295"/>
         <p:cNvGrpSpPr/>
         <p:nvPr/>
       </p:nvGrpSpPr>
@@ -3925,7 +3925,7 @@
       </p:grpSpPr>
       <p:sp>
         <p:nvSpPr>
-          <p:cNvPr id="300" name="Google Shape;300;g133abade362_0_12:notes"/>
+          <p:cNvPr id="296" name="Google Shape;296;g133abade362_0_12:notes"/>
           <p:cNvSpPr/>
           <p:nvPr>
             <p:ph idx="2" type="sldImg"/>
@@ -3960,7 +3960,7 @@
       </p:sp>
       <p:sp>
         <p:nvSpPr>
-          <p:cNvPr id="301" name="Google Shape;301;g133abade362_0_12:notes"/>
+          <p:cNvPr id="297" name="Google Shape;297;g133abade362_0_12:notes"/>
           <p:cNvSpPr txBox="1"/>
           <p:nvPr>
             <p:ph idx="1" type="body"/>
@@ -4010,7 +4010,7 @@
   <p:cSld>
     <p:spTree>
       <p:nvGrpSpPr>
-        <p:cNvPr id="51" name="Shape 51"/>
+        <p:cNvPr id="50" name="Shape 50"/>
         <p:cNvGrpSpPr/>
         <p:nvPr/>
       </p:nvGrpSpPr>
@@ -4024,7 +4024,7 @@
       </p:grpSpPr>
       <p:sp>
         <p:nvSpPr>
-          <p:cNvPr id="52" name="Google Shape;52;g127e14a2292_0_6:notes"/>
+          <p:cNvPr id="51" name="Google Shape;51;g127e14a2292_0_6:notes"/>
           <p:cNvSpPr/>
           <p:nvPr>
             <p:ph idx="2" type="sldImg"/>
@@ -4059,7 +4059,7 @@
       </p:sp>
       <p:sp>
         <p:nvSpPr>
-          <p:cNvPr id="53" name="Google Shape;53;g127e14a2292_0_6:notes"/>
+          <p:cNvPr id="52" name="Google Shape;52;g127e14a2292_0_6:notes"/>
           <p:cNvSpPr txBox="1"/>
           <p:nvPr>
             <p:ph idx="1" type="body"/>
@@ -4109,7 +4109,7 @@
   <p:cSld>
     <p:spTree>
       <p:nvGrpSpPr>
-        <p:cNvPr id="306" name="Shape 306"/>
+        <p:cNvPr id="302" name="Shape 302"/>
         <p:cNvGrpSpPr/>
         <p:nvPr/>
       </p:nvGrpSpPr>
@@ -4123,7 +4123,7 @@
       </p:grpSpPr>
       <p:sp>
         <p:nvSpPr>
-          <p:cNvPr id="307" name="Google Shape;307;g133be5e16e8_0_46:notes"/>
+          <p:cNvPr id="303" name="Google Shape;303;g133be5e16e8_0_46:notes"/>
           <p:cNvSpPr/>
           <p:nvPr>
             <p:ph idx="2" type="sldImg"/>
@@ -4158,7 +4158,7 @@
       </p:sp>
       <p:sp>
         <p:nvSpPr>
-          <p:cNvPr id="308" name="Google Shape;308;g133be5e16e8_0_46:notes"/>
+          <p:cNvPr id="304" name="Google Shape;304;g133be5e16e8_0_46:notes"/>
           <p:cNvSpPr txBox="1"/>
           <p:nvPr>
             <p:ph idx="1" type="body"/>
@@ -4208,7 +4208,7 @@
   <p:cSld>
     <p:spTree>
       <p:nvGrpSpPr>
-        <p:cNvPr id="313" name="Shape 313"/>
+        <p:cNvPr id="309" name="Shape 309"/>
         <p:cNvGrpSpPr/>
         <p:nvPr/>
       </p:nvGrpSpPr>
@@ -4222,7 +4222,7 @@
       </p:grpSpPr>
       <p:sp>
         <p:nvSpPr>
-          <p:cNvPr id="314" name="Google Shape;314;g2c3601aed9a_0_94:notes"/>
+          <p:cNvPr id="310" name="Google Shape;310;g2c3601aed9a_0_94:notes"/>
           <p:cNvSpPr/>
           <p:nvPr>
             <p:ph idx="2" type="sldImg"/>
@@ -4257,7 +4257,7 @@
       </p:sp>
       <p:sp>
         <p:nvSpPr>
-          <p:cNvPr id="315" name="Google Shape;315;g2c3601aed9a_0_94:notes"/>
+          <p:cNvPr id="311" name="Google Shape;311;g2c3601aed9a_0_94:notes"/>
           <p:cNvSpPr txBox="1"/>
           <p:nvPr>
             <p:ph idx="1" type="body"/>
@@ -4307,7 +4307,7 @@
   <p:cSld>
     <p:spTree>
       <p:nvGrpSpPr>
-        <p:cNvPr id="321" name="Shape 321"/>
+        <p:cNvPr id="316" name="Shape 316"/>
         <p:cNvGrpSpPr/>
         <p:nvPr/>
       </p:nvGrpSpPr>
@@ -4321,7 +4321,7 @@
       </p:grpSpPr>
       <p:sp>
         <p:nvSpPr>
-          <p:cNvPr id="322" name="Google Shape;322;g133be5e16e8_0_14:notes"/>
+          <p:cNvPr id="317" name="Google Shape;317;g133be5e16e8_0_14:notes"/>
           <p:cNvSpPr/>
           <p:nvPr>
             <p:ph idx="2" type="sldImg"/>
@@ -4356,7 +4356,7 @@
       </p:sp>
       <p:sp>
         <p:nvSpPr>
-          <p:cNvPr id="323" name="Google Shape;323;g133be5e16e8_0_14:notes"/>
+          <p:cNvPr id="318" name="Google Shape;318;g133be5e16e8_0_14:notes"/>
           <p:cNvSpPr txBox="1"/>
           <p:nvPr>
             <p:ph idx="1" type="body"/>
@@ -4406,7 +4406,7 @@
   <p:cSld>
     <p:spTree>
       <p:nvGrpSpPr>
-        <p:cNvPr id="328" name="Shape 328"/>
+        <p:cNvPr id="323" name="Shape 323"/>
         <p:cNvGrpSpPr/>
         <p:nvPr/>
       </p:nvGrpSpPr>
@@ -4420,7 +4420,7 @@
       </p:grpSpPr>
       <p:sp>
         <p:nvSpPr>
-          <p:cNvPr id="329" name="Google Shape;329;g133be5e16e8_0_52:notes"/>
+          <p:cNvPr id="324" name="Google Shape;324;g133be5e16e8_0_52:notes"/>
           <p:cNvSpPr/>
           <p:nvPr>
             <p:ph idx="2" type="sldImg"/>
@@ -4455,7 +4455,7 @@
       </p:sp>
       <p:sp>
         <p:nvSpPr>
-          <p:cNvPr id="330" name="Google Shape;330;g133be5e16e8_0_52:notes"/>
+          <p:cNvPr id="325" name="Google Shape;325;g133be5e16e8_0_52:notes"/>
           <p:cNvSpPr txBox="1"/>
           <p:nvPr>
             <p:ph idx="1" type="body"/>
@@ -4505,7 +4505,7 @@
   <p:cSld>
     <p:spTree>
       <p:nvGrpSpPr>
-        <p:cNvPr id="335" name="Shape 335"/>
+        <p:cNvPr id="330" name="Shape 330"/>
         <p:cNvGrpSpPr/>
         <p:nvPr/>
       </p:nvGrpSpPr>
@@ -4519,7 +4519,7 @@
       </p:grpSpPr>
       <p:sp>
         <p:nvSpPr>
-          <p:cNvPr id="336" name="Google Shape;336;g2c3601aed9a_0_102:notes"/>
+          <p:cNvPr id="331" name="Google Shape;331;g2c3601aed9a_0_102:notes"/>
           <p:cNvSpPr/>
           <p:nvPr>
             <p:ph idx="2" type="sldImg"/>
@@ -4554,7 +4554,7 @@
       </p:sp>
       <p:sp>
         <p:nvSpPr>
-          <p:cNvPr id="337" name="Google Shape;337;g2c3601aed9a_0_102:notes"/>
+          <p:cNvPr id="332" name="Google Shape;332;g2c3601aed9a_0_102:notes"/>
           <p:cNvSpPr txBox="1"/>
           <p:nvPr>
             <p:ph idx="1" type="body"/>
@@ -4604,7 +4604,7 @@
   <p:cSld>
     <p:spTree>
       <p:nvGrpSpPr>
-        <p:cNvPr id="343" name="Shape 343"/>
+        <p:cNvPr id="337" name="Shape 337"/>
         <p:cNvGrpSpPr/>
         <p:nvPr/>
       </p:nvGrpSpPr>
@@ -4618,7 +4618,7 @@
       </p:grpSpPr>
       <p:sp>
         <p:nvSpPr>
-          <p:cNvPr id="344" name="Google Shape;344;g133be5e16e8_0_20:notes"/>
+          <p:cNvPr id="338" name="Google Shape;338;g133be5e16e8_0_20:notes"/>
           <p:cNvSpPr/>
           <p:nvPr>
             <p:ph idx="2" type="sldImg"/>
@@ -4653,7 +4653,7 @@
       </p:sp>
       <p:sp>
         <p:nvSpPr>
-          <p:cNvPr id="345" name="Google Shape;345;g133be5e16e8_0_20:notes"/>
+          <p:cNvPr id="339" name="Google Shape;339;g133be5e16e8_0_20:notes"/>
           <p:cNvSpPr txBox="1"/>
           <p:nvPr>
             <p:ph idx="1" type="body"/>
@@ -4703,7 +4703,7 @@
   <p:cSld>
     <p:spTree>
       <p:nvGrpSpPr>
-        <p:cNvPr id="350" name="Shape 350"/>
+        <p:cNvPr id="344" name="Shape 344"/>
         <p:cNvGrpSpPr/>
         <p:nvPr/>
       </p:nvGrpSpPr>
@@ -4717,7 +4717,7 @@
       </p:grpSpPr>
       <p:sp>
         <p:nvSpPr>
-          <p:cNvPr id="351" name="Google Shape;351;g133be5e16e8_0_58:notes"/>
+          <p:cNvPr id="345" name="Google Shape;345;g133be5e16e8_0_58:notes"/>
           <p:cNvSpPr/>
           <p:nvPr>
             <p:ph idx="2" type="sldImg"/>
@@ -4752,7 +4752,7 @@
       </p:sp>
       <p:sp>
         <p:nvSpPr>
-          <p:cNvPr id="352" name="Google Shape;352;g133be5e16e8_0_58:notes"/>
+          <p:cNvPr id="346" name="Google Shape;346;g133be5e16e8_0_58:notes"/>
           <p:cNvSpPr txBox="1"/>
           <p:nvPr>
             <p:ph idx="1" type="body"/>
@@ -4802,7 +4802,7 @@
   <p:cSld>
     <p:spTree>
       <p:nvGrpSpPr>
-        <p:cNvPr id="357" name="Shape 357"/>
+        <p:cNvPr id="351" name="Shape 351"/>
         <p:cNvGrpSpPr/>
         <p:nvPr/>
       </p:nvGrpSpPr>
@@ -4816,7 +4816,7 @@
       </p:grpSpPr>
       <p:sp>
         <p:nvSpPr>
-          <p:cNvPr id="358" name="Google Shape;358;g2c3601aed9a_0_117:notes"/>
+          <p:cNvPr id="352" name="Google Shape;352;g2c3601aed9a_0_117:notes"/>
           <p:cNvSpPr/>
           <p:nvPr>
             <p:ph idx="2" type="sldImg"/>
@@ -4851,7 +4851,7 @@
       </p:sp>
       <p:sp>
         <p:nvSpPr>
-          <p:cNvPr id="359" name="Google Shape;359;g2c3601aed9a_0_117:notes"/>
+          <p:cNvPr id="353" name="Google Shape;353;g2c3601aed9a_0_117:notes"/>
           <p:cNvSpPr txBox="1"/>
           <p:nvPr>
             <p:ph idx="1" type="body"/>
@@ -4901,7 +4901,7 @@
   <p:cSld>
     <p:spTree>
       <p:nvGrpSpPr>
-        <p:cNvPr id="365" name="Shape 365"/>
+        <p:cNvPr id="358" name="Shape 358"/>
         <p:cNvGrpSpPr/>
         <p:nvPr/>
       </p:nvGrpSpPr>
@@ -4915,7 +4915,7 @@
       </p:grpSpPr>
       <p:sp>
         <p:nvSpPr>
-          <p:cNvPr id="366" name="Google Shape;366;gf428e7a1d1_0_25:notes"/>
+          <p:cNvPr id="359" name="Google Shape;359;gf428e7a1d1_0_25:notes"/>
           <p:cNvSpPr/>
           <p:nvPr>
             <p:ph idx="2" type="sldImg"/>
@@ -4950,7 +4950,7 @@
       </p:sp>
       <p:sp>
         <p:nvSpPr>
-          <p:cNvPr id="367" name="Google Shape;367;gf428e7a1d1_0_25:notes"/>
+          <p:cNvPr id="360" name="Google Shape;360;gf428e7a1d1_0_25:notes"/>
           <p:cNvSpPr txBox="1"/>
           <p:nvPr>
             <p:ph idx="1" type="body"/>
@@ -5000,7 +5000,7 @@
   <p:cSld>
     <p:spTree>
       <p:nvGrpSpPr>
-        <p:cNvPr id="372" name="Shape 372"/>
+        <p:cNvPr id="365" name="Shape 365"/>
         <p:cNvGrpSpPr/>
         <p:nvPr/>
       </p:nvGrpSpPr>
@@ -5014,7 +5014,7 @@
       </p:grpSpPr>
       <p:sp>
         <p:nvSpPr>
-          <p:cNvPr id="373" name="Google Shape;373;g2179b616e8b_0_23:notes"/>
+          <p:cNvPr id="366" name="Google Shape;366;g2179b616e8b_0_23:notes"/>
           <p:cNvSpPr/>
           <p:nvPr>
             <p:ph idx="2" type="sldImg"/>
@@ -5049,7 +5049,7 @@
       </p:sp>
       <p:sp>
         <p:nvSpPr>
-          <p:cNvPr id="374" name="Google Shape;374;g2179b616e8b_0_23:notes"/>
+          <p:cNvPr id="367" name="Google Shape;367;g2179b616e8b_0_23:notes"/>
           <p:cNvSpPr txBox="1"/>
           <p:nvPr>
             <p:ph idx="1" type="body"/>
@@ -5099,7 +5099,7 @@
   <p:cSld>
     <p:spTree>
       <p:nvGrpSpPr>
-        <p:cNvPr id="58" name="Shape 58"/>
+        <p:cNvPr id="57" name="Shape 57"/>
         <p:cNvGrpSpPr/>
         <p:nvPr/>
       </p:nvGrpSpPr>
@@ -5113,7 +5113,7 @@
       </p:grpSpPr>
       <p:sp>
         <p:nvSpPr>
-          <p:cNvPr id="59" name="Google Shape;59;g2c3601aed9a_0_62:notes"/>
+          <p:cNvPr id="58" name="Google Shape;58;g2c3601aed9a_0_62:notes"/>
           <p:cNvSpPr/>
           <p:nvPr>
             <p:ph idx="2" type="sldImg"/>
@@ -5148,7 +5148,7 @@
       </p:sp>
       <p:sp>
         <p:nvSpPr>
-          <p:cNvPr id="60" name="Google Shape;60;g2c3601aed9a_0_62:notes"/>
+          <p:cNvPr id="59" name="Google Shape;59;g2c3601aed9a_0_62:notes"/>
           <p:cNvSpPr txBox="1"/>
           <p:nvPr>
             <p:ph idx="1" type="body"/>
@@ -5198,7 +5198,7 @@
   <p:cSld>
     <p:spTree>
       <p:nvGrpSpPr>
-        <p:cNvPr id="377" name="Shape 377"/>
+        <p:cNvPr id="370" name="Shape 370"/>
         <p:cNvGrpSpPr/>
         <p:nvPr/>
       </p:nvGrpSpPr>
@@ -5212,7 +5212,7 @@
       </p:grpSpPr>
       <p:sp>
         <p:nvSpPr>
-          <p:cNvPr id="378" name="Google Shape;378;g2c3601aed9a_0_56:notes"/>
+          <p:cNvPr id="371" name="Google Shape;371;g2c3601aed9a_0_56:notes"/>
           <p:cNvSpPr/>
           <p:nvPr>
             <p:ph idx="2" type="sldImg"/>
@@ -5247,7 +5247,7 @@
       </p:sp>
       <p:sp>
         <p:nvSpPr>
-          <p:cNvPr id="379" name="Google Shape;379;g2c3601aed9a_0_56:notes"/>
+          <p:cNvPr id="372" name="Google Shape;372;g2c3601aed9a_0_56:notes"/>
           <p:cNvSpPr txBox="1"/>
           <p:nvPr>
             <p:ph idx="1" type="body"/>
@@ -5297,7 +5297,7 @@
   <p:cSld>
     <p:spTree>
       <p:nvGrpSpPr>
-        <p:cNvPr id="384" name="Shape 384"/>
+        <p:cNvPr id="377" name="Shape 377"/>
         <p:cNvGrpSpPr/>
         <p:nvPr/>
       </p:nvGrpSpPr>
@@ -5311,7 +5311,7 @@
       </p:grpSpPr>
       <p:sp>
         <p:nvSpPr>
-          <p:cNvPr id="385" name="Google Shape;385;g133be5e16e8_0_64:notes"/>
+          <p:cNvPr id="378" name="Google Shape;378;g133be5e16e8_0_64:notes"/>
           <p:cNvSpPr/>
           <p:nvPr>
             <p:ph idx="2" type="sldImg"/>
@@ -5346,7 +5346,7 @@
       </p:sp>
       <p:sp>
         <p:nvSpPr>
-          <p:cNvPr id="386" name="Google Shape;386;g133be5e16e8_0_64:notes"/>
+          <p:cNvPr id="379" name="Google Shape;379;g133be5e16e8_0_64:notes"/>
           <p:cNvSpPr txBox="1"/>
           <p:nvPr>
             <p:ph idx="1" type="body"/>
@@ -5396,7 +5396,7 @@
   <p:cSld>
     <p:spTree>
       <p:nvGrpSpPr>
-        <p:cNvPr id="391" name="Shape 391"/>
+        <p:cNvPr id="384" name="Shape 384"/>
         <p:cNvGrpSpPr/>
         <p:nvPr/>
       </p:nvGrpSpPr>
@@ -5410,7 +5410,7 @@
       </p:grpSpPr>
       <p:sp>
         <p:nvSpPr>
-          <p:cNvPr id="392" name="Google Shape;392;g2390037b54d_0_38:notes"/>
+          <p:cNvPr id="385" name="Google Shape;385;g2390037b54d_0_38:notes"/>
           <p:cNvSpPr/>
           <p:nvPr>
             <p:ph idx="2" type="sldImg"/>
@@ -5445,7 +5445,7 @@
       </p:sp>
       <p:sp>
         <p:nvSpPr>
-          <p:cNvPr id="393" name="Google Shape;393;g2390037b54d_0_38:notes"/>
+          <p:cNvPr id="386" name="Google Shape;386;g2390037b54d_0_38:notes"/>
           <p:cNvSpPr txBox="1"/>
           <p:nvPr>
             <p:ph idx="1" type="body"/>
@@ -5495,7 +5495,7 @@
   <p:cSld>
     <p:spTree>
       <p:nvGrpSpPr>
-        <p:cNvPr id="397" name="Shape 397"/>
+        <p:cNvPr id="390" name="Shape 390"/>
         <p:cNvGrpSpPr/>
         <p:nvPr/>
       </p:nvGrpSpPr>
@@ -5509,7 +5509,7 @@
       </p:grpSpPr>
       <p:sp>
         <p:nvSpPr>
-          <p:cNvPr id="398" name="Google Shape;398;g2390037b54d_0_43:notes"/>
+          <p:cNvPr id="391" name="Google Shape;391;g2390037b54d_0_43:notes"/>
           <p:cNvSpPr/>
           <p:nvPr>
             <p:ph idx="2" type="sldImg"/>
@@ -5544,7 +5544,7 @@
       </p:sp>
       <p:sp>
         <p:nvSpPr>
-          <p:cNvPr id="399" name="Google Shape;399;g2390037b54d_0_43:notes"/>
+          <p:cNvPr id="392" name="Google Shape;392;g2390037b54d_0_43:notes"/>
           <p:cNvSpPr txBox="1"/>
           <p:nvPr>
             <p:ph idx="1" type="body"/>
@@ -5594,7 +5594,7 @@
   <p:cSld>
     <p:spTree>
       <p:nvGrpSpPr>
-        <p:cNvPr id="65" name="Shape 65"/>
+        <p:cNvPr id="64" name="Shape 64"/>
         <p:cNvGrpSpPr/>
         <p:nvPr/>
       </p:nvGrpSpPr>
@@ -5608,7 +5608,7 @@
       </p:grpSpPr>
       <p:sp>
         <p:nvSpPr>
-          <p:cNvPr id="66" name="Google Shape;66;g11d3036de23_0_0:notes"/>
+          <p:cNvPr id="65" name="Google Shape;65;g11d3036de23_0_0:notes"/>
           <p:cNvSpPr/>
           <p:nvPr>
             <p:ph idx="2" type="sldImg"/>
@@ -5643,7 +5643,7 @@
       </p:sp>
       <p:sp>
         <p:nvSpPr>
-          <p:cNvPr id="67" name="Google Shape;67;g11d3036de23_0_0:notes"/>
+          <p:cNvPr id="66" name="Google Shape;66;g11d3036de23_0_0:notes"/>
           <p:cNvSpPr txBox="1"/>
           <p:nvPr>
             <p:ph idx="1" type="body"/>
@@ -5693,7 +5693,7 @@
   <p:cSld>
     <p:spTree>
       <p:nvGrpSpPr>
-        <p:cNvPr id="72" name="Shape 72"/>
+        <p:cNvPr id="71" name="Shape 71"/>
         <p:cNvGrpSpPr/>
         <p:nvPr/>
       </p:nvGrpSpPr>
@@ -5707,7 +5707,7 @@
       </p:grpSpPr>
       <p:sp>
         <p:nvSpPr>
-          <p:cNvPr id="73" name="Google Shape;73;gdb5ccdfa64_0_0:notes"/>
+          <p:cNvPr id="72" name="Google Shape;72;gdb5ccdfa64_0_0:notes"/>
           <p:cNvSpPr/>
           <p:nvPr>
             <p:ph idx="2" type="sldImg"/>
@@ -5742,7 +5742,7 @@
       </p:sp>
       <p:sp>
         <p:nvSpPr>
-          <p:cNvPr id="74" name="Google Shape;74;gdb5ccdfa64_0_0:notes"/>
+          <p:cNvPr id="73" name="Google Shape;73;gdb5ccdfa64_0_0:notes"/>
           <p:cNvSpPr txBox="1"/>
           <p:nvPr>
             <p:ph idx="1" type="body"/>
@@ -5792,7 +5792,7 @@
   <p:cSld>
     <p:spTree>
       <p:nvGrpSpPr>
-        <p:cNvPr id="80" name="Shape 80"/>
+        <p:cNvPr id="79" name="Shape 79"/>
         <p:cNvGrpSpPr/>
         <p:nvPr/>
       </p:nvGrpSpPr>
@@ -5806,7 +5806,7 @@
       </p:grpSpPr>
       <p:sp>
         <p:nvSpPr>
-          <p:cNvPr id="81" name="Google Shape;81;g11bb148f78e_0_32:notes"/>
+          <p:cNvPr id="80" name="Google Shape;80;g11bb148f78e_0_32:notes"/>
           <p:cNvSpPr/>
           <p:nvPr>
             <p:ph idx="2" type="sldImg"/>
@@ -5841,7 +5841,7 @@
       </p:sp>
       <p:sp>
         <p:nvSpPr>
-          <p:cNvPr id="82" name="Google Shape;82;g11bb148f78e_0_32:notes"/>
+          <p:cNvPr id="81" name="Google Shape;81;g11bb148f78e_0_32:notes"/>
           <p:cNvSpPr txBox="1"/>
           <p:nvPr>
             <p:ph idx="1" type="body"/>
@@ -5891,7 +5891,7 @@
   <p:cSld>
     <p:spTree>
       <p:nvGrpSpPr>
-        <p:cNvPr id="87" name="Shape 87"/>
+        <p:cNvPr id="86" name="Shape 86"/>
         <p:cNvGrpSpPr/>
         <p:nvPr/>
       </p:nvGrpSpPr>
@@ -5905,7 +5905,7 @@
       </p:grpSpPr>
       <p:sp>
         <p:nvSpPr>
-          <p:cNvPr id="88" name="Google Shape;88;g127e14a2292_0_12:notes"/>
+          <p:cNvPr id="87" name="Google Shape;87;g127e14a2292_0_12:notes"/>
           <p:cNvSpPr/>
           <p:nvPr>
             <p:ph idx="2" type="sldImg"/>
@@ -5940,7 +5940,7 @@
       </p:sp>
       <p:sp>
         <p:nvSpPr>
-          <p:cNvPr id="89" name="Google Shape;89;g127e14a2292_0_12:notes"/>
+          <p:cNvPr id="88" name="Google Shape;88;g127e14a2292_0_12:notes"/>
           <p:cNvSpPr txBox="1"/>
           <p:nvPr>
             <p:ph idx="1" type="body"/>
@@ -6523,144 +6523,6 @@
           </a:p>
         </p:txBody>
       </p:sp>
-      <p:sp>
-        <p:nvSpPr>
-          <p:cNvPr id="16" name="Google Shape;16;p3"/>
-          <p:cNvSpPr txBox="1"/>
-          <p:nvPr>
-            <p:ph idx="12" type="sldNum"/>
-          </p:nvPr>
-        </p:nvSpPr>
-        <p:spPr>
-          <a:xfrm>
-            <a:off x="7315209" y="4229101"/>
-            <a:ext cx="1828800" cy="914400"/>
-          </a:xfrm>
-          <a:prstGeom prst="rect">
-            <a:avLst/>
-          </a:prstGeom>
-        </p:spPr>
-        <p:txBody>
-          <a:bodyPr anchorCtr="0" anchor="b" bIns="91425" lIns="91425" spcFirstLastPara="1" rIns="91425" wrap="square" tIns="91425">
-            <a:noAutofit/>
-          </a:bodyPr>
-          <a:lstStyle>
-            <a:lvl1pPr lvl="0" rtl="0" algn="r">
-              <a:buNone/>
-              <a:defRPr b="1" sz="2400">
-                <a:solidFill>
-                  <a:schemeClr val="dk1"/>
-                </a:solidFill>
-              </a:defRPr>
-            </a:lvl1pPr>
-            <a:lvl2pPr lvl="1" rtl="0" algn="r">
-              <a:buNone/>
-              <a:defRPr b="1" sz="2400">
-                <a:solidFill>
-                  <a:schemeClr val="dk1"/>
-                </a:solidFill>
-              </a:defRPr>
-            </a:lvl2pPr>
-            <a:lvl3pPr lvl="2" rtl="0" algn="r">
-              <a:buNone/>
-              <a:defRPr b="1" sz="2400">
-                <a:solidFill>
-                  <a:schemeClr val="dk1"/>
-                </a:solidFill>
-              </a:defRPr>
-            </a:lvl3pPr>
-            <a:lvl4pPr lvl="3" rtl="0" algn="r">
-              <a:buNone/>
-              <a:defRPr b="1" sz="2400">
-                <a:solidFill>
-                  <a:schemeClr val="dk1"/>
-                </a:solidFill>
-              </a:defRPr>
-            </a:lvl4pPr>
-            <a:lvl5pPr lvl="4" rtl="0" algn="r">
-              <a:buNone/>
-              <a:defRPr b="1" sz="2400">
-                <a:solidFill>
-                  <a:schemeClr val="dk1"/>
-                </a:solidFill>
-              </a:defRPr>
-            </a:lvl5pPr>
-            <a:lvl6pPr lvl="5" rtl="0" algn="r">
-              <a:buNone/>
-              <a:defRPr b="1" sz="2400">
-                <a:solidFill>
-                  <a:schemeClr val="dk1"/>
-                </a:solidFill>
-              </a:defRPr>
-            </a:lvl6pPr>
-            <a:lvl7pPr lvl="6" rtl="0" algn="r">
-              <a:buNone/>
-              <a:defRPr b="1" sz="2400">
-                <a:solidFill>
-                  <a:schemeClr val="dk1"/>
-                </a:solidFill>
-              </a:defRPr>
-            </a:lvl7pPr>
-            <a:lvl8pPr lvl="7" rtl="0" algn="r">
-              <a:buNone/>
-              <a:defRPr b="1" sz="2400">
-                <a:solidFill>
-                  <a:schemeClr val="dk1"/>
-                </a:solidFill>
-              </a:defRPr>
-            </a:lvl8pPr>
-            <a:lvl9pPr lvl="8" rtl="0" algn="r">
-              <a:buNone/>
-              <a:defRPr b="1" sz="2400">
-                <a:solidFill>
-                  <a:schemeClr val="dk1"/>
-                </a:solidFill>
-              </a:defRPr>
-            </a:lvl9pPr>
-          </a:lstStyle>
-          <a:p>
-            <a:pPr indent="0" lvl="0" marL="0" rtl="0" algn="r">
-              <a:spcBef>
-                <a:spcPts val="0"/>
-              </a:spcBef>
-              <a:spcAft>
-                <a:spcPts val="0"/>
-              </a:spcAft>
-              <a:buNone/>
-            </a:pPr>
-            <a:fld id="{00000000-1234-1234-1234-123412341234}" type="slidenum">
-              <a:rPr lang="en"/>
-              <a:t>‹#›</a:t>
-            </a:fld>
-            <a:endParaRPr/>
-          </a:p>
-          <a:p>
-            <a:pPr indent="0" lvl="0" marL="0" rtl="0" algn="r">
-              <a:spcBef>
-                <a:spcPts val="0"/>
-              </a:spcBef>
-              <a:spcAft>
-                <a:spcPts val="0"/>
-              </a:spcAft>
-              <a:buNone/>
-            </a:pPr>
-            <a:r>
-              <a:rPr b="0" lang="en" sz="1000" u="sng">
-                <a:solidFill>
-                  <a:schemeClr val="hlink"/>
-                </a:solidFill>
-                <a:hlinkClick r:id="rId2"/>
-              </a:rPr>
-              <a:t>uni1.de/nyt</a:t>
-            </a:r>
-            <a:r>
-              <a:rPr b="0" lang="en" sz="1000"/>
-              <a:t> </a:t>
-            </a:r>
-            <a:endParaRPr b="0" sz="1000"/>
-          </a:p>
-        </p:txBody>
-      </p:sp>
     </p:spTree>
   </p:cSld>
   <p:clrMapOvr>
@@ -6674,7 +6536,7 @@
   <p:cSld name="TITLE_AND_BODY">
     <p:spTree>
       <p:nvGrpSpPr>
-        <p:cNvPr id="17" name="Shape 17"/>
+        <p:cNvPr id="16" name="Shape 16"/>
         <p:cNvGrpSpPr/>
         <p:nvPr/>
       </p:nvGrpSpPr>
@@ -6688,7 +6550,7 @@
       </p:grpSpPr>
       <p:sp>
         <p:nvSpPr>
-          <p:cNvPr id="18" name="Google Shape;18;p4"/>
+          <p:cNvPr id="17" name="Google Shape;17;p4"/>
           <p:cNvSpPr txBox="1"/>
           <p:nvPr>
             <p:ph type="title"/>
@@ -6813,7 +6675,7 @@
       </p:sp>
       <p:sp>
         <p:nvSpPr>
-          <p:cNvPr id="19" name="Google Shape;19;p4"/>
+          <p:cNvPr id="18" name="Google Shape;18;p4"/>
           <p:cNvSpPr txBox="1"/>
           <p:nvPr>
             <p:ph idx="1" type="body"/>
@@ -6938,7 +6800,7 @@
       </p:sp>
       <p:sp>
         <p:nvSpPr>
-          <p:cNvPr id="20" name="Google Shape;20;p4"/>
+          <p:cNvPr id="19" name="Google Shape;19;p4"/>
           <p:cNvSpPr/>
           <p:nvPr/>
         </p:nvSpPr>
@@ -6981,7 +6843,7 @@
       </p:sp>
       <p:sp>
         <p:nvSpPr>
-          <p:cNvPr id="21" name="Google Shape;21;p4"/>
+          <p:cNvPr id="20" name="Google Shape;20;p4"/>
           <p:cNvSpPr txBox="1"/>
           <p:nvPr>
             <p:ph idx="12" type="sldNum"/>
@@ -7130,7 +6992,7 @@
   <p:cSld name="TITLE_AND_TWO_COLUMNS">
     <p:spTree>
       <p:nvGrpSpPr>
-        <p:cNvPr id="22" name="Shape 22"/>
+        <p:cNvPr id="21" name="Shape 21"/>
         <p:cNvGrpSpPr/>
         <p:nvPr/>
       </p:nvGrpSpPr>
@@ -7144,7 +7006,7 @@
       </p:grpSpPr>
       <p:sp>
         <p:nvSpPr>
-          <p:cNvPr id="23" name="Google Shape;23;p5"/>
+          <p:cNvPr id="22" name="Google Shape;22;p5"/>
           <p:cNvSpPr txBox="1"/>
           <p:nvPr>
             <p:ph type="title"/>
@@ -7272,7 +7134,7 @@
       </p:sp>
       <p:sp>
         <p:nvSpPr>
-          <p:cNvPr id="24" name="Google Shape;24;p5"/>
+          <p:cNvPr id="23" name="Google Shape;23;p5"/>
           <p:cNvSpPr txBox="1"/>
           <p:nvPr>
             <p:ph idx="1" type="body"/>
@@ -7397,7 +7259,7 @@
       </p:sp>
       <p:sp>
         <p:nvSpPr>
-          <p:cNvPr id="25" name="Google Shape;25;p5"/>
+          <p:cNvPr id="24" name="Google Shape;24;p5"/>
           <p:cNvSpPr txBox="1"/>
           <p:nvPr>
             <p:ph idx="2" type="body"/>
@@ -7522,7 +7384,7 @@
       </p:sp>
       <p:sp>
         <p:nvSpPr>
-          <p:cNvPr id="26" name="Google Shape;26;p5"/>
+          <p:cNvPr id="25" name="Google Shape;25;p5"/>
           <p:cNvSpPr/>
           <p:nvPr/>
         </p:nvSpPr>
@@ -7565,7 +7427,7 @@
       </p:sp>
       <p:sp>
         <p:nvSpPr>
-          <p:cNvPr id="27" name="Google Shape;27;p5"/>
+          <p:cNvPr id="26" name="Google Shape;26;p5"/>
           <p:cNvSpPr txBox="1"/>
           <p:nvPr>
             <p:ph idx="12" type="sldNum"/>
@@ -7714,7 +7576,7 @@
   <p:cSld name="TITLE_ONLY">
     <p:spTree>
       <p:nvGrpSpPr>
-        <p:cNvPr id="28" name="Shape 28"/>
+        <p:cNvPr id="27" name="Shape 27"/>
         <p:cNvGrpSpPr/>
         <p:nvPr/>
       </p:nvGrpSpPr>
@@ -7728,7 +7590,7 @@
       </p:grpSpPr>
       <p:sp>
         <p:nvSpPr>
-          <p:cNvPr id="29" name="Google Shape;29;p6"/>
+          <p:cNvPr id="28" name="Google Shape;28;p6"/>
           <p:cNvSpPr txBox="1"/>
           <p:nvPr>
             <p:ph type="title"/>
@@ -7853,7 +7715,7 @@
       </p:sp>
       <p:sp>
         <p:nvSpPr>
-          <p:cNvPr id="30" name="Google Shape;30;p6"/>
+          <p:cNvPr id="29" name="Google Shape;29;p6"/>
           <p:cNvSpPr/>
           <p:nvPr/>
         </p:nvSpPr>
@@ -7896,7 +7758,7 @@
       </p:sp>
       <p:sp>
         <p:nvSpPr>
-          <p:cNvPr id="31" name="Google Shape;31;p6"/>
+          <p:cNvPr id="30" name="Google Shape;30;p6"/>
           <p:cNvSpPr txBox="1"/>
           <p:nvPr>
             <p:ph idx="12" type="sldNum"/>
@@ -8045,7 +7907,7 @@
   <p:cSld name="BLANK">
     <p:spTree>
       <p:nvGrpSpPr>
-        <p:cNvPr id="32" name="Shape 32"/>
+        <p:cNvPr id="31" name="Shape 31"/>
         <p:cNvGrpSpPr/>
         <p:nvPr/>
       </p:nvGrpSpPr>
@@ -9351,7 +9213,7 @@
   <p:cSld>
     <p:spTree>
       <p:nvGrpSpPr>
-        <p:cNvPr id="36" name="Shape 36"/>
+        <p:cNvPr id="35" name="Shape 35"/>
         <p:cNvGrpSpPr/>
         <p:nvPr/>
       </p:nvGrpSpPr>
@@ -9365,7 +9227,7 @@
       </p:grpSpPr>
       <p:sp>
         <p:nvSpPr>
-          <p:cNvPr id="37" name="Google Shape;37;p8"/>
+          <p:cNvPr id="36" name="Google Shape;36;p8"/>
           <p:cNvSpPr txBox="1"/>
           <p:nvPr>
             <p:ph type="ctrTitle"/>
@@ -9405,7 +9267,7 @@
       </p:sp>
       <p:sp>
         <p:nvSpPr>
-          <p:cNvPr id="38" name="Google Shape;38;p8"/>
+          <p:cNvPr id="37" name="Google Shape;37;p8"/>
           <p:cNvSpPr txBox="1"/>
           <p:nvPr>
             <p:ph idx="1" type="subTitle"/>
@@ -9512,7 +9374,7 @@
   <p:cSld>
     <p:spTree>
       <p:nvGrpSpPr>
-        <p:cNvPr id="98" name="Shape 98"/>
+        <p:cNvPr id="97" name="Shape 97"/>
         <p:cNvGrpSpPr/>
         <p:nvPr/>
       </p:nvGrpSpPr>
@@ -9526,7 +9388,7 @@
       </p:grpSpPr>
       <p:sp>
         <p:nvSpPr>
-          <p:cNvPr id="99" name="Google Shape;99;p17"/>
+          <p:cNvPr id="98" name="Google Shape;98;p17"/>
           <p:cNvSpPr txBox="1"/>
           <p:nvPr>
             <p:ph type="title"/>
@@ -9566,7 +9428,7 @@
       </p:sp>
       <p:sp>
         <p:nvSpPr>
-          <p:cNvPr id="100" name="Google Shape;100;p17"/>
+          <p:cNvPr id="99" name="Google Shape;99;p17"/>
           <p:cNvSpPr txBox="1"/>
           <p:nvPr>
             <p:ph idx="1" type="body"/>
@@ -9641,7 +9503,7 @@
       </p:sp>
       <p:sp>
         <p:nvSpPr>
-          <p:cNvPr id="101" name="Google Shape;101;p17"/>
+          <p:cNvPr id="100" name="Google Shape;100;p17"/>
           <p:cNvSpPr txBox="1"/>
           <p:nvPr>
             <p:ph idx="12" type="sldNum"/>
@@ -9717,7 +9579,7 @@
   <p:cSld>
     <p:spTree>
       <p:nvGrpSpPr>
-        <p:cNvPr id="105" name="Shape 105"/>
+        <p:cNvPr id="104" name="Shape 104"/>
         <p:cNvGrpSpPr/>
         <p:nvPr/>
       </p:nvGrpSpPr>
@@ -9729,37 +9591,9 @@
           <a:chExt cx="0" cy="0"/>
         </a:xfrm>
       </p:grpSpPr>
-      <p:pic>
-        <p:nvPicPr>
-          <p:cNvPr id="106" name="Google Shape;106;p18"/>
-          <p:cNvPicPr preferRelativeResize="0"/>
-          <p:nvPr/>
-        </p:nvPicPr>
-        <p:blipFill>
-          <a:blip r:embed="rId3">
-            <a:alphaModFix/>
-          </a:blip>
-          <a:stretch>
-            <a:fillRect/>
-          </a:stretch>
-        </p:blipFill>
-        <p:spPr>
-          <a:xfrm>
-            <a:off x="274320" y="914400"/>
-            <a:ext cx="8595360" cy="3504997"/>
-          </a:xfrm>
-          <a:prstGeom prst="rect">
-            <a:avLst/>
-          </a:prstGeom>
-          <a:noFill/>
-          <a:ln>
-            <a:noFill/>
-          </a:ln>
-        </p:spPr>
-      </p:pic>
-      <p:sp>
-        <p:nvSpPr>
-          <p:cNvPr id="107" name="Google Shape;107;p18"/>
+      <p:sp>
+        <p:nvSpPr>
+          <p:cNvPr id="105" name="Google Shape;105;p18"/>
           <p:cNvSpPr txBox="1"/>
           <p:nvPr>
             <p:ph type="title"/>
@@ -9799,7 +9633,7 @@
       </p:sp>
       <p:sp>
         <p:nvSpPr>
-          <p:cNvPr id="108" name="Google Shape;108;p18"/>
+          <p:cNvPr id="106" name="Google Shape;106;p18"/>
           <p:cNvSpPr txBox="1"/>
           <p:nvPr>
             <p:ph idx="12" type="sldNum"/>
@@ -9850,7 +9684,7 @@
                 <a:solidFill>
                   <a:schemeClr val="hlink"/>
                 </a:solidFill>
-                <a:hlinkClick r:id="rId4"/>
+                <a:hlinkClick r:id="rId3"/>
               </a:rPr>
               <a:t>uni1.de/nyt</a:t>
             </a:r>
@@ -9864,7 +9698,7 @@
       </p:sp>
       <p:sp>
         <p:nvSpPr>
-          <p:cNvPr id="109" name="Google Shape;109;p18"/>
+          <p:cNvPr id="107" name="Google Shape;107;p18"/>
           <p:cNvSpPr/>
           <p:nvPr/>
         </p:nvSpPr>
@@ -9909,6 +9743,34 @@
           </a:p>
         </p:txBody>
       </p:sp>
+      <p:pic>
+        <p:nvPicPr>
+          <p:cNvPr id="108" name="Google Shape;108;p18"/>
+          <p:cNvPicPr preferRelativeResize="0"/>
+          <p:nvPr/>
+        </p:nvPicPr>
+        <p:blipFill>
+          <a:blip r:embed="rId4">
+            <a:alphaModFix/>
+          </a:blip>
+          <a:stretch>
+            <a:fillRect/>
+          </a:stretch>
+        </p:blipFill>
+        <p:spPr>
+          <a:xfrm>
+            <a:off x="274320" y="914400"/>
+            <a:ext cx="8595360" cy="3495446"/>
+          </a:xfrm>
+          <a:prstGeom prst="rect">
+            <a:avLst/>
+          </a:prstGeom>
+          <a:noFill/>
+          <a:ln>
+            <a:noFill/>
+          </a:ln>
+        </p:spPr>
+      </p:pic>
     </p:spTree>
   </p:cSld>
   <p:clrMapOvr>
@@ -9922,7 +9784,7 @@
   <p:cSld>
     <p:spTree>
       <p:nvGrpSpPr>
-        <p:cNvPr id="113" name="Shape 113"/>
+        <p:cNvPr id="112" name="Shape 112"/>
         <p:cNvGrpSpPr/>
         <p:nvPr/>
       </p:nvGrpSpPr>
@@ -9936,7 +9798,7 @@
       </p:grpSpPr>
       <p:sp>
         <p:nvSpPr>
-          <p:cNvPr id="114" name="Google Shape;114;p19"/>
+          <p:cNvPr id="113" name="Google Shape;113;p19"/>
           <p:cNvSpPr txBox="1"/>
           <p:nvPr>
             <p:ph type="title"/>
@@ -9976,7 +9838,7 @@
       </p:sp>
       <p:sp>
         <p:nvSpPr>
-          <p:cNvPr id="115" name="Google Shape;115;p19"/>
+          <p:cNvPr id="114" name="Google Shape;114;p19"/>
           <p:cNvSpPr txBox="1"/>
           <p:nvPr>
             <p:ph idx="1" type="body"/>
@@ -10120,7 +9982,7 @@
       </p:sp>
       <p:sp>
         <p:nvSpPr>
-          <p:cNvPr id="116" name="Google Shape;116;p19"/>
+          <p:cNvPr id="115" name="Google Shape;115;p19"/>
           <p:cNvSpPr txBox="1"/>
           <p:nvPr>
             <p:ph idx="12" type="sldNum"/>
@@ -10196,7 +10058,7 @@
   <p:cSld>
     <p:spTree>
       <p:nvGrpSpPr>
-        <p:cNvPr id="120" name="Shape 120"/>
+        <p:cNvPr id="119" name="Shape 119"/>
         <p:cNvGrpSpPr/>
         <p:nvPr/>
       </p:nvGrpSpPr>
@@ -10210,7 +10072,7 @@
       </p:grpSpPr>
       <p:sp>
         <p:nvSpPr>
-          <p:cNvPr id="121" name="Google Shape;121;p20"/>
+          <p:cNvPr id="120" name="Google Shape;120;p20"/>
           <p:cNvSpPr txBox="1"/>
           <p:nvPr>
             <p:ph type="title"/>
@@ -10250,7 +10112,7 @@
       </p:sp>
       <p:sp>
         <p:nvSpPr>
-          <p:cNvPr id="122" name="Google Shape;122;p20"/>
+          <p:cNvPr id="121" name="Google Shape;121;p20"/>
           <p:cNvSpPr txBox="1"/>
           <p:nvPr>
             <p:ph idx="1" type="body"/>
@@ -10340,7 +10202,7 @@
       </p:sp>
       <p:sp>
         <p:nvSpPr>
-          <p:cNvPr id="123" name="Google Shape;123;p20"/>
+          <p:cNvPr id="122" name="Google Shape;122;p20"/>
           <p:cNvSpPr txBox="1"/>
           <p:nvPr>
             <p:ph idx="12" type="sldNum"/>
@@ -10416,7 +10278,7 @@
   <p:cSld>
     <p:spTree>
       <p:nvGrpSpPr>
-        <p:cNvPr id="127" name="Shape 127"/>
+        <p:cNvPr id="126" name="Shape 126"/>
         <p:cNvGrpSpPr/>
         <p:nvPr/>
       </p:nvGrpSpPr>
@@ -10430,7 +10292,7 @@
       </p:grpSpPr>
       <p:sp>
         <p:nvSpPr>
-          <p:cNvPr id="128" name="Google Shape;128;p21"/>
+          <p:cNvPr id="127" name="Google Shape;127;p21"/>
           <p:cNvSpPr txBox="1"/>
           <p:nvPr>
             <p:ph type="title"/>
@@ -10481,7 +10343,7 @@
   <p:cSld>
     <p:spTree>
       <p:nvGrpSpPr>
-        <p:cNvPr id="132" name="Shape 132"/>
+        <p:cNvPr id="131" name="Shape 131"/>
         <p:cNvGrpSpPr/>
         <p:nvPr/>
       </p:nvGrpSpPr>
@@ -10495,7 +10357,7 @@
       </p:grpSpPr>
       <p:sp>
         <p:nvSpPr>
-          <p:cNvPr id="133" name="Google Shape;133;p22"/>
+          <p:cNvPr id="132" name="Google Shape;132;p22"/>
           <p:cNvSpPr txBox="1"/>
           <p:nvPr>
             <p:ph type="title"/>
@@ -10535,7 +10397,7 @@
       </p:sp>
       <p:sp>
         <p:nvSpPr>
-          <p:cNvPr id="134" name="Google Shape;134;p22"/>
+          <p:cNvPr id="133" name="Google Shape;133;p22"/>
           <p:cNvSpPr txBox="1"/>
           <p:nvPr>
             <p:ph idx="1" type="body"/>
@@ -10709,7 +10571,7 @@
       </p:sp>
       <p:sp>
         <p:nvSpPr>
-          <p:cNvPr id="135" name="Google Shape;135;p22"/>
+          <p:cNvPr id="134" name="Google Shape;134;p22"/>
           <p:cNvSpPr txBox="1"/>
           <p:nvPr>
             <p:ph idx="12" type="sldNum"/>
@@ -10774,7 +10636,7 @@
       </p:sp>
       <p:sp>
         <p:nvSpPr>
-          <p:cNvPr id="136" name="Google Shape;136;p22"/>
+          <p:cNvPr id="135" name="Google Shape;135;p22"/>
           <p:cNvSpPr txBox="1"/>
           <p:nvPr/>
         </p:nvSpPr>
@@ -10827,7 +10689,7 @@
   <p:cSld>
     <p:spTree>
       <p:nvGrpSpPr>
-        <p:cNvPr id="140" name="Shape 140"/>
+        <p:cNvPr id="139" name="Shape 139"/>
         <p:cNvGrpSpPr/>
         <p:nvPr/>
       </p:nvGrpSpPr>
@@ -10841,7 +10703,7 @@
       </p:grpSpPr>
       <p:sp>
         <p:nvSpPr>
-          <p:cNvPr id="141" name="Google Shape;141;p23"/>
+          <p:cNvPr id="140" name="Google Shape;140;p23"/>
           <p:cNvSpPr txBox="1"/>
           <p:nvPr>
             <p:ph type="title"/>
@@ -10881,7 +10743,7 @@
       </p:sp>
       <p:sp>
         <p:nvSpPr>
-          <p:cNvPr id="142" name="Google Shape;142;p23"/>
+          <p:cNvPr id="141" name="Google Shape;141;p23"/>
           <p:cNvSpPr txBox="1"/>
           <p:nvPr>
             <p:ph idx="1" type="body"/>
@@ -10889,8 +10751,8 @@
         </p:nvSpPr>
         <p:spPr>
           <a:xfrm>
-            <a:off x="274320" y="914400"/>
-            <a:ext cx="8595300" cy="4114800"/>
+            <a:off x="3196023" y="914400"/>
+            <a:ext cx="5673600" cy="4114800"/>
           </a:xfrm>
           <a:prstGeom prst="rect">
             <a:avLst/>
@@ -10917,7 +10779,7 @@
             </a:r>
             <a:r>
               <a:rPr lang="en"/>
-              <a:t> is action research that</a:t>
+              <a:t> </a:t>
             </a:r>
             <a:endParaRPr/>
           </a:p>
@@ -10934,7 +10796,7 @@
             </a:pPr>
             <a:r>
               <a:rPr lang="en"/>
-              <a:t>Empowers participants to change practices in the face of</a:t>
+              <a:t>Empowers participants to change practices given</a:t>
             </a:r>
             <a:endParaRPr/>
           </a:p>
@@ -11001,7 +10863,7 @@
             </a:pPr>
             <a:r>
               <a:rPr lang="en"/>
-              <a:t>With this addition of critical theory, we are leaving positivism</a:t>
+              <a:t>With critical theory added, we are leaving positivism</a:t>
             </a:r>
             <a:endParaRPr/>
           </a:p>
@@ -11058,7 +10920,7 @@
       </p:sp>
       <p:sp>
         <p:nvSpPr>
-          <p:cNvPr id="143" name="Google Shape;143;p23"/>
+          <p:cNvPr id="142" name="Google Shape;142;p23"/>
           <p:cNvSpPr txBox="1"/>
           <p:nvPr>
             <p:ph idx="12" type="sldNum"/>
@@ -11123,7 +10985,7 @@
       </p:sp>
       <p:pic>
         <p:nvPicPr>
-          <p:cNvPr id="144" name="Google Shape;144;p23"/>
+          <p:cNvPr id="143" name="Google Shape;143;p23"/>
           <p:cNvPicPr preferRelativeResize="0"/>
           <p:nvPr/>
         </p:nvPicPr>
@@ -11137,8 +10999,8 @@
         </p:blipFill>
         <p:spPr>
           <a:xfrm>
-            <a:off x="6583680" y="914400"/>
-            <a:ext cx="2286000" cy="3544186"/>
+            <a:off x="274330" y="914400"/>
+            <a:ext cx="2595066" cy="4023360"/>
           </a:xfrm>
           <a:prstGeom prst="rect">
             <a:avLst/>
@@ -11162,7 +11024,7 @@
   <p:cSld>
     <p:spTree>
       <p:nvGrpSpPr>
-        <p:cNvPr id="148" name="Shape 148"/>
+        <p:cNvPr id="147" name="Shape 147"/>
         <p:cNvGrpSpPr/>
         <p:nvPr/>
       </p:nvGrpSpPr>
@@ -11176,7 +11038,7 @@
       </p:grpSpPr>
       <p:sp>
         <p:nvSpPr>
-          <p:cNvPr id="149" name="Google Shape;149;p24"/>
+          <p:cNvPr id="148" name="Google Shape;148;p24"/>
           <p:cNvSpPr txBox="1"/>
           <p:nvPr>
             <p:ph type="title"/>
@@ -11216,7 +11078,7 @@
       </p:sp>
       <p:sp>
         <p:nvSpPr>
-          <p:cNvPr id="150" name="Google Shape;150;p24"/>
+          <p:cNvPr id="149" name="Google Shape;149;p24"/>
           <p:cNvSpPr txBox="1"/>
           <p:nvPr>
             <p:ph idx="1" type="body"/>
@@ -11324,7 +11186,7 @@
       </p:sp>
       <p:sp>
         <p:nvSpPr>
-          <p:cNvPr id="151" name="Google Shape;151;p24"/>
+          <p:cNvPr id="150" name="Google Shape;150;p24"/>
           <p:cNvSpPr txBox="1"/>
           <p:nvPr>
             <p:ph idx="12" type="sldNum"/>
@@ -11400,7 +11262,7 @@
   <p:cSld>
     <p:spTree>
       <p:nvGrpSpPr>
-        <p:cNvPr id="155" name="Shape 155"/>
+        <p:cNvPr id="154" name="Shape 154"/>
         <p:cNvGrpSpPr/>
         <p:nvPr/>
       </p:nvGrpSpPr>
@@ -11414,7 +11276,7 @@
       </p:grpSpPr>
       <p:sp>
         <p:nvSpPr>
-          <p:cNvPr id="156" name="Google Shape;156;p25"/>
+          <p:cNvPr id="155" name="Google Shape;155;p25"/>
           <p:cNvSpPr txBox="1"/>
           <p:nvPr>
             <p:ph type="title"/>
@@ -11454,7 +11316,7 @@
       </p:sp>
       <p:sp>
         <p:nvSpPr>
-          <p:cNvPr id="157" name="Google Shape;157;p25"/>
+          <p:cNvPr id="156" name="Google Shape;156;p25"/>
           <p:cNvSpPr txBox="1"/>
           <p:nvPr>
             <p:ph idx="1" type="body"/>
@@ -11578,7 +11440,7 @@
       </p:sp>
       <p:sp>
         <p:nvSpPr>
-          <p:cNvPr id="158" name="Google Shape;158;p25"/>
+          <p:cNvPr id="157" name="Google Shape;157;p25"/>
           <p:cNvSpPr txBox="1"/>
           <p:nvPr>
             <p:ph idx="12" type="sldNum"/>
@@ -11654,7 +11516,7 @@
   <p:cSld>
     <p:spTree>
       <p:nvGrpSpPr>
-        <p:cNvPr id="162" name="Shape 162"/>
+        <p:cNvPr id="161" name="Shape 161"/>
         <p:cNvGrpSpPr/>
         <p:nvPr/>
       </p:nvGrpSpPr>
@@ -11668,7 +11530,7 @@
       </p:grpSpPr>
       <p:sp>
         <p:nvSpPr>
-          <p:cNvPr id="163" name="Google Shape;163;p26"/>
+          <p:cNvPr id="162" name="Google Shape;162;p26"/>
           <p:cNvSpPr txBox="1"/>
           <p:nvPr>
             <p:ph idx="1" type="body"/>
@@ -11742,7 +11604,7 @@
       </p:sp>
       <p:sp>
         <p:nvSpPr>
-          <p:cNvPr id="164" name="Google Shape;164;p26"/>
+          <p:cNvPr id="163" name="Google Shape;163;p26"/>
           <p:cNvSpPr txBox="1"/>
           <p:nvPr>
             <p:ph type="title"/>
@@ -11782,7 +11644,7 @@
       </p:sp>
       <p:sp>
         <p:nvSpPr>
-          <p:cNvPr id="165" name="Google Shape;165;p26"/>
+          <p:cNvPr id="164" name="Google Shape;164;p26"/>
           <p:cNvSpPr txBox="1"/>
           <p:nvPr>
             <p:ph idx="12" type="sldNum"/>
@@ -11847,7 +11709,7 @@
       </p:sp>
       <p:sp>
         <p:nvSpPr>
-          <p:cNvPr id="166" name="Google Shape;166;p26"/>
+          <p:cNvPr id="165" name="Google Shape;165;p26"/>
           <p:cNvSpPr txBox="1"/>
           <p:nvPr>
             <p:ph idx="2" type="body"/>
@@ -11930,7 +11792,7 @@
   <p:cSld>
     <p:spTree>
       <p:nvGrpSpPr>
-        <p:cNvPr id="42" name="Shape 42"/>
+        <p:cNvPr id="41" name="Shape 41"/>
         <p:cNvGrpSpPr/>
         <p:nvPr/>
       </p:nvGrpSpPr>
@@ -11944,7 +11806,7 @@
       </p:grpSpPr>
       <p:sp>
         <p:nvSpPr>
-          <p:cNvPr id="43" name="Google Shape;43;p9"/>
+          <p:cNvPr id="42" name="Google Shape;42;p9"/>
           <p:cNvSpPr txBox="1"/>
           <p:nvPr>
             <p:ph idx="1" type="body"/>
@@ -12085,7 +11947,7 @@
       </p:sp>
       <p:sp>
         <p:nvSpPr>
-          <p:cNvPr id="44" name="Google Shape;44;p9"/>
+          <p:cNvPr id="43" name="Google Shape;43;p9"/>
           <p:cNvSpPr txBox="1"/>
           <p:nvPr>
             <p:ph type="title"/>
@@ -12125,7 +11987,7 @@
       </p:sp>
       <p:sp>
         <p:nvSpPr>
-          <p:cNvPr id="45" name="Google Shape;45;p9"/>
+          <p:cNvPr id="44" name="Google Shape;44;p9"/>
           <p:cNvSpPr txBox="1"/>
           <p:nvPr>
             <p:ph idx="12" type="sldNum"/>
@@ -12201,7 +12063,7 @@
   <p:cSld>
     <p:spTree>
       <p:nvGrpSpPr>
-        <p:cNvPr id="170" name="Shape 170"/>
+        <p:cNvPr id="169" name="Shape 169"/>
         <p:cNvGrpSpPr/>
         <p:nvPr/>
       </p:nvGrpSpPr>
@@ -12215,7 +12077,7 @@
       </p:grpSpPr>
       <p:sp>
         <p:nvSpPr>
-          <p:cNvPr id="171" name="Google Shape;171;p27"/>
+          <p:cNvPr id="170" name="Google Shape;170;p27"/>
           <p:cNvSpPr txBox="1"/>
           <p:nvPr>
             <p:ph type="title"/>
@@ -12263,7 +12125,7 @@
       </p:sp>
       <p:sp>
         <p:nvSpPr>
-          <p:cNvPr id="172" name="Google Shape;172;p27"/>
+          <p:cNvPr id="171" name="Google Shape;171;p27"/>
           <p:cNvSpPr txBox="1"/>
           <p:nvPr>
             <p:ph idx="12" type="sldNum"/>
@@ -12328,7 +12190,7 @@
       </p:sp>
       <p:pic>
         <p:nvPicPr>
-          <p:cNvPr id="173" name="Google Shape;173;p27"/>
+          <p:cNvPr id="172" name="Google Shape;172;p27"/>
           <p:cNvPicPr preferRelativeResize="0"/>
           <p:nvPr/>
         </p:nvPicPr>
@@ -12343,7 +12205,7 @@
         <p:spPr>
           <a:xfrm>
             <a:off x="274320" y="914400"/>
-            <a:ext cx="8595360" cy="3502840"/>
+            <a:ext cx="8595360" cy="3493598"/>
           </a:xfrm>
           <a:prstGeom prst="rect">
             <a:avLst/>
@@ -12367,7 +12229,7 @@
   <p:cSld>
     <p:spTree>
       <p:nvGrpSpPr>
-        <p:cNvPr id="177" name="Shape 177"/>
+        <p:cNvPr id="176" name="Shape 176"/>
         <p:cNvGrpSpPr/>
         <p:nvPr/>
       </p:nvGrpSpPr>
@@ -12381,7 +12243,7 @@
       </p:grpSpPr>
       <p:sp>
         <p:nvSpPr>
-          <p:cNvPr id="178" name="Google Shape;178;p28"/>
+          <p:cNvPr id="177" name="Google Shape;177;p28"/>
           <p:cNvSpPr txBox="1"/>
           <p:nvPr>
             <p:ph type="title"/>
@@ -12421,7 +12283,7 @@
       </p:sp>
       <p:sp>
         <p:nvSpPr>
-          <p:cNvPr id="179" name="Google Shape;179;p28"/>
+          <p:cNvPr id="178" name="Google Shape;178;p28"/>
           <p:cNvSpPr txBox="1"/>
           <p:nvPr>
             <p:ph idx="12" type="sldNum"/>
@@ -12486,7 +12348,7 @@
       </p:sp>
       <p:graphicFrame>
         <p:nvGraphicFramePr>
-          <p:cNvPr id="180" name="Google Shape;180;p28"/>
+          <p:cNvPr id="179" name="Google Shape;179;p28"/>
           <p:cNvGraphicFramePr/>
           <p:nvPr/>
         </p:nvGraphicFramePr>
@@ -12499,7 +12361,7 @@
             <a:tbl>
               <a:tblPr>
                 <a:noFill/>
-                <a:tableStyleId>{093D59FF-5EC2-42E6-801D-1FF52FC918EA}</a:tableStyleId>
+                <a:tableStyleId>{05B7DA4D-6928-4A59-AA30-F38DA9E1C66B}</a:tableStyleId>
               </a:tblPr>
               <a:tblGrid>
                 <a:gridCol w="2148850"/>
@@ -14189,7 +14051,7 @@
       </p:graphicFrame>
       <p:sp>
         <p:nvSpPr>
-          <p:cNvPr id="181" name="Google Shape;181;p28"/>
+          <p:cNvPr id="180" name="Google Shape;180;p28"/>
           <p:cNvSpPr txBox="1"/>
           <p:nvPr/>
         </p:nvSpPr>
@@ -14278,7 +14140,7 @@
   <p:cSld>
     <p:spTree>
       <p:nvGrpSpPr>
-        <p:cNvPr id="185" name="Shape 185"/>
+        <p:cNvPr id="184" name="Shape 184"/>
         <p:cNvGrpSpPr/>
         <p:nvPr/>
       </p:nvGrpSpPr>
@@ -14292,7 +14154,7 @@
       </p:grpSpPr>
       <p:sp>
         <p:nvSpPr>
-          <p:cNvPr id="186" name="Google Shape;186;p29"/>
+          <p:cNvPr id="185" name="Google Shape;185;p29"/>
           <p:cNvSpPr txBox="1"/>
           <p:nvPr>
             <p:ph type="title"/>
@@ -14343,7 +14205,7 @@
   <p:cSld>
     <p:spTree>
       <p:nvGrpSpPr>
-        <p:cNvPr id="190" name="Shape 190"/>
+        <p:cNvPr id="189" name="Shape 189"/>
         <p:cNvGrpSpPr/>
         <p:nvPr/>
       </p:nvGrpSpPr>
@@ -14357,7 +14219,7 @@
       </p:grpSpPr>
       <p:sp>
         <p:nvSpPr>
-          <p:cNvPr id="191" name="Google Shape;191;p30"/>
+          <p:cNvPr id="190" name="Google Shape;190;p30"/>
           <p:cNvSpPr txBox="1"/>
           <p:nvPr>
             <p:ph type="title"/>
@@ -14397,7 +14259,7 @@
       </p:sp>
       <p:sp>
         <p:nvSpPr>
-          <p:cNvPr id="192" name="Google Shape;192;p30"/>
+          <p:cNvPr id="191" name="Google Shape;191;p30"/>
           <p:cNvSpPr txBox="1"/>
           <p:nvPr>
             <p:ph idx="1" type="body"/>
@@ -14538,7 +14400,7 @@
       </p:sp>
       <p:sp>
         <p:nvSpPr>
-          <p:cNvPr id="193" name="Google Shape;193;p30"/>
+          <p:cNvPr id="192" name="Google Shape;192;p30"/>
           <p:cNvSpPr txBox="1"/>
           <p:nvPr>
             <p:ph idx="12" type="sldNum"/>
@@ -14614,7 +14476,7 @@
   <p:cSld>
     <p:spTree>
       <p:nvGrpSpPr>
-        <p:cNvPr id="197" name="Shape 197"/>
+        <p:cNvPr id="196" name="Shape 196"/>
         <p:cNvGrpSpPr/>
         <p:nvPr/>
       </p:nvGrpSpPr>
@@ -14628,7 +14490,7 @@
       </p:grpSpPr>
       <p:sp>
         <p:nvSpPr>
-          <p:cNvPr id="198" name="Google Shape;198;p31"/>
+          <p:cNvPr id="197" name="Google Shape;197;p31"/>
           <p:cNvSpPr txBox="1"/>
           <p:nvPr>
             <p:ph type="title"/>
@@ -14668,7 +14530,7 @@
       </p:sp>
       <p:sp>
         <p:nvSpPr>
-          <p:cNvPr id="199" name="Google Shape;199;p31"/>
+          <p:cNvPr id="198" name="Google Shape;198;p31"/>
           <p:cNvSpPr txBox="1"/>
           <p:nvPr>
             <p:ph idx="12" type="sldNum"/>
@@ -14733,7 +14595,7 @@
       </p:sp>
       <p:sp>
         <p:nvSpPr>
-          <p:cNvPr id="200" name="Google Shape;200;p31"/>
+          <p:cNvPr id="199" name="Google Shape;199;p31"/>
           <p:cNvSpPr txBox="1"/>
           <p:nvPr>
             <p:ph idx="1" type="body"/>
@@ -14781,48 +14643,6 @@
             </a:pPr>
             <a:r>
               <a:t/>
-            </a:r>
-            <a:endParaRPr/>
-          </a:p>
-        </p:txBody>
-      </p:sp>
-      <p:sp>
-        <p:nvSpPr>
-          <p:cNvPr id="201" name="Google Shape;201;p31"/>
-          <p:cNvSpPr txBox="1"/>
-          <p:nvPr/>
-        </p:nvSpPr>
-        <p:spPr>
-          <a:xfrm>
-            <a:off x="0" y="4233672"/>
-            <a:ext cx="7315200" cy="914400"/>
-          </a:xfrm>
-          <a:prstGeom prst="rect">
-            <a:avLst/>
-          </a:prstGeom>
-          <a:noFill/>
-          <a:ln>
-            <a:noFill/>
-          </a:ln>
-        </p:spPr>
-        <p:txBody>
-          <a:bodyPr anchorCtr="0" anchor="b" bIns="91425" lIns="91425" spcFirstLastPara="1" rIns="91425" wrap="square" tIns="91425">
-            <a:noAutofit/>
-          </a:bodyPr>
-          <a:lstStyle/>
-          <a:p>
-            <a:pPr indent="0" lvl="0" marL="0" rtl="0" algn="l">
-              <a:spcBef>
-                <a:spcPts val="0"/>
-              </a:spcBef>
-              <a:spcAft>
-                <a:spcPts val="0"/>
-              </a:spcAft>
-              <a:buNone/>
-            </a:pPr>
-            <a:r>
-              <a:rPr lang="en"/>
-              <a:t>[1] See Riehle et al. (2021): Pattern discovery and validation.</a:t>
             </a:r>
             <a:endParaRPr/>
           </a:p>
@@ -14841,7 +14661,7 @@
   <p:cSld>
     <p:spTree>
       <p:nvGrpSpPr>
-        <p:cNvPr id="205" name="Shape 205"/>
+        <p:cNvPr id="203" name="Shape 203"/>
         <p:cNvGrpSpPr/>
         <p:nvPr/>
       </p:nvGrpSpPr>
@@ -14855,7 +14675,7 @@
       </p:grpSpPr>
       <p:sp>
         <p:nvSpPr>
-          <p:cNvPr id="206" name="Google Shape;206;p32"/>
+          <p:cNvPr id="204" name="Google Shape;204;p32"/>
           <p:cNvSpPr txBox="1"/>
           <p:nvPr>
             <p:ph type="title"/>
@@ -14906,7 +14726,7 @@
   <p:cSld>
     <p:spTree>
       <p:nvGrpSpPr>
-        <p:cNvPr id="210" name="Shape 210"/>
+        <p:cNvPr id="208" name="Shape 208"/>
         <p:cNvGrpSpPr/>
         <p:nvPr/>
       </p:nvGrpSpPr>
@@ -14920,7 +14740,7 @@
       </p:grpSpPr>
       <p:sp>
         <p:nvSpPr>
-          <p:cNvPr id="211" name="Google Shape;211;p33"/>
+          <p:cNvPr id="209" name="Google Shape;209;p33"/>
           <p:cNvSpPr txBox="1"/>
           <p:nvPr>
             <p:ph type="title"/>
@@ -14960,7 +14780,7 @@
       </p:sp>
       <p:sp>
         <p:nvSpPr>
-          <p:cNvPr id="212" name="Google Shape;212;p33"/>
+          <p:cNvPr id="210" name="Google Shape;210;p33"/>
           <p:cNvSpPr txBox="1"/>
           <p:nvPr>
             <p:ph idx="1" type="body"/>
@@ -15051,7 +14871,7 @@
       </p:sp>
       <p:sp>
         <p:nvSpPr>
-          <p:cNvPr id="213" name="Google Shape;213;p33"/>
+          <p:cNvPr id="211" name="Google Shape;211;p33"/>
           <p:cNvSpPr txBox="1"/>
           <p:nvPr>
             <p:ph idx="12" type="sldNum"/>
@@ -15127,7 +14947,7 @@
   <p:cSld>
     <p:spTree>
       <p:nvGrpSpPr>
-        <p:cNvPr id="217" name="Shape 217"/>
+        <p:cNvPr id="215" name="Shape 215"/>
         <p:cNvGrpSpPr/>
         <p:nvPr/>
       </p:nvGrpSpPr>
@@ -15141,7 +14961,7 @@
       </p:grpSpPr>
       <p:sp>
         <p:nvSpPr>
-          <p:cNvPr id="218" name="Google Shape;218;p34"/>
+          <p:cNvPr id="216" name="Google Shape;216;p34"/>
           <p:cNvSpPr txBox="1"/>
           <p:nvPr>
             <p:ph type="title"/>
@@ -15181,7 +15001,7 @@
       </p:sp>
       <p:sp>
         <p:nvSpPr>
-          <p:cNvPr id="219" name="Google Shape;219;p34"/>
+          <p:cNvPr id="217" name="Google Shape;217;p34"/>
           <p:cNvSpPr txBox="1"/>
           <p:nvPr>
             <p:ph idx="1" type="body"/>
@@ -15318,7 +15138,7 @@
       </p:sp>
       <p:sp>
         <p:nvSpPr>
-          <p:cNvPr id="220" name="Google Shape;220;p34"/>
+          <p:cNvPr id="218" name="Google Shape;218;p34"/>
           <p:cNvSpPr txBox="1"/>
           <p:nvPr>
             <p:ph idx="12" type="sldNum"/>
@@ -15394,7 +15214,7 @@
   <p:cSld>
     <p:spTree>
       <p:nvGrpSpPr>
-        <p:cNvPr id="224" name="Shape 224"/>
+        <p:cNvPr id="222" name="Shape 222"/>
         <p:cNvGrpSpPr/>
         <p:nvPr/>
       </p:nvGrpSpPr>
@@ -15408,7 +15228,7 @@
       </p:grpSpPr>
       <p:sp>
         <p:nvSpPr>
-          <p:cNvPr id="225" name="Google Shape;225;p35"/>
+          <p:cNvPr id="223" name="Google Shape;223;p35"/>
           <p:cNvSpPr txBox="1"/>
           <p:nvPr>
             <p:ph idx="1" type="body"/>
@@ -15499,7 +15319,7 @@
       </p:sp>
       <p:sp>
         <p:nvSpPr>
-          <p:cNvPr id="226" name="Google Shape;226;p35"/>
+          <p:cNvPr id="224" name="Google Shape;224;p35"/>
           <p:cNvSpPr txBox="1"/>
           <p:nvPr>
             <p:ph type="title"/>
@@ -15539,7 +15359,7 @@
       </p:sp>
       <p:sp>
         <p:nvSpPr>
-          <p:cNvPr id="227" name="Google Shape;227;p35"/>
+          <p:cNvPr id="225" name="Google Shape;225;p35"/>
           <p:cNvSpPr txBox="1"/>
           <p:nvPr>
             <p:ph idx="12" type="sldNum"/>
@@ -15604,7 +15424,7 @@
       </p:sp>
       <p:pic>
         <p:nvPicPr>
-          <p:cNvPr id="228" name="Google Shape;228;p35"/>
+          <p:cNvPr id="226" name="Google Shape;226;p35"/>
           <p:cNvPicPr preferRelativeResize="0"/>
           <p:nvPr/>
         </p:nvPicPr>
@@ -15643,7 +15463,7 @@
   <p:cSld>
     <p:spTree>
       <p:nvGrpSpPr>
-        <p:cNvPr id="232" name="Shape 232"/>
+        <p:cNvPr id="230" name="Shape 230"/>
         <p:cNvGrpSpPr/>
         <p:nvPr/>
       </p:nvGrpSpPr>
@@ -15657,7 +15477,7 @@
       </p:grpSpPr>
       <p:sp>
         <p:nvSpPr>
-          <p:cNvPr id="233" name="Google Shape;233;p36"/>
+          <p:cNvPr id="231" name="Google Shape;231;p36"/>
           <p:cNvSpPr txBox="1"/>
           <p:nvPr>
             <p:ph type="title"/>
@@ -15697,7 +15517,7 @@
       </p:sp>
       <p:sp>
         <p:nvSpPr>
-          <p:cNvPr id="234" name="Google Shape;234;p36"/>
+          <p:cNvPr id="232" name="Google Shape;232;p36"/>
           <p:cNvSpPr txBox="1"/>
           <p:nvPr>
             <p:ph idx="12" type="sldNum"/>
@@ -15762,7 +15582,7 @@
       </p:sp>
       <p:pic>
         <p:nvPicPr>
-          <p:cNvPr id="235" name="Google Shape;235;p36"/>
+          <p:cNvPr id="233" name="Google Shape;233;p36"/>
           <p:cNvPicPr preferRelativeResize="0"/>
           <p:nvPr/>
         </p:nvPicPr>
@@ -15801,7 +15621,7 @@
   <p:cSld>
     <p:spTree>
       <p:nvGrpSpPr>
-        <p:cNvPr id="49" name="Shape 49"/>
+        <p:cNvPr id="48" name="Shape 48"/>
         <p:cNvGrpSpPr/>
         <p:nvPr/>
       </p:nvGrpSpPr>
@@ -15815,7 +15635,7 @@
       </p:grpSpPr>
       <p:sp>
         <p:nvSpPr>
-          <p:cNvPr id="50" name="Google Shape;50;p10"/>
+          <p:cNvPr id="49" name="Google Shape;49;p10"/>
           <p:cNvSpPr txBox="1"/>
           <p:nvPr>
             <p:ph type="title"/>
@@ -15866,7 +15686,7 @@
   <p:cSld>
     <p:spTree>
       <p:nvGrpSpPr>
-        <p:cNvPr id="239" name="Shape 239"/>
+        <p:cNvPr id="237" name="Shape 237"/>
         <p:cNvGrpSpPr/>
         <p:nvPr/>
       </p:nvGrpSpPr>
@@ -15880,7 +15700,7 @@
       </p:grpSpPr>
       <p:sp>
         <p:nvSpPr>
-          <p:cNvPr id="240" name="Google Shape;240;p37"/>
+          <p:cNvPr id="238" name="Google Shape;238;p37"/>
           <p:cNvSpPr txBox="1"/>
           <p:nvPr>
             <p:ph type="title"/>
@@ -15920,7 +15740,7 @@
       </p:sp>
       <p:sp>
         <p:nvSpPr>
-          <p:cNvPr id="241" name="Google Shape;241;p37"/>
+          <p:cNvPr id="239" name="Google Shape;239;p37"/>
           <p:cNvSpPr txBox="1"/>
           <p:nvPr>
             <p:ph idx="12" type="sldNum"/>
@@ -15985,7 +15805,7 @@
       </p:sp>
       <p:pic>
         <p:nvPicPr>
-          <p:cNvPr id="242" name="Google Shape;242;p37"/>
+          <p:cNvPr id="240" name="Google Shape;240;p37"/>
           <p:cNvPicPr preferRelativeResize="0"/>
           <p:nvPr/>
         </p:nvPicPr>
@@ -16024,7 +15844,7 @@
   <p:cSld>
     <p:spTree>
       <p:nvGrpSpPr>
-        <p:cNvPr id="246" name="Shape 246"/>
+        <p:cNvPr id="244" name="Shape 244"/>
         <p:cNvGrpSpPr/>
         <p:nvPr/>
       </p:nvGrpSpPr>
@@ -16038,7 +15858,7 @@
       </p:grpSpPr>
       <p:sp>
         <p:nvSpPr>
-          <p:cNvPr id="247" name="Google Shape;247;p38"/>
+          <p:cNvPr id="245" name="Google Shape;245;p38"/>
           <p:cNvSpPr txBox="1"/>
           <p:nvPr>
             <p:ph type="title"/>
@@ -16078,7 +15898,7 @@
       </p:sp>
       <p:sp>
         <p:nvSpPr>
-          <p:cNvPr id="248" name="Google Shape;248;p38"/>
+          <p:cNvPr id="246" name="Google Shape;246;p38"/>
           <p:cNvSpPr txBox="1"/>
           <p:nvPr>
             <p:ph idx="1" type="body"/>
@@ -16126,7 +15946,7 @@
             </a:pPr>
             <a:r>
               <a:rPr lang="en"/>
-              <a:t>As you are now dealing with human subjects, also</a:t>
+              <a:t>As you are dealing with human subjects, also</a:t>
             </a:r>
             <a:endParaRPr/>
           </a:p>
@@ -16143,7 +15963,7 @@
             </a:pPr>
             <a:r>
               <a:rPr lang="en"/>
-              <a:t>Review research ethics and implications</a:t>
+              <a:t>Clearly review research ethics and implications</a:t>
             </a:r>
             <a:endParaRPr/>
           </a:p>
@@ -16218,7 +16038,7 @@
       </p:sp>
       <p:sp>
         <p:nvSpPr>
-          <p:cNvPr id="249" name="Google Shape;249;p38"/>
+          <p:cNvPr id="247" name="Google Shape;247;p38"/>
           <p:cNvSpPr txBox="1"/>
           <p:nvPr>
             <p:ph idx="12" type="sldNum"/>
@@ -16294,7 +16114,7 @@
   <p:cSld>
     <p:spTree>
       <p:nvGrpSpPr>
-        <p:cNvPr id="253" name="Shape 253"/>
+        <p:cNvPr id="251" name="Shape 251"/>
         <p:cNvGrpSpPr/>
         <p:nvPr/>
       </p:nvGrpSpPr>
@@ -16308,7 +16128,7 @@
       </p:grpSpPr>
       <p:sp>
         <p:nvSpPr>
-          <p:cNvPr id="254" name="Google Shape;254;p39"/>
+          <p:cNvPr id="252" name="Google Shape;252;p39"/>
           <p:cNvSpPr txBox="1"/>
           <p:nvPr>
             <p:ph type="title"/>
@@ -16359,7 +16179,7 @@
   <p:cSld>
     <p:spTree>
       <p:nvGrpSpPr>
-        <p:cNvPr id="258" name="Shape 258"/>
+        <p:cNvPr id="256" name="Shape 256"/>
         <p:cNvGrpSpPr/>
         <p:nvPr/>
       </p:nvGrpSpPr>
@@ -16373,7 +16193,7 @@
       </p:grpSpPr>
       <p:sp>
         <p:nvSpPr>
-          <p:cNvPr id="259" name="Google Shape;259;p40"/>
+          <p:cNvPr id="257" name="Google Shape;257;p40"/>
           <p:cNvSpPr txBox="1"/>
           <p:nvPr>
             <p:ph type="title"/>
@@ -16413,7 +16233,7 @@
       </p:sp>
       <p:sp>
         <p:nvSpPr>
-          <p:cNvPr id="260" name="Google Shape;260;p40"/>
+          <p:cNvPr id="258" name="Google Shape;258;p40"/>
           <p:cNvSpPr txBox="1"/>
           <p:nvPr>
             <p:ph idx="1" type="body"/>
@@ -16569,7 +16389,7 @@
       </p:sp>
       <p:sp>
         <p:nvSpPr>
-          <p:cNvPr id="261" name="Google Shape;261;p40"/>
+          <p:cNvPr id="259" name="Google Shape;259;p40"/>
           <p:cNvSpPr txBox="1"/>
           <p:nvPr>
             <p:ph idx="12" type="sldNum"/>
@@ -16645,7 +16465,7 @@
   <p:cSld>
     <p:spTree>
       <p:nvGrpSpPr>
-        <p:cNvPr id="265" name="Shape 265"/>
+        <p:cNvPr id="263" name="Shape 263"/>
         <p:cNvGrpSpPr/>
         <p:nvPr/>
       </p:nvGrpSpPr>
@@ -16659,7 +16479,7 @@
       </p:grpSpPr>
       <p:sp>
         <p:nvSpPr>
-          <p:cNvPr id="266" name="Google Shape;266;p41"/>
+          <p:cNvPr id="264" name="Google Shape;264;p41"/>
           <p:cNvSpPr txBox="1"/>
           <p:nvPr>
             <p:ph type="title"/>
@@ -16699,7 +16519,7 @@
       </p:sp>
       <p:sp>
         <p:nvSpPr>
-          <p:cNvPr id="267" name="Google Shape;267;p41"/>
+          <p:cNvPr id="265" name="Google Shape;265;p41"/>
           <p:cNvSpPr txBox="1"/>
           <p:nvPr>
             <p:ph idx="12" type="sldNum"/>
@@ -16764,7 +16584,7 @@
       </p:sp>
       <p:sp>
         <p:nvSpPr>
-          <p:cNvPr id="268" name="Google Shape;268;p41"/>
+          <p:cNvPr id="266" name="Google Shape;266;p41"/>
           <p:cNvSpPr txBox="1"/>
           <p:nvPr>
             <p:ph idx="1" type="body"/>
@@ -16847,7 +16667,7 @@
   <p:cSld>
     <p:spTree>
       <p:nvGrpSpPr>
-        <p:cNvPr id="272" name="Shape 272"/>
+        <p:cNvPr id="270" name="Shape 270"/>
         <p:cNvGrpSpPr/>
         <p:nvPr/>
       </p:nvGrpSpPr>
@@ -16861,7 +16681,7 @@
       </p:grpSpPr>
       <p:sp>
         <p:nvSpPr>
-          <p:cNvPr id="273" name="Google Shape;273;p42"/>
+          <p:cNvPr id="271" name="Google Shape;271;p42"/>
           <p:cNvSpPr txBox="1"/>
           <p:nvPr>
             <p:ph type="title"/>
@@ -16877,7 +16697,7 @@
           </a:prstGeom>
         </p:spPr>
         <p:txBody>
-          <a:bodyPr anchorCtr="0" anchor="ctr" bIns="0" lIns="274300" spcFirstLastPara="1" rIns="0" wrap="square" tIns="0">
+          <a:bodyPr anchorCtr="0" anchor="ctr" bIns="91425" lIns="274300" spcFirstLastPara="1" rIns="91425" wrap="square" tIns="91425">
             <a:noAutofit/>
           </a:bodyPr>
           <a:lstStyle/>
@@ -16901,7 +16721,7 @@
       </p:sp>
       <p:sp>
         <p:nvSpPr>
-          <p:cNvPr id="274" name="Google Shape;274;p42"/>
+          <p:cNvPr id="272" name="Google Shape;272;p42"/>
           <p:cNvSpPr txBox="1"/>
           <p:nvPr>
             <p:ph idx="12" type="sldNum"/>
@@ -16966,7 +16786,7 @@
       </p:sp>
       <p:sp>
         <p:nvSpPr>
-          <p:cNvPr id="275" name="Google Shape;275;p42"/>
+          <p:cNvPr id="273" name="Google Shape;273;p42"/>
           <p:cNvSpPr txBox="1"/>
           <p:nvPr>
             <p:ph idx="1" type="body"/>
@@ -16975,64 +16795,7 @@
         <p:spPr>
           <a:xfrm>
             <a:off x="274320" y="914400"/>
-            <a:ext cx="4114800" cy="4114800"/>
-          </a:xfrm>
-          <a:prstGeom prst="rect">
-            <a:avLst/>
-          </a:prstGeom>
-        </p:spPr>
-        <p:txBody>
-          <a:bodyPr anchorCtr="0" anchor="t" bIns="91425" lIns="0" spcFirstLastPara="1" rIns="91425" wrap="square" tIns="0">
-            <a:noAutofit/>
-          </a:bodyPr>
-          <a:lstStyle/>
-          <a:p>
-            <a:pPr indent="0" lvl="0" marL="0" rtl="0" algn="l">
-              <a:spcBef>
-                <a:spcPts val="0"/>
-              </a:spcBef>
-              <a:spcAft>
-                <a:spcPts val="0"/>
-              </a:spcAft>
-              <a:buNone/>
-            </a:pPr>
-            <a:r>
-              <a:rPr b="1" lang="en"/>
-              <a:t>As participant improving practice</a:t>
-            </a:r>
-            <a:endParaRPr b="1"/>
-          </a:p>
-          <a:p>
-            <a:pPr indent="-342900" lvl="0" marL="457200" rtl="0" algn="l">
-              <a:spcBef>
-                <a:spcPts val="1200"/>
-              </a:spcBef>
-              <a:spcAft>
-                <a:spcPts val="0"/>
-              </a:spcAft>
-              <a:buSzPts val="1800"/>
-              <a:buChar char="●"/>
-            </a:pPr>
-            <a:r>
-              <a:rPr lang="en"/>
-              <a:t>We helped review the situation</a:t>
-            </a:r>
-            <a:endParaRPr/>
-          </a:p>
-        </p:txBody>
-      </p:sp>
-      <p:sp>
-        <p:nvSpPr>
-          <p:cNvPr id="276" name="Google Shape;276;p42"/>
-          <p:cNvSpPr txBox="1"/>
-          <p:nvPr>
-            <p:ph idx="2" type="body"/>
-          </p:nvPr>
-        </p:nvSpPr>
-        <p:spPr>
-          <a:xfrm>
-            <a:off x="4846320" y="914400"/>
-            <a:ext cx="4114800" cy="4114800"/>
+            <a:ext cx="8595300" cy="4114800"/>
           </a:xfrm>
           <a:prstGeom prst="rect">
             <a:avLst/>
@@ -17055,7 +16818,7 @@
             </a:pPr>
             <a:r>
               <a:rPr b="1" lang="en"/>
-              <a:t>As researcher performing research</a:t>
+              <a:t>As participant improving practice</a:t>
             </a:r>
             <a:endParaRPr b="1"/>
           </a:p>
@@ -17072,7 +16835,55 @@
             </a:pPr>
             <a:r>
               <a:rPr lang="en"/>
+              <a:t>We helped review the situation</a:t>
+            </a:r>
+            <a:endParaRPr/>
+          </a:p>
+          <a:p>
+            <a:pPr indent="0" lvl="0" marL="0" rtl="0" algn="l">
+              <a:spcBef>
+                <a:spcPts val="1200"/>
+              </a:spcBef>
+              <a:spcAft>
+                <a:spcPts val="0"/>
+              </a:spcAft>
+              <a:buNone/>
+            </a:pPr>
+            <a:r>
+              <a:rPr b="1" lang="en"/>
+              <a:t>As researcher performing research</a:t>
+            </a:r>
+            <a:endParaRPr b="1"/>
+          </a:p>
+          <a:p>
+            <a:pPr indent="-342900" lvl="0" marL="457200" rtl="0" algn="l">
+              <a:spcBef>
+                <a:spcPts val="1200"/>
+              </a:spcBef>
+              <a:spcAft>
+                <a:spcPts val="0"/>
+              </a:spcAft>
+              <a:buSzPts val="1800"/>
+              <a:buChar char="●"/>
+            </a:pPr>
+            <a:r>
+              <a:rPr lang="en"/>
               <a:t>We performed participant observation</a:t>
+            </a:r>
+            <a:endParaRPr/>
+          </a:p>
+          <a:p>
+            <a:pPr indent="0" lvl="0" marL="0" rtl="0" algn="l">
+              <a:spcBef>
+                <a:spcPts val="1200"/>
+              </a:spcBef>
+              <a:spcAft>
+                <a:spcPts val="1200"/>
+              </a:spcAft>
+              <a:buNone/>
+            </a:pPr>
+            <a:r>
+              <a:t/>
             </a:r>
             <a:endParaRPr/>
           </a:p>
@@ -17091,7 +16902,7 @@
   <p:cSld>
     <p:spTree>
       <p:nvGrpSpPr>
-        <p:cNvPr id="280" name="Shape 280"/>
+        <p:cNvPr id="277" name="Shape 277"/>
         <p:cNvGrpSpPr/>
         <p:nvPr/>
       </p:nvGrpSpPr>
@@ -17105,7 +16916,7 @@
       </p:grpSpPr>
       <p:sp>
         <p:nvSpPr>
-          <p:cNvPr id="281" name="Google Shape;281;p43"/>
+          <p:cNvPr id="278" name="Google Shape;278;p43"/>
           <p:cNvSpPr txBox="1"/>
           <p:nvPr>
             <p:ph type="title"/>
@@ -17145,7 +16956,7 @@
       </p:sp>
       <p:sp>
         <p:nvSpPr>
-          <p:cNvPr id="282" name="Google Shape;282;p43"/>
+          <p:cNvPr id="279" name="Google Shape;279;p43"/>
           <p:cNvSpPr txBox="1"/>
           <p:nvPr>
             <p:ph idx="1" type="body"/>
@@ -17225,7 +17036,7 @@
       </p:sp>
       <p:sp>
         <p:nvSpPr>
-          <p:cNvPr id="283" name="Google Shape;283;p43"/>
+          <p:cNvPr id="280" name="Google Shape;280;p43"/>
           <p:cNvSpPr txBox="1"/>
           <p:nvPr>
             <p:ph idx="12" type="sldNum"/>
@@ -17301,7 +17112,7 @@
   <p:cSld>
     <p:spTree>
       <p:nvGrpSpPr>
-        <p:cNvPr id="287" name="Shape 287"/>
+        <p:cNvPr id="284" name="Shape 284"/>
         <p:cNvGrpSpPr/>
         <p:nvPr/>
       </p:nvGrpSpPr>
@@ -17315,7 +17126,7 @@
       </p:grpSpPr>
       <p:sp>
         <p:nvSpPr>
-          <p:cNvPr id="288" name="Google Shape;288;p44"/>
+          <p:cNvPr id="285" name="Google Shape;285;p44"/>
           <p:cNvSpPr txBox="1"/>
           <p:nvPr>
             <p:ph type="title"/>
@@ -17355,7 +17166,7 @@
       </p:sp>
       <p:sp>
         <p:nvSpPr>
-          <p:cNvPr id="289" name="Google Shape;289;p44"/>
+          <p:cNvPr id="286" name="Google Shape;286;p44"/>
           <p:cNvSpPr txBox="1"/>
           <p:nvPr>
             <p:ph idx="1" type="body"/>
@@ -17412,7 +17223,7 @@
       </p:sp>
       <p:sp>
         <p:nvSpPr>
-          <p:cNvPr id="290" name="Google Shape;290;p44"/>
+          <p:cNvPr id="287" name="Google Shape;287;p44"/>
           <p:cNvSpPr txBox="1"/>
           <p:nvPr>
             <p:ph idx="12" type="sldNum"/>
@@ -17488,7 +17299,7 @@
   <p:cSld>
     <p:spTree>
       <p:nvGrpSpPr>
-        <p:cNvPr id="294" name="Shape 294"/>
+        <p:cNvPr id="291" name="Shape 291"/>
         <p:cNvGrpSpPr/>
         <p:nvPr/>
       </p:nvGrpSpPr>
@@ -17502,7 +17313,7 @@
       </p:grpSpPr>
       <p:sp>
         <p:nvSpPr>
-          <p:cNvPr id="295" name="Google Shape;295;p45"/>
+          <p:cNvPr id="292" name="Google Shape;292;p45"/>
           <p:cNvSpPr txBox="1"/>
           <p:nvPr>
             <p:ph type="title"/>
@@ -17518,7 +17329,7 @@
           </a:prstGeom>
         </p:spPr>
         <p:txBody>
-          <a:bodyPr anchorCtr="0" anchor="ctr" bIns="0" lIns="274300" spcFirstLastPara="1" rIns="0" wrap="square" tIns="0">
+          <a:bodyPr anchorCtr="0" anchor="ctr" bIns="91425" lIns="274300" spcFirstLastPara="1" rIns="91425" wrap="square" tIns="91425">
             <a:noAutofit/>
           </a:bodyPr>
           <a:lstStyle/>
@@ -17542,7 +17353,7 @@
       </p:sp>
       <p:sp>
         <p:nvSpPr>
-          <p:cNvPr id="296" name="Google Shape;296;p45"/>
+          <p:cNvPr id="293" name="Google Shape;293;p45"/>
           <p:cNvSpPr txBox="1"/>
           <p:nvPr>
             <p:ph idx="12" type="sldNum"/>
@@ -17607,16 +17418,16 @@
       </p:sp>
       <p:sp>
         <p:nvSpPr>
-          <p:cNvPr id="297" name="Google Shape;297;p45"/>
+          <p:cNvPr id="294" name="Google Shape;294;p45"/>
           <p:cNvSpPr txBox="1"/>
           <p:nvPr>
-            <p:ph idx="2" type="body"/>
-          </p:nvPr>
-        </p:nvSpPr>
-        <p:spPr>
-          <a:xfrm>
-            <a:off x="4846320" y="914400"/>
-            <a:ext cx="4114800" cy="4114800"/>
+            <p:ph idx="1" type="body"/>
+          </p:nvPr>
+        </p:nvSpPr>
+        <p:spPr>
+          <a:xfrm>
+            <a:off x="274320" y="914400"/>
+            <a:ext cx="8595300" cy="4114800"/>
           </a:xfrm>
           <a:prstGeom prst="rect">
             <a:avLst/>
@@ -17639,7 +17450,7 @@
             </a:pPr>
             <a:r>
               <a:rPr b="1" lang="en"/>
-              <a:t>As researcher performing research</a:t>
+              <a:t>As participant improving practice</a:t>
             </a:r>
             <a:endParaRPr b="1"/>
           </a:p>
@@ -17656,38 +17467,14 @@
             </a:pPr>
             <a:r>
               <a:rPr lang="en"/>
-              <a:t>We continued participant observation</a:t>
-            </a:r>
-            <a:endParaRPr/>
-          </a:p>
-        </p:txBody>
-      </p:sp>
-      <p:sp>
-        <p:nvSpPr>
-          <p:cNvPr id="298" name="Google Shape;298;p45"/>
-          <p:cNvSpPr txBox="1"/>
-          <p:nvPr>
-            <p:ph idx="1" type="body"/>
-          </p:nvPr>
-        </p:nvSpPr>
-        <p:spPr>
-          <a:xfrm>
-            <a:off x="274320" y="914400"/>
-            <a:ext cx="4114800" cy="4114800"/>
-          </a:xfrm>
-          <a:prstGeom prst="rect">
-            <a:avLst/>
-          </a:prstGeom>
-        </p:spPr>
-        <p:txBody>
-          <a:bodyPr anchorCtr="0" anchor="t" bIns="91425" lIns="0" spcFirstLastPara="1" rIns="91425" wrap="square" tIns="0">
-            <a:noAutofit/>
-          </a:bodyPr>
-          <a:lstStyle/>
+              <a:t>We helped define the process</a:t>
+            </a:r>
+            <a:endParaRPr/>
+          </a:p>
           <a:p>
             <a:pPr indent="0" lvl="0" marL="0" rtl="0" algn="l">
               <a:spcBef>
-                <a:spcPts val="0"/>
+                <a:spcPts val="1200"/>
               </a:spcBef>
               <a:spcAft>
                 <a:spcPts val="0"/>
@@ -17696,7 +17483,7 @@
             </a:pPr>
             <a:r>
               <a:rPr b="1" lang="en"/>
-              <a:t>As participant improving practice</a:t>
+              <a:t>As researcher performing research</a:t>
             </a:r>
             <a:endParaRPr b="1"/>
           </a:p>
@@ -17713,7 +17500,22 @@
             </a:pPr>
             <a:r>
               <a:rPr lang="en"/>
-              <a:t>We helped define the process</a:t>
+              <a:t>We continued participant observation</a:t>
+            </a:r>
+            <a:endParaRPr/>
+          </a:p>
+          <a:p>
+            <a:pPr indent="0" lvl="0" marL="0" rtl="0" algn="l">
+              <a:spcBef>
+                <a:spcPts val="1200"/>
+              </a:spcBef>
+              <a:spcAft>
+                <a:spcPts val="1200"/>
+              </a:spcAft>
+              <a:buNone/>
+            </a:pPr>
+            <a:r>
+              <a:t/>
             </a:r>
             <a:endParaRPr/>
           </a:p>
@@ -17732,7 +17534,7 @@
   <p:cSld>
     <p:spTree>
       <p:nvGrpSpPr>
-        <p:cNvPr id="302" name="Shape 302"/>
+        <p:cNvPr id="298" name="Shape 298"/>
         <p:cNvGrpSpPr/>
         <p:nvPr/>
       </p:nvGrpSpPr>
@@ -17746,7 +17548,7 @@
       </p:grpSpPr>
       <p:sp>
         <p:nvSpPr>
-          <p:cNvPr id="303" name="Google Shape;303;p46"/>
+          <p:cNvPr id="299" name="Google Shape;299;p46"/>
           <p:cNvSpPr txBox="1"/>
           <p:nvPr>
             <p:ph type="title"/>
@@ -17786,7 +17588,7 @@
       </p:sp>
       <p:sp>
         <p:nvSpPr>
-          <p:cNvPr id="304" name="Google Shape;304;p46"/>
+          <p:cNvPr id="300" name="Google Shape;300;p46"/>
           <p:cNvSpPr txBox="1"/>
           <p:nvPr>
             <p:ph idx="1" type="body"/>
@@ -17851,7 +17653,7 @@
       </p:sp>
       <p:sp>
         <p:nvSpPr>
-          <p:cNvPr id="305" name="Google Shape;305;p46"/>
+          <p:cNvPr id="301" name="Google Shape;301;p46"/>
           <p:cNvSpPr txBox="1"/>
           <p:nvPr>
             <p:ph idx="12" type="sldNum"/>
@@ -17927,7 +17729,7 @@
   <p:cSld>
     <p:spTree>
       <p:nvGrpSpPr>
-        <p:cNvPr id="54" name="Shape 54"/>
+        <p:cNvPr id="53" name="Shape 53"/>
         <p:cNvGrpSpPr/>
         <p:nvPr/>
       </p:nvGrpSpPr>
@@ -17941,7 +17743,7 @@
       </p:grpSpPr>
       <p:sp>
         <p:nvSpPr>
-          <p:cNvPr id="55" name="Google Shape;55;p11"/>
+          <p:cNvPr id="54" name="Google Shape;54;p11"/>
           <p:cNvSpPr txBox="1"/>
           <p:nvPr>
             <p:ph type="title"/>
@@ -17981,7 +17783,7 @@
       </p:sp>
       <p:sp>
         <p:nvSpPr>
-          <p:cNvPr id="56" name="Google Shape;56;p11"/>
+          <p:cNvPr id="55" name="Google Shape;55;p11"/>
           <p:cNvSpPr txBox="1"/>
           <p:nvPr>
             <p:ph idx="1" type="body"/>
@@ -18141,7 +17943,7 @@
       </p:sp>
       <p:sp>
         <p:nvSpPr>
-          <p:cNvPr id="57" name="Google Shape;57;p11"/>
+          <p:cNvPr id="56" name="Google Shape;56;p11"/>
           <p:cNvSpPr txBox="1"/>
           <p:nvPr>
             <p:ph idx="12" type="sldNum"/>
@@ -18217,7 +18019,7 @@
   <p:cSld>
     <p:spTree>
       <p:nvGrpSpPr>
-        <p:cNvPr id="309" name="Shape 309"/>
+        <p:cNvPr id="305" name="Shape 305"/>
         <p:cNvGrpSpPr/>
         <p:nvPr/>
       </p:nvGrpSpPr>
@@ -18231,7 +18033,7 @@
       </p:grpSpPr>
       <p:sp>
         <p:nvSpPr>
-          <p:cNvPr id="310" name="Google Shape;310;p47"/>
+          <p:cNvPr id="306" name="Google Shape;306;p47"/>
           <p:cNvSpPr txBox="1"/>
           <p:nvPr>
             <p:ph idx="1" type="body"/>
@@ -18305,7 +18107,7 @@
       </p:sp>
       <p:sp>
         <p:nvSpPr>
-          <p:cNvPr id="311" name="Google Shape;311;p47"/>
+          <p:cNvPr id="307" name="Google Shape;307;p47"/>
           <p:cNvSpPr txBox="1"/>
           <p:nvPr>
             <p:ph type="title"/>
@@ -18345,7 +18147,7 @@
       </p:sp>
       <p:sp>
         <p:nvSpPr>
-          <p:cNvPr id="312" name="Google Shape;312;p47"/>
+          <p:cNvPr id="308" name="Google Shape;308;p47"/>
           <p:cNvSpPr txBox="1"/>
           <p:nvPr>
             <p:ph idx="12" type="sldNum"/>
@@ -18421,7 +18223,7 @@
   <p:cSld>
     <p:spTree>
       <p:nvGrpSpPr>
-        <p:cNvPr id="316" name="Shape 316"/>
+        <p:cNvPr id="312" name="Shape 312"/>
         <p:cNvGrpSpPr/>
         <p:nvPr/>
       </p:nvGrpSpPr>
@@ -18435,7 +18237,7 @@
       </p:grpSpPr>
       <p:sp>
         <p:nvSpPr>
-          <p:cNvPr id="317" name="Google Shape;317;p48"/>
+          <p:cNvPr id="313" name="Google Shape;313;p48"/>
           <p:cNvSpPr txBox="1"/>
           <p:nvPr>
             <p:ph type="title"/>
@@ -18451,7 +18253,7 @@
           </a:prstGeom>
         </p:spPr>
         <p:txBody>
-          <a:bodyPr anchorCtr="0" anchor="ctr" bIns="0" lIns="274300" spcFirstLastPara="1" rIns="0" wrap="square" tIns="0">
+          <a:bodyPr anchorCtr="0" anchor="ctr" bIns="91425" lIns="274300" spcFirstLastPara="1" rIns="91425" wrap="square" tIns="91425">
             <a:noAutofit/>
           </a:bodyPr>
           <a:lstStyle/>
@@ -18475,7 +18277,7 @@
       </p:sp>
       <p:sp>
         <p:nvSpPr>
-          <p:cNvPr id="318" name="Google Shape;318;p48"/>
+          <p:cNvPr id="314" name="Google Shape;314;p48"/>
           <p:cNvSpPr txBox="1"/>
           <p:nvPr>
             <p:ph idx="12" type="sldNum"/>
@@ -18540,7 +18342,7 @@
       </p:sp>
       <p:sp>
         <p:nvSpPr>
-          <p:cNvPr id="319" name="Google Shape;319;p48"/>
+          <p:cNvPr id="315" name="Google Shape;315;p48"/>
           <p:cNvSpPr txBox="1"/>
           <p:nvPr>
             <p:ph idx="1" type="body"/>
@@ -18549,64 +18351,7 @@
         <p:spPr>
           <a:xfrm>
             <a:off x="274320" y="914400"/>
-            <a:ext cx="4114800" cy="4114800"/>
-          </a:xfrm>
-          <a:prstGeom prst="rect">
-            <a:avLst/>
-          </a:prstGeom>
-        </p:spPr>
-        <p:txBody>
-          <a:bodyPr anchorCtr="0" anchor="t" bIns="91425" lIns="0" spcFirstLastPara="1" rIns="91425" wrap="square" tIns="0">
-            <a:noAutofit/>
-          </a:bodyPr>
-          <a:lstStyle/>
-          <a:p>
-            <a:pPr indent="0" lvl="0" marL="0" rtl="0" algn="l">
-              <a:spcBef>
-                <a:spcPts val="0"/>
-              </a:spcBef>
-              <a:spcAft>
-                <a:spcPts val="0"/>
-              </a:spcAft>
-              <a:buNone/>
-            </a:pPr>
-            <a:r>
-              <a:rPr b="1" lang="en"/>
-              <a:t>As participant improving practice</a:t>
-            </a:r>
-            <a:endParaRPr b="1"/>
-          </a:p>
-          <a:p>
-            <a:pPr indent="-342900" lvl="0" marL="457200" rtl="0" algn="l">
-              <a:spcBef>
-                <a:spcPts val="1200"/>
-              </a:spcBef>
-              <a:spcAft>
-                <a:spcPts val="0"/>
-              </a:spcAft>
-              <a:buSzPts val="1800"/>
-              <a:buChar char="●"/>
-            </a:pPr>
-            <a:r>
-              <a:rPr lang="en"/>
-              <a:t>We helped the first process instances</a:t>
-            </a:r>
-            <a:endParaRPr/>
-          </a:p>
-        </p:txBody>
-      </p:sp>
-      <p:sp>
-        <p:nvSpPr>
-          <p:cNvPr id="320" name="Google Shape;320;p48"/>
-          <p:cNvSpPr txBox="1"/>
-          <p:nvPr>
-            <p:ph idx="2" type="body"/>
-          </p:nvPr>
-        </p:nvSpPr>
-        <p:spPr>
-          <a:xfrm>
-            <a:off x="4846320" y="914400"/>
-            <a:ext cx="4114800" cy="4114800"/>
+            <a:ext cx="8595300" cy="4114800"/>
           </a:xfrm>
           <a:prstGeom prst="rect">
             <a:avLst/>
@@ -18625,11 +18370,39 @@
               <a:spcAft>
                 <a:spcPts val="0"/>
               </a:spcAft>
-              <a:buClr>
-                <a:schemeClr val="dk1"/>
-              </a:buClr>
-              <a:buSzPts val="1100"/>
-              <a:buFont typeface="Arial"/>
+              <a:buNone/>
+            </a:pPr>
+            <a:r>
+              <a:rPr b="1" lang="en"/>
+              <a:t>As participant improving practice</a:t>
+            </a:r>
+            <a:endParaRPr b="1"/>
+          </a:p>
+          <a:p>
+            <a:pPr indent="-342900" lvl="0" marL="457200" rtl="0" algn="l">
+              <a:spcBef>
+                <a:spcPts val="1200"/>
+              </a:spcBef>
+              <a:spcAft>
+                <a:spcPts val="0"/>
+              </a:spcAft>
+              <a:buSzPts val="1800"/>
+              <a:buChar char="●"/>
+            </a:pPr>
+            <a:r>
+              <a:rPr lang="en"/>
+              <a:t>We helped the first process instances</a:t>
+            </a:r>
+            <a:endParaRPr/>
+          </a:p>
+          <a:p>
+            <a:pPr indent="0" lvl="0" marL="0" rtl="0" algn="l">
+              <a:spcBef>
+                <a:spcPts val="1200"/>
+              </a:spcBef>
+              <a:spcAft>
+                <a:spcPts val="0"/>
+              </a:spcAft>
               <a:buNone/>
             </a:pPr>
             <a:r>
@@ -18686,6 +18459,21 @@
             <a:r>
               <a:rPr lang="en"/>
               <a:t>We performed exit interviews</a:t>
+            </a:r>
+            <a:endParaRPr/>
+          </a:p>
+          <a:p>
+            <a:pPr indent="0" lvl="0" marL="0" rtl="0" algn="l">
+              <a:spcBef>
+                <a:spcPts val="1200"/>
+              </a:spcBef>
+              <a:spcAft>
+                <a:spcPts val="0"/>
+              </a:spcAft>
+              <a:buNone/>
+            </a:pPr>
+            <a:r>
+              <a:t/>
             </a:r>
             <a:endParaRPr/>
           </a:p>
@@ -18719,7 +18507,7 @@
   <p:cSld>
     <p:spTree>
       <p:nvGrpSpPr>
-        <p:cNvPr id="324" name="Shape 324"/>
+        <p:cNvPr id="319" name="Shape 319"/>
         <p:cNvGrpSpPr/>
         <p:nvPr/>
       </p:nvGrpSpPr>
@@ -18733,7 +18521,7 @@
       </p:grpSpPr>
       <p:sp>
         <p:nvSpPr>
-          <p:cNvPr id="325" name="Google Shape;325;p49"/>
+          <p:cNvPr id="320" name="Google Shape;320;p49"/>
           <p:cNvSpPr txBox="1"/>
           <p:nvPr>
             <p:ph type="title"/>
@@ -18773,7 +18561,7 @@
       </p:sp>
       <p:sp>
         <p:nvSpPr>
-          <p:cNvPr id="326" name="Google Shape;326;p49"/>
+          <p:cNvPr id="321" name="Google Shape;321;p49"/>
           <p:cNvSpPr txBox="1"/>
           <p:nvPr>
             <p:ph idx="1" type="body"/>
@@ -18853,7 +18641,7 @@
       </p:sp>
       <p:sp>
         <p:nvSpPr>
-          <p:cNvPr id="327" name="Google Shape;327;p49"/>
+          <p:cNvPr id="322" name="Google Shape;322;p49"/>
           <p:cNvSpPr txBox="1"/>
           <p:nvPr>
             <p:ph idx="12" type="sldNum"/>
@@ -18929,7 +18717,7 @@
   <p:cSld>
     <p:spTree>
       <p:nvGrpSpPr>
-        <p:cNvPr id="331" name="Shape 331"/>
+        <p:cNvPr id="326" name="Shape 326"/>
         <p:cNvGrpSpPr/>
         <p:nvPr/>
       </p:nvGrpSpPr>
@@ -18943,7 +18731,7 @@
       </p:grpSpPr>
       <p:sp>
         <p:nvSpPr>
-          <p:cNvPr id="332" name="Google Shape;332;p50"/>
+          <p:cNvPr id="327" name="Google Shape;327;p50"/>
           <p:cNvSpPr txBox="1"/>
           <p:nvPr>
             <p:ph type="title"/>
@@ -18983,7 +18771,7 @@
       </p:sp>
       <p:sp>
         <p:nvSpPr>
-          <p:cNvPr id="333" name="Google Shape;333;p50"/>
+          <p:cNvPr id="328" name="Google Shape;328;p50"/>
           <p:cNvSpPr txBox="1"/>
           <p:nvPr>
             <p:ph idx="12" type="sldNum"/>
@@ -19048,7 +18836,7 @@
       </p:sp>
       <p:sp>
         <p:nvSpPr>
-          <p:cNvPr id="334" name="Google Shape;334;p50"/>
+          <p:cNvPr id="329" name="Google Shape;329;p50"/>
           <p:cNvSpPr txBox="1"/>
           <p:nvPr>
             <p:ph idx="1" type="body"/>
@@ -19133,7 +18921,7 @@
   <p:cSld>
     <p:spTree>
       <p:nvGrpSpPr>
-        <p:cNvPr id="338" name="Shape 338"/>
+        <p:cNvPr id="333" name="Shape 333"/>
         <p:cNvGrpSpPr/>
         <p:nvPr/>
       </p:nvGrpSpPr>
@@ -19147,7 +18935,7 @@
       </p:grpSpPr>
       <p:sp>
         <p:nvSpPr>
-          <p:cNvPr id="339" name="Google Shape;339;p51"/>
+          <p:cNvPr id="334" name="Google Shape;334;p51"/>
           <p:cNvSpPr txBox="1"/>
           <p:nvPr>
             <p:ph type="title"/>
@@ -19163,7 +18951,7 @@
           </a:prstGeom>
         </p:spPr>
         <p:txBody>
-          <a:bodyPr anchorCtr="0" anchor="ctr" bIns="0" lIns="274300" spcFirstLastPara="1" rIns="0" wrap="square" tIns="0">
+          <a:bodyPr anchorCtr="0" anchor="ctr" bIns="91425" lIns="274300" spcFirstLastPara="1" rIns="91425" wrap="square" tIns="91425">
             <a:noAutofit/>
           </a:bodyPr>
           <a:lstStyle/>
@@ -19187,7 +18975,7 @@
       </p:sp>
       <p:sp>
         <p:nvSpPr>
-          <p:cNvPr id="340" name="Google Shape;340;p51"/>
+          <p:cNvPr id="335" name="Google Shape;335;p51"/>
           <p:cNvSpPr txBox="1"/>
           <p:nvPr>
             <p:ph idx="12" type="sldNum"/>
@@ -19252,7 +19040,7 @@
       </p:sp>
       <p:sp>
         <p:nvSpPr>
-          <p:cNvPr id="341" name="Google Shape;341;p51"/>
+          <p:cNvPr id="336" name="Google Shape;336;p51"/>
           <p:cNvSpPr txBox="1"/>
           <p:nvPr>
             <p:ph idx="1" type="body"/>
@@ -19261,64 +19049,7 @@
         <p:spPr>
           <a:xfrm>
             <a:off x="274320" y="914400"/>
-            <a:ext cx="4114800" cy="4114800"/>
-          </a:xfrm>
-          <a:prstGeom prst="rect">
-            <a:avLst/>
-          </a:prstGeom>
-        </p:spPr>
-        <p:txBody>
-          <a:bodyPr anchorCtr="0" anchor="t" bIns="91425" lIns="0" spcFirstLastPara="1" rIns="91425" wrap="square" tIns="0">
-            <a:noAutofit/>
-          </a:bodyPr>
-          <a:lstStyle/>
-          <a:p>
-            <a:pPr indent="0" lvl="0" marL="0" rtl="0" algn="l">
-              <a:spcBef>
-                <a:spcPts val="0"/>
-              </a:spcBef>
-              <a:spcAft>
-                <a:spcPts val="0"/>
-              </a:spcAft>
-              <a:buNone/>
-            </a:pPr>
-            <a:r>
-              <a:rPr lang="en"/>
-              <a:t>As participant improving practice</a:t>
-            </a:r>
-            <a:endParaRPr/>
-          </a:p>
-          <a:p>
-            <a:pPr indent="-342900" lvl="0" marL="457200" rtl="0" algn="l">
-              <a:spcBef>
-                <a:spcPts val="1200"/>
-              </a:spcBef>
-              <a:spcAft>
-                <a:spcPts val="0"/>
-              </a:spcAft>
-              <a:buSzPts val="1800"/>
-              <a:buChar char="●"/>
-            </a:pPr>
-            <a:r>
-              <a:rPr lang="en"/>
-              <a:t>None</a:t>
-            </a:r>
-            <a:endParaRPr/>
-          </a:p>
-        </p:txBody>
-      </p:sp>
-      <p:sp>
-        <p:nvSpPr>
-          <p:cNvPr id="342" name="Google Shape;342;p51"/>
-          <p:cNvSpPr txBox="1"/>
-          <p:nvPr>
-            <p:ph idx="2" type="body"/>
-          </p:nvPr>
-        </p:nvSpPr>
-        <p:spPr>
-          <a:xfrm>
-            <a:off x="4846320" y="914400"/>
-            <a:ext cx="4114800" cy="4114800"/>
+            <a:ext cx="8595300" cy="4114800"/>
           </a:xfrm>
           <a:prstGeom prst="rect">
             <a:avLst/>
@@ -19340,10 +19071,10 @@
               <a:buNone/>
             </a:pPr>
             <a:r>
-              <a:rPr lang="en"/>
-              <a:t>As researcher performing research</a:t>
-            </a:r>
-            <a:endParaRPr/>
+              <a:rPr b="1" lang="en"/>
+              <a:t>As participant improving practice</a:t>
+            </a:r>
+            <a:endParaRPr b="1"/>
           </a:p>
           <a:p>
             <a:pPr indent="-342900" lvl="0" marL="457200" rtl="0" algn="l">
@@ -19358,14 +19089,30 @@
             </a:pPr>
             <a:r>
               <a:rPr lang="en"/>
-              <a:t>Continued participant observation</a:t>
-            </a:r>
-            <a:endParaRPr/>
+              <a:t>We were not involved</a:t>
+            </a:r>
+            <a:endParaRPr/>
+          </a:p>
+          <a:p>
+            <a:pPr indent="0" lvl="0" marL="0" rtl="0" algn="l">
+              <a:spcBef>
+                <a:spcPts val="1200"/>
+              </a:spcBef>
+              <a:spcAft>
+                <a:spcPts val="0"/>
+              </a:spcAft>
+              <a:buNone/>
+            </a:pPr>
+            <a:r>
+              <a:rPr b="1" lang="en"/>
+              <a:t>As researcher performing research</a:t>
+            </a:r>
+            <a:endParaRPr b="1"/>
           </a:p>
           <a:p>
             <a:pPr indent="-342900" lvl="0" marL="457200" rtl="0" algn="l">
               <a:spcBef>
-                <a:spcPts val="0"/>
+                <a:spcPts val="1200"/>
               </a:spcBef>
               <a:spcAft>
                 <a:spcPts val="0"/>
@@ -19375,7 +19122,7 @@
             </a:pPr>
             <a:r>
               <a:rPr lang="en"/>
-              <a:t>Conducted additional interviews</a:t>
+              <a:t>Continued participant observation</a:t>
             </a:r>
             <a:endParaRPr/>
           </a:p>
@@ -19392,7 +19139,39 @@
             </a:pPr>
             <a:r>
               <a:rPr lang="en"/>
+              <a:t>Conducted additional interviews</a:t>
+            </a:r>
+            <a:endParaRPr/>
+          </a:p>
+          <a:p>
+            <a:pPr indent="-342900" lvl="0" marL="457200" rtl="0" algn="l">
+              <a:spcBef>
+                <a:spcPts val="0"/>
+              </a:spcBef>
+              <a:spcAft>
+                <a:spcPts val="0"/>
+              </a:spcAft>
+              <a:buSzPts val="1800"/>
+              <a:buChar char="●"/>
+            </a:pPr>
+            <a:r>
+              <a:rPr lang="en"/>
               <a:t>Took notes of emerging statistics</a:t>
+            </a:r>
+            <a:endParaRPr/>
+          </a:p>
+          <a:p>
+            <a:pPr indent="0" lvl="0" marL="0" rtl="0" algn="l">
+              <a:spcBef>
+                <a:spcPts val="1200"/>
+              </a:spcBef>
+              <a:spcAft>
+                <a:spcPts val="1200"/>
+              </a:spcAft>
+              <a:buNone/>
+            </a:pPr>
+            <a:r>
+              <a:t/>
             </a:r>
             <a:endParaRPr/>
           </a:p>
@@ -19411,7 +19190,7 @@
   <p:cSld>
     <p:spTree>
       <p:nvGrpSpPr>
-        <p:cNvPr id="346" name="Shape 346"/>
+        <p:cNvPr id="340" name="Shape 340"/>
         <p:cNvGrpSpPr/>
         <p:nvPr/>
       </p:nvGrpSpPr>
@@ -19425,7 +19204,7 @@
       </p:grpSpPr>
       <p:sp>
         <p:nvSpPr>
-          <p:cNvPr id="347" name="Google Shape;347;p52"/>
+          <p:cNvPr id="341" name="Google Shape;341;p52"/>
           <p:cNvSpPr txBox="1"/>
           <p:nvPr>
             <p:ph type="title"/>
@@ -19465,7 +19244,7 @@
       </p:sp>
       <p:sp>
         <p:nvSpPr>
-          <p:cNvPr id="348" name="Google Shape;348;p52"/>
+          <p:cNvPr id="342" name="Google Shape;342;p52"/>
           <p:cNvSpPr txBox="1"/>
           <p:nvPr>
             <p:ph idx="1" type="body"/>
@@ -19530,7 +19309,7 @@
       </p:sp>
       <p:sp>
         <p:nvSpPr>
-          <p:cNvPr id="349" name="Google Shape;349;p52"/>
+          <p:cNvPr id="343" name="Google Shape;343;p52"/>
           <p:cNvSpPr txBox="1"/>
           <p:nvPr>
             <p:ph idx="12" type="sldNum"/>
@@ -19606,7 +19385,7 @@
   <p:cSld>
     <p:spTree>
       <p:nvGrpSpPr>
-        <p:cNvPr id="353" name="Shape 353"/>
+        <p:cNvPr id="347" name="Shape 347"/>
         <p:cNvGrpSpPr/>
         <p:nvPr/>
       </p:nvGrpSpPr>
@@ -19620,7 +19399,7 @@
       </p:grpSpPr>
       <p:sp>
         <p:nvSpPr>
-          <p:cNvPr id="354" name="Google Shape;354;p53"/>
+          <p:cNvPr id="348" name="Google Shape;348;p53"/>
           <p:cNvSpPr txBox="1"/>
           <p:nvPr>
             <p:ph type="title"/>
@@ -19660,7 +19439,7 @@
       </p:sp>
       <p:sp>
         <p:nvSpPr>
-          <p:cNvPr id="355" name="Google Shape;355;p53"/>
+          <p:cNvPr id="349" name="Google Shape;349;p53"/>
           <p:cNvSpPr txBox="1"/>
           <p:nvPr>
             <p:ph idx="1" type="body"/>
@@ -19700,7 +19479,7 @@
       </p:sp>
       <p:sp>
         <p:nvSpPr>
-          <p:cNvPr id="356" name="Google Shape;356;p53"/>
+          <p:cNvPr id="350" name="Google Shape;350;p53"/>
           <p:cNvSpPr txBox="1"/>
           <p:nvPr>
             <p:ph idx="12" type="sldNum"/>
@@ -19776,7 +19555,7 @@
   <p:cSld>
     <p:spTree>
       <p:nvGrpSpPr>
-        <p:cNvPr id="360" name="Shape 360"/>
+        <p:cNvPr id="354" name="Shape 354"/>
         <p:cNvGrpSpPr/>
         <p:nvPr/>
       </p:nvGrpSpPr>
@@ -19790,7 +19569,7 @@
       </p:grpSpPr>
       <p:sp>
         <p:nvSpPr>
-          <p:cNvPr id="361" name="Google Shape;361;p54"/>
+          <p:cNvPr id="355" name="Google Shape;355;p54"/>
           <p:cNvSpPr txBox="1"/>
           <p:nvPr>
             <p:ph type="title"/>
@@ -19806,7 +19585,7 @@
           </a:prstGeom>
         </p:spPr>
         <p:txBody>
-          <a:bodyPr anchorCtr="0" anchor="ctr" bIns="0" lIns="274300" spcFirstLastPara="1" rIns="0" wrap="square" tIns="0">
+          <a:bodyPr anchorCtr="0" anchor="ctr" bIns="91425" lIns="274300" spcFirstLastPara="1" rIns="91425" wrap="square" tIns="91425">
             <a:noAutofit/>
           </a:bodyPr>
           <a:lstStyle/>
@@ -19830,7 +19609,7 @@
       </p:sp>
       <p:sp>
         <p:nvSpPr>
-          <p:cNvPr id="362" name="Google Shape;362;p54"/>
+          <p:cNvPr id="356" name="Google Shape;356;p54"/>
           <p:cNvSpPr txBox="1"/>
           <p:nvPr>
             <p:ph idx="12" type="sldNum"/>
@@ -19895,7 +19674,7 @@
       </p:sp>
       <p:sp>
         <p:nvSpPr>
-          <p:cNvPr id="363" name="Google Shape;363;p54"/>
+          <p:cNvPr id="357" name="Google Shape;357;p54"/>
           <p:cNvSpPr txBox="1"/>
           <p:nvPr>
             <p:ph idx="1" type="body"/>
@@ -19904,79 +19683,7 @@
         <p:spPr>
           <a:xfrm>
             <a:off x="274320" y="914400"/>
-            <a:ext cx="4114800" cy="4114800"/>
-          </a:xfrm>
-          <a:prstGeom prst="rect">
-            <a:avLst/>
-          </a:prstGeom>
-        </p:spPr>
-        <p:txBody>
-          <a:bodyPr anchorCtr="0" anchor="t" bIns="91425" lIns="0" spcFirstLastPara="1" rIns="91425" wrap="square" tIns="0">
-            <a:noAutofit/>
-          </a:bodyPr>
-          <a:lstStyle/>
-          <a:p>
-            <a:pPr indent="0" lvl="0" marL="0" rtl="0" algn="l">
-              <a:spcBef>
-                <a:spcPts val="0"/>
-              </a:spcBef>
-              <a:spcAft>
-                <a:spcPts val="0"/>
-              </a:spcAft>
-              <a:buNone/>
-            </a:pPr>
-            <a:r>
-              <a:rPr lang="en"/>
-              <a:t>As participant improving practice</a:t>
-            </a:r>
-            <a:endParaRPr/>
-          </a:p>
-          <a:p>
-            <a:pPr indent="-342900" lvl="0" marL="457200" rtl="0" algn="l">
-              <a:spcBef>
-                <a:spcPts val="1200"/>
-              </a:spcBef>
-              <a:spcAft>
-                <a:spcPts val="0"/>
-              </a:spcAft>
-              <a:buSzPts val="1800"/>
-              <a:buChar char="●"/>
-            </a:pPr>
-            <a:r>
-              <a:rPr lang="en"/>
-              <a:t>Discussed ways to improve process</a:t>
-            </a:r>
-            <a:endParaRPr/>
-          </a:p>
-          <a:p>
-            <a:pPr indent="0" lvl="0" marL="0" rtl="0" algn="l">
-              <a:spcBef>
-                <a:spcPts val="1200"/>
-              </a:spcBef>
-              <a:spcAft>
-                <a:spcPts val="1200"/>
-              </a:spcAft>
-              <a:buNone/>
-            </a:pPr>
-            <a:r>
-              <a:t/>
-            </a:r>
-            <a:endParaRPr/>
-          </a:p>
-        </p:txBody>
-      </p:sp>
-      <p:sp>
-        <p:nvSpPr>
-          <p:cNvPr id="364" name="Google Shape;364;p54"/>
-          <p:cNvSpPr txBox="1"/>
-          <p:nvPr>
-            <p:ph idx="2" type="body"/>
-          </p:nvPr>
-        </p:nvSpPr>
-        <p:spPr>
-          <a:xfrm>
-            <a:off x="4846320" y="914400"/>
-            <a:ext cx="4114800" cy="4114800"/>
+            <a:ext cx="8595300" cy="4114800"/>
           </a:xfrm>
           <a:prstGeom prst="rect">
             <a:avLst/>
@@ -19998,10 +19705,10 @@
               <a:buNone/>
             </a:pPr>
             <a:r>
-              <a:rPr lang="en"/>
-              <a:t>As researcher performing research</a:t>
-            </a:r>
-            <a:endParaRPr/>
+              <a:rPr b="1" lang="en"/>
+              <a:t>As participant improving practice</a:t>
+            </a:r>
+            <a:endParaRPr b="1"/>
           </a:p>
           <a:p>
             <a:pPr indent="-342900" lvl="0" marL="457200" rtl="0" algn="l">
@@ -20016,7 +19723,70 @@
             </a:pPr>
             <a:r>
               <a:rPr lang="en"/>
+              <a:t>Discussed ways to improve process</a:t>
+            </a:r>
+            <a:endParaRPr/>
+          </a:p>
+          <a:p>
+            <a:pPr indent="0" lvl="0" marL="0" rtl="0" algn="l">
+              <a:spcBef>
+                <a:spcPts val="1200"/>
+              </a:spcBef>
+              <a:spcAft>
+                <a:spcPts val="0"/>
+              </a:spcAft>
+              <a:buNone/>
+            </a:pPr>
+            <a:r>
+              <a:rPr b="1" lang="en"/>
+              <a:t>As researcher performing research</a:t>
+            </a:r>
+            <a:endParaRPr b="1"/>
+          </a:p>
+          <a:p>
+            <a:pPr indent="-342900" lvl="0" marL="457200" rtl="0" algn="l">
+              <a:spcBef>
+                <a:spcPts val="1200"/>
+              </a:spcBef>
+              <a:spcAft>
+                <a:spcPts val="0"/>
+              </a:spcAft>
+              <a:buSzPts val="1800"/>
+              <a:buChar char="●"/>
+            </a:pPr>
+            <a:r>
+              <a:rPr lang="en"/>
               <a:t>Integrated collected data into theory</a:t>
+            </a:r>
+            <a:endParaRPr/>
+          </a:p>
+          <a:p>
+            <a:pPr indent="0" lvl="0" marL="0" rtl="0" algn="l">
+              <a:spcBef>
+                <a:spcPts val="1200"/>
+              </a:spcBef>
+              <a:spcAft>
+                <a:spcPts val="0"/>
+              </a:spcAft>
+              <a:buNone/>
+            </a:pPr>
+            <a:r>
+              <a:t/>
+            </a:r>
+            <a:endParaRPr/>
+          </a:p>
+          <a:p>
+            <a:pPr indent="0" lvl="0" marL="0" rtl="0" algn="l">
+              <a:spcBef>
+                <a:spcPts val="1200"/>
+              </a:spcBef>
+              <a:spcAft>
+                <a:spcPts val="1200"/>
+              </a:spcAft>
+              <a:buNone/>
+            </a:pPr>
+            <a:r>
+              <a:t/>
             </a:r>
             <a:endParaRPr/>
           </a:p>
@@ -20031,6 +19801,210 @@
 </file>
 
 <file path=ppt/slides/slide48.xml><?xml version="1.0" encoding="utf-8"?>
+<p:sld xmlns:a="http://schemas.openxmlformats.org/drawingml/2006/main" xmlns:r="http://schemas.openxmlformats.org/officeDocument/2006/relationships" xmlns:mc="http://schemas.openxmlformats.org/markup-compatibility/2006" xmlns:mv="urn:schemas-microsoft-com:mac:vml" xmlns:p="http://schemas.openxmlformats.org/presentationml/2006/main" xmlns:c="http://schemas.openxmlformats.org/drawingml/2006/chart" xmlns:dgm="http://schemas.openxmlformats.org/drawingml/2006/diagram" xmlns:o="urn:schemas-microsoft-com:office:office" xmlns:v="urn:schemas-microsoft-com:vml" xmlns:pvml="urn:schemas-microsoft-com:office:powerpoint" xmlns:com="http://schemas.openxmlformats.org/drawingml/2006/compatibility" xmlns:p14="http://schemas.microsoft.com/office/powerpoint/2010/main" xmlns:p15="http://schemas.microsoft.com/office/powerpoint/2012/main" xmlns:ahyp="http://schemas.microsoft.com/office/drawing/2018/hyperlinkcolor">
+  <p:cSld>
+    <p:spTree>
+      <p:nvGrpSpPr>
+        <p:cNvPr id="361" name="Shape 361"/>
+        <p:cNvGrpSpPr/>
+        <p:nvPr/>
+      </p:nvGrpSpPr>
+      <p:grpSpPr>
+        <a:xfrm>
+          <a:off x="0" y="0"/>
+          <a:ext cx="0" cy="0"/>
+          <a:chOff x="0" y="0"/>
+          <a:chExt cx="0" cy="0"/>
+        </a:xfrm>
+      </p:grpSpPr>
+      <p:sp>
+        <p:nvSpPr>
+          <p:cNvPr id="362" name="Google Shape;362;p55"/>
+          <p:cNvSpPr txBox="1"/>
+          <p:nvPr>
+            <p:ph type="title"/>
+          </p:nvPr>
+        </p:nvSpPr>
+        <p:spPr>
+          <a:xfrm>
+            <a:off x="0" y="0"/>
+            <a:ext cx="9144000" cy="685800"/>
+          </a:xfrm>
+          <a:prstGeom prst="rect">
+            <a:avLst/>
+          </a:prstGeom>
+        </p:spPr>
+        <p:txBody>
+          <a:bodyPr anchorCtr="0" anchor="ctr" bIns="91425" lIns="274300" spcFirstLastPara="1" rIns="91425" wrap="square" tIns="91425">
+            <a:noAutofit/>
+          </a:bodyPr>
+          <a:lstStyle/>
+          <a:p>
+            <a:pPr indent="0" lvl="0" marL="0" rtl="0" algn="l">
+              <a:spcBef>
+                <a:spcPts val="0"/>
+              </a:spcBef>
+              <a:spcAft>
+                <a:spcPts val="0"/>
+              </a:spcAft>
+              <a:buNone/>
+            </a:pPr>
+            <a:r>
+              <a:rPr lang="en"/>
+              <a:t>Closing the Action-Feedback Loop</a:t>
+            </a:r>
+            <a:endParaRPr/>
+          </a:p>
+        </p:txBody>
+      </p:sp>
+      <p:sp>
+        <p:nvSpPr>
+          <p:cNvPr id="363" name="Google Shape;363;p55"/>
+          <p:cNvSpPr txBox="1"/>
+          <p:nvPr>
+            <p:ph idx="1" type="body"/>
+          </p:nvPr>
+        </p:nvSpPr>
+        <p:spPr>
+          <a:xfrm>
+            <a:off x="274320" y="914400"/>
+            <a:ext cx="8595300" cy="4114800"/>
+          </a:xfrm>
+          <a:prstGeom prst="rect">
+            <a:avLst/>
+          </a:prstGeom>
+        </p:spPr>
+        <p:txBody>
+          <a:bodyPr anchorCtr="0" anchor="t" bIns="0" lIns="0" spcFirstLastPara="1" rIns="0" wrap="square" tIns="0">
+            <a:noAutofit/>
+          </a:bodyPr>
+          <a:lstStyle/>
+          <a:p>
+            <a:pPr indent="0" lvl="0" marL="0" rtl="0" algn="l">
+              <a:spcBef>
+                <a:spcPts val="0"/>
+              </a:spcBef>
+              <a:spcAft>
+                <a:spcPts val="0"/>
+              </a:spcAft>
+              <a:buNone/>
+            </a:pPr>
+            <a:r>
+              <a:rPr lang="en"/>
+              <a:t>Based on what you learned, you</a:t>
+            </a:r>
+            <a:endParaRPr/>
+          </a:p>
+          <a:p>
+            <a:pPr indent="-342900" lvl="0" marL="457200" rtl="0" algn="l">
+              <a:spcBef>
+                <a:spcPts val="1200"/>
+              </a:spcBef>
+              <a:spcAft>
+                <a:spcPts val="0"/>
+              </a:spcAft>
+              <a:buSzPts val="1800"/>
+              <a:buChar char="●"/>
+            </a:pPr>
+            <a:r>
+              <a:rPr lang="en"/>
+              <a:t>Either continue with another iteration of action research</a:t>
+            </a:r>
+            <a:endParaRPr/>
+          </a:p>
+          <a:p>
+            <a:pPr indent="-342900" lvl="0" marL="457200" rtl="0" algn="l">
+              <a:spcBef>
+                <a:spcPts val="0"/>
+              </a:spcBef>
+              <a:spcAft>
+                <a:spcPts val="0"/>
+              </a:spcAft>
+              <a:buSzPts val="1800"/>
+              <a:buChar char="●"/>
+            </a:pPr>
+            <a:r>
+              <a:rPr lang="en"/>
+              <a:t>Or move on to next steps (publications / methodology)</a:t>
+            </a:r>
+            <a:endParaRPr/>
+          </a:p>
+        </p:txBody>
+      </p:sp>
+      <p:sp>
+        <p:nvSpPr>
+          <p:cNvPr id="364" name="Google Shape;364;p55"/>
+          <p:cNvSpPr txBox="1"/>
+          <p:nvPr>
+            <p:ph idx="12" type="sldNum"/>
+          </p:nvPr>
+        </p:nvSpPr>
+        <p:spPr>
+          <a:xfrm>
+            <a:off x="7315209" y="4229101"/>
+            <a:ext cx="1828800" cy="914400"/>
+          </a:xfrm>
+          <a:prstGeom prst="rect">
+            <a:avLst/>
+          </a:prstGeom>
+        </p:spPr>
+        <p:txBody>
+          <a:bodyPr anchorCtr="0" anchor="b" bIns="91425" lIns="91425" spcFirstLastPara="1" rIns="91425" wrap="square" tIns="91425">
+            <a:noAutofit/>
+          </a:bodyPr>
+          <a:lstStyle/>
+          <a:p>
+            <a:pPr indent="0" lvl="0" marL="0" rtl="0" algn="r">
+              <a:spcBef>
+                <a:spcPts val="0"/>
+              </a:spcBef>
+              <a:spcAft>
+                <a:spcPts val="0"/>
+              </a:spcAft>
+              <a:buNone/>
+            </a:pPr>
+            <a:fld id="{00000000-1234-1234-1234-123412341234}" type="slidenum">
+              <a:rPr lang="en"/>
+              <a:t>‹#›</a:t>
+            </a:fld>
+            <a:endParaRPr/>
+          </a:p>
+          <a:p>
+            <a:pPr indent="0" lvl="0" marL="0" rtl="0" algn="r">
+              <a:spcBef>
+                <a:spcPts val="0"/>
+              </a:spcBef>
+              <a:spcAft>
+                <a:spcPts val="0"/>
+              </a:spcAft>
+              <a:buNone/>
+            </a:pPr>
+            <a:r>
+              <a:rPr b="0" lang="en" sz="1000" u="sng">
+                <a:solidFill>
+                  <a:schemeClr val="hlink"/>
+                </a:solidFill>
+                <a:hlinkClick r:id="rId3"/>
+              </a:rPr>
+              <a:t>uni1.de/nyt</a:t>
+            </a:r>
+            <a:r>
+              <a:rPr b="0" lang="en" sz="1000"/>
+              <a:t> </a:t>
+            </a:r>
+            <a:endParaRPr b="0" sz="1000"/>
+          </a:p>
+        </p:txBody>
+      </p:sp>
+    </p:spTree>
+  </p:cSld>
+  <p:clrMapOvr>
+    <a:masterClrMapping/>
+  </p:clrMapOvr>
+</p:sld>
+</file>
+
+<file path=ppt/slides/slide49.xml><?xml version="1.0" encoding="utf-8"?>
 <p:sld xmlns:a="http://schemas.openxmlformats.org/drawingml/2006/main" xmlns:r="http://schemas.openxmlformats.org/officeDocument/2006/relationships" xmlns:mc="http://schemas.openxmlformats.org/markup-compatibility/2006" xmlns:mv="urn:schemas-microsoft-com:mac:vml" xmlns:p="http://schemas.openxmlformats.org/presentationml/2006/main" xmlns:c="http://schemas.openxmlformats.org/drawingml/2006/chart" xmlns:dgm="http://schemas.openxmlformats.org/drawingml/2006/diagram" xmlns:o="urn:schemas-microsoft-com:office:office" xmlns:v="urn:schemas-microsoft-com:vml" xmlns:pvml="urn:schemas-microsoft-com:office:powerpoint" xmlns:com="http://schemas.openxmlformats.org/drawingml/2006/compatibility" xmlns:p14="http://schemas.microsoft.com/office/powerpoint/2010/main" xmlns:p15="http://schemas.microsoft.com/office/powerpoint/2012/main" xmlns:ahyp="http://schemas.microsoft.com/office/drawing/2018/hyperlinkcolor">
   <p:cSld>
     <p:spTree>
@@ -20049,211 +20023,7 @@
       </p:grpSpPr>
       <p:sp>
         <p:nvSpPr>
-          <p:cNvPr id="369" name="Google Shape;369;p55"/>
-          <p:cNvSpPr txBox="1"/>
-          <p:nvPr>
-            <p:ph type="title"/>
-          </p:nvPr>
-        </p:nvSpPr>
-        <p:spPr>
-          <a:xfrm>
-            <a:off x="0" y="0"/>
-            <a:ext cx="9144000" cy="685800"/>
-          </a:xfrm>
-          <a:prstGeom prst="rect">
-            <a:avLst/>
-          </a:prstGeom>
-        </p:spPr>
-        <p:txBody>
-          <a:bodyPr anchorCtr="0" anchor="ctr" bIns="91425" lIns="274300" spcFirstLastPara="1" rIns="91425" wrap="square" tIns="91425">
-            <a:noAutofit/>
-          </a:bodyPr>
-          <a:lstStyle/>
-          <a:p>
-            <a:pPr indent="0" lvl="0" marL="0" rtl="0" algn="l">
-              <a:spcBef>
-                <a:spcPts val="0"/>
-              </a:spcBef>
-              <a:spcAft>
-                <a:spcPts val="0"/>
-              </a:spcAft>
-              <a:buNone/>
-            </a:pPr>
-            <a:r>
-              <a:rPr lang="en"/>
-              <a:t>Closing the Action-Feedback Loop</a:t>
-            </a:r>
-            <a:endParaRPr/>
-          </a:p>
-        </p:txBody>
-      </p:sp>
-      <p:sp>
-        <p:nvSpPr>
-          <p:cNvPr id="370" name="Google Shape;370;p55"/>
-          <p:cNvSpPr txBox="1"/>
-          <p:nvPr>
-            <p:ph idx="1" type="body"/>
-          </p:nvPr>
-        </p:nvSpPr>
-        <p:spPr>
-          <a:xfrm>
-            <a:off x="274320" y="914400"/>
-            <a:ext cx="8595300" cy="4114800"/>
-          </a:xfrm>
-          <a:prstGeom prst="rect">
-            <a:avLst/>
-          </a:prstGeom>
-        </p:spPr>
-        <p:txBody>
-          <a:bodyPr anchorCtr="0" anchor="t" bIns="0" lIns="0" spcFirstLastPara="1" rIns="0" wrap="square" tIns="0">
-            <a:noAutofit/>
-          </a:bodyPr>
-          <a:lstStyle/>
-          <a:p>
-            <a:pPr indent="0" lvl="0" marL="0" rtl="0" algn="l">
-              <a:spcBef>
-                <a:spcPts val="0"/>
-              </a:spcBef>
-              <a:spcAft>
-                <a:spcPts val="0"/>
-              </a:spcAft>
-              <a:buNone/>
-            </a:pPr>
-            <a:r>
-              <a:rPr lang="en"/>
-              <a:t>Based on what you learned, you</a:t>
-            </a:r>
-            <a:endParaRPr/>
-          </a:p>
-          <a:p>
-            <a:pPr indent="-342900" lvl="0" marL="457200" rtl="0" algn="l">
-              <a:spcBef>
-                <a:spcPts val="1200"/>
-              </a:spcBef>
-              <a:spcAft>
-                <a:spcPts val="0"/>
-              </a:spcAft>
-              <a:buSzPts val="1800"/>
-              <a:buChar char="●"/>
-            </a:pPr>
-            <a:r>
-              <a:rPr lang="en"/>
-              <a:t>Either continue with another iteration of action research</a:t>
-            </a:r>
-            <a:endParaRPr/>
-          </a:p>
-          <a:p>
-            <a:pPr indent="-342900" lvl="0" marL="457200" rtl="0" algn="l">
-              <a:spcBef>
-                <a:spcPts val="0"/>
-              </a:spcBef>
-              <a:spcAft>
-                <a:spcPts val="0"/>
-              </a:spcAft>
-              <a:buSzPts val="1800"/>
-              <a:buChar char="●"/>
-            </a:pPr>
-            <a:r>
-              <a:rPr lang="en"/>
-              <a:t>Or move on to next steps (publications / methodology)</a:t>
-            </a:r>
-            <a:endParaRPr/>
-          </a:p>
-        </p:txBody>
-      </p:sp>
-      <p:sp>
-        <p:nvSpPr>
-          <p:cNvPr id="371" name="Google Shape;371;p55"/>
-          <p:cNvSpPr txBox="1"/>
-          <p:nvPr>
-            <p:ph idx="12" type="sldNum"/>
-          </p:nvPr>
-        </p:nvSpPr>
-        <p:spPr>
-          <a:xfrm>
-            <a:off x="7315209" y="4229101"/>
-            <a:ext cx="1828800" cy="914400"/>
-          </a:xfrm>
-          <a:prstGeom prst="rect">
-            <a:avLst/>
-          </a:prstGeom>
-        </p:spPr>
-        <p:txBody>
-          <a:bodyPr anchorCtr="0" anchor="b" bIns="91425" lIns="91425" spcFirstLastPara="1" rIns="91425" wrap="square" tIns="91425">
-            <a:noAutofit/>
-          </a:bodyPr>
-          <a:lstStyle/>
-          <a:p>
-            <a:pPr indent="0" lvl="0" marL="0" rtl="0" algn="r">
-              <a:spcBef>
-                <a:spcPts val="0"/>
-              </a:spcBef>
-              <a:spcAft>
-                <a:spcPts val="0"/>
-              </a:spcAft>
-              <a:buNone/>
-            </a:pPr>
-            <a:fld id="{00000000-1234-1234-1234-123412341234}" type="slidenum">
-              <a:rPr lang="en"/>
-              <a:t>‹#›</a:t>
-            </a:fld>
-            <a:endParaRPr/>
-          </a:p>
-          <a:p>
-            <a:pPr indent="0" lvl="0" marL="0" rtl="0" algn="r">
-              <a:spcBef>
-                <a:spcPts val="0"/>
-              </a:spcBef>
-              <a:spcAft>
-                <a:spcPts val="0"/>
-              </a:spcAft>
-              <a:buNone/>
-            </a:pPr>
-            <a:r>
-              <a:rPr b="0" lang="en" sz="1000" u="sng">
-                <a:solidFill>
-                  <a:schemeClr val="hlink"/>
-                </a:solidFill>
-                <a:hlinkClick r:id="rId3"/>
-              </a:rPr>
-              <a:t>uni1.de/nyt</a:t>
-            </a:r>
-            <a:r>
-              <a:rPr b="0" lang="en" sz="1000"/>
-              <a:t> </a:t>
-            </a:r>
-            <a:endParaRPr b="0" sz="1000"/>
-          </a:p>
-        </p:txBody>
-      </p:sp>
-    </p:spTree>
-  </p:cSld>
-  <p:clrMapOvr>
-    <a:masterClrMapping/>
-  </p:clrMapOvr>
-</p:sld>
-</file>
-
-<file path=ppt/slides/slide49.xml><?xml version="1.0" encoding="utf-8"?>
-<p:sld xmlns:a="http://schemas.openxmlformats.org/drawingml/2006/main" xmlns:r="http://schemas.openxmlformats.org/officeDocument/2006/relationships" xmlns:mc="http://schemas.openxmlformats.org/markup-compatibility/2006" xmlns:mv="urn:schemas-microsoft-com:mac:vml" xmlns:p="http://schemas.openxmlformats.org/presentationml/2006/main" xmlns:c="http://schemas.openxmlformats.org/drawingml/2006/chart" xmlns:dgm="http://schemas.openxmlformats.org/drawingml/2006/diagram" xmlns:o="urn:schemas-microsoft-com:office:office" xmlns:v="urn:schemas-microsoft-com:vml" xmlns:pvml="urn:schemas-microsoft-com:office:powerpoint" xmlns:com="http://schemas.openxmlformats.org/drawingml/2006/compatibility" xmlns:p14="http://schemas.microsoft.com/office/powerpoint/2010/main" xmlns:p15="http://schemas.microsoft.com/office/powerpoint/2012/main" xmlns:ahyp="http://schemas.microsoft.com/office/drawing/2018/hyperlinkcolor">
-  <p:cSld>
-    <p:spTree>
-      <p:nvGrpSpPr>
-        <p:cNvPr id="375" name="Shape 375"/>
-        <p:cNvGrpSpPr/>
-        <p:nvPr/>
-      </p:nvGrpSpPr>
-      <p:grpSpPr>
-        <a:xfrm>
-          <a:off x="0" y="0"/>
-          <a:ext cx="0" cy="0"/>
-          <a:chOff x="0" y="0"/>
-          <a:chExt cx="0" cy="0"/>
-        </a:xfrm>
-      </p:grpSpPr>
-      <p:sp>
-        <p:nvSpPr>
-          <p:cNvPr id="376" name="Google Shape;376;p56"/>
+          <p:cNvPr id="369" name="Google Shape;369;p56"/>
           <p:cNvSpPr txBox="1"/>
           <p:nvPr>
             <p:ph type="title"/>
@@ -20308,7 +20078,7 @@
   <p:cSld>
     <p:spTree>
       <p:nvGrpSpPr>
-        <p:cNvPr id="61" name="Shape 61"/>
+        <p:cNvPr id="60" name="Shape 60"/>
         <p:cNvGrpSpPr/>
         <p:nvPr/>
       </p:nvGrpSpPr>
@@ -20322,7 +20092,7 @@
       </p:grpSpPr>
       <p:sp>
         <p:nvSpPr>
-          <p:cNvPr id="62" name="Google Shape;62;p12"/>
+          <p:cNvPr id="61" name="Google Shape;61;p12"/>
           <p:cNvSpPr txBox="1"/>
           <p:nvPr>
             <p:ph type="title"/>
@@ -20362,7 +20132,7 @@
       </p:sp>
       <p:sp>
         <p:nvSpPr>
-          <p:cNvPr id="63" name="Google Shape;63;p12"/>
+          <p:cNvPr id="62" name="Google Shape;62;p12"/>
           <p:cNvSpPr txBox="1"/>
           <p:nvPr>
             <p:ph idx="1" type="body"/>
@@ -20456,7 +20226,7 @@
       </p:sp>
       <p:sp>
         <p:nvSpPr>
-          <p:cNvPr id="64" name="Google Shape;64;p12"/>
+          <p:cNvPr id="63" name="Google Shape;63;p12"/>
           <p:cNvSpPr txBox="1"/>
           <p:nvPr>
             <p:ph idx="12" type="sldNum"/>
@@ -20528,6 +20298,243 @@
 </file>
 
 <file path=ppt/slides/slide50.xml><?xml version="1.0" encoding="utf-8"?>
+<p:sld xmlns:a="http://schemas.openxmlformats.org/drawingml/2006/main" xmlns:r="http://schemas.openxmlformats.org/officeDocument/2006/relationships" xmlns:mc="http://schemas.openxmlformats.org/markup-compatibility/2006" xmlns:mv="urn:schemas-microsoft-com:mac:vml" xmlns:p="http://schemas.openxmlformats.org/presentationml/2006/main" xmlns:c="http://schemas.openxmlformats.org/drawingml/2006/chart" xmlns:dgm="http://schemas.openxmlformats.org/drawingml/2006/diagram" xmlns:o="urn:schemas-microsoft-com:office:office" xmlns:v="urn:schemas-microsoft-com:vml" xmlns:pvml="urn:schemas-microsoft-com:office:powerpoint" xmlns:com="http://schemas.openxmlformats.org/drawingml/2006/compatibility" xmlns:p14="http://schemas.microsoft.com/office/powerpoint/2010/main" xmlns:p15="http://schemas.microsoft.com/office/powerpoint/2012/main" xmlns:ahyp="http://schemas.microsoft.com/office/drawing/2018/hyperlinkcolor">
+  <p:cSld>
+    <p:spTree>
+      <p:nvGrpSpPr>
+        <p:cNvPr id="373" name="Shape 373"/>
+        <p:cNvGrpSpPr/>
+        <p:nvPr/>
+      </p:nvGrpSpPr>
+      <p:grpSpPr>
+        <a:xfrm>
+          <a:off x="0" y="0"/>
+          <a:ext cx="0" cy="0"/>
+          <a:chOff x="0" y="0"/>
+          <a:chExt cx="0" cy="0"/>
+        </a:xfrm>
+      </p:grpSpPr>
+      <p:sp>
+        <p:nvSpPr>
+          <p:cNvPr id="374" name="Google Shape;374;p57"/>
+          <p:cNvSpPr txBox="1"/>
+          <p:nvPr>
+            <p:ph idx="1" type="body"/>
+          </p:nvPr>
+        </p:nvSpPr>
+        <p:spPr>
+          <a:xfrm>
+            <a:off x="274320" y="914400"/>
+            <a:ext cx="8595300" cy="4114800"/>
+          </a:xfrm>
+          <a:prstGeom prst="rect">
+            <a:avLst/>
+          </a:prstGeom>
+        </p:spPr>
+        <p:txBody>
+          <a:bodyPr anchorCtr="0" anchor="t" bIns="0" lIns="0" spcFirstLastPara="1" rIns="0" wrap="square" tIns="0">
+            <a:noAutofit/>
+          </a:bodyPr>
+          <a:lstStyle/>
+          <a:p>
+            <a:pPr indent="0" lvl="0" marL="0" rtl="0" algn="l">
+              <a:spcBef>
+                <a:spcPts val="0"/>
+              </a:spcBef>
+              <a:spcAft>
+                <a:spcPts val="0"/>
+              </a:spcAft>
+              <a:buNone/>
+            </a:pPr>
+            <a:r>
+              <a:rPr lang="en"/>
+              <a:t>Quality assurance is closely tied to the research methods employed</a:t>
+            </a:r>
+            <a:endParaRPr/>
+          </a:p>
+          <a:p>
+            <a:pPr indent="0" lvl="0" marL="0" rtl="0" algn="l">
+              <a:spcBef>
+                <a:spcPts val="1200"/>
+              </a:spcBef>
+              <a:spcAft>
+                <a:spcPts val="0"/>
+              </a:spcAft>
+              <a:buNone/>
+            </a:pPr>
+            <a:r>
+              <a:rPr lang="en"/>
+              <a:t>In our example (open source governance) these were</a:t>
+            </a:r>
+            <a:endParaRPr/>
+          </a:p>
+          <a:p>
+            <a:pPr indent="-342900" lvl="0" marL="457200" rtl="0" algn="l">
+              <a:spcBef>
+                <a:spcPts val="1200"/>
+              </a:spcBef>
+              <a:spcAft>
+                <a:spcPts val="0"/>
+              </a:spcAft>
+              <a:buSzPts val="1800"/>
+              <a:buChar char="●"/>
+            </a:pPr>
+            <a:r>
+              <a:rPr lang="en"/>
+              <a:t>Participant observation</a:t>
+            </a:r>
+            <a:endParaRPr/>
+          </a:p>
+          <a:p>
+            <a:pPr indent="-342900" lvl="0" marL="457200" rtl="0" algn="l">
+              <a:spcBef>
+                <a:spcPts val="0"/>
+              </a:spcBef>
+              <a:spcAft>
+                <a:spcPts val="0"/>
+              </a:spcAft>
+              <a:buSzPts val="1800"/>
+              <a:buChar char="●"/>
+            </a:pPr>
+            <a:r>
+              <a:rPr lang="en"/>
+              <a:t>Practitioner interviews</a:t>
+            </a:r>
+            <a:endParaRPr/>
+          </a:p>
+          <a:p>
+            <a:pPr indent="-342900" lvl="0" marL="457200" rtl="0" algn="l">
+              <a:spcBef>
+                <a:spcPts val="0"/>
+              </a:spcBef>
+              <a:spcAft>
+                <a:spcPts val="0"/>
+              </a:spcAft>
+              <a:buSzPts val="1800"/>
+              <a:buChar char="●"/>
+            </a:pPr>
+            <a:r>
+              <a:rPr lang="en"/>
+              <a:t>Qualitative data analysis</a:t>
+            </a:r>
+            <a:endParaRPr/>
+          </a:p>
+        </p:txBody>
+      </p:sp>
+      <p:sp>
+        <p:nvSpPr>
+          <p:cNvPr id="375" name="Google Shape;375;p57"/>
+          <p:cNvSpPr txBox="1"/>
+          <p:nvPr>
+            <p:ph type="title"/>
+          </p:nvPr>
+        </p:nvSpPr>
+        <p:spPr>
+          <a:xfrm>
+            <a:off x="0" y="0"/>
+            <a:ext cx="9144000" cy="685800"/>
+          </a:xfrm>
+          <a:prstGeom prst="rect">
+            <a:avLst/>
+          </a:prstGeom>
+        </p:spPr>
+        <p:txBody>
+          <a:bodyPr anchorCtr="0" anchor="ctr" bIns="91425" lIns="274300" spcFirstLastPara="1" rIns="91425" wrap="square" tIns="91425">
+            <a:noAutofit/>
+          </a:bodyPr>
+          <a:lstStyle/>
+          <a:p>
+            <a:pPr indent="0" lvl="0" marL="0" rtl="0" algn="l">
+              <a:spcBef>
+                <a:spcPts val="0"/>
+              </a:spcBef>
+              <a:spcAft>
+                <a:spcPts val="0"/>
+              </a:spcAft>
+              <a:buNone/>
+            </a:pPr>
+            <a:r>
+              <a:rPr lang="en"/>
+              <a:t>Quality Assurance</a:t>
+            </a:r>
+            <a:endParaRPr/>
+          </a:p>
+        </p:txBody>
+      </p:sp>
+      <p:sp>
+        <p:nvSpPr>
+          <p:cNvPr id="376" name="Google Shape;376;p57"/>
+          <p:cNvSpPr txBox="1"/>
+          <p:nvPr>
+            <p:ph idx="12" type="sldNum"/>
+          </p:nvPr>
+        </p:nvSpPr>
+        <p:spPr>
+          <a:xfrm>
+            <a:off x="7315209" y="4229101"/>
+            <a:ext cx="1828800" cy="914400"/>
+          </a:xfrm>
+          <a:prstGeom prst="rect">
+            <a:avLst/>
+          </a:prstGeom>
+        </p:spPr>
+        <p:txBody>
+          <a:bodyPr anchorCtr="0" anchor="b" bIns="91425" lIns="91425" spcFirstLastPara="1" rIns="91425" wrap="square" tIns="91425">
+            <a:noAutofit/>
+          </a:bodyPr>
+          <a:lstStyle/>
+          <a:p>
+            <a:pPr indent="0" lvl="0" marL="0" rtl="0" algn="r">
+              <a:spcBef>
+                <a:spcPts val="0"/>
+              </a:spcBef>
+              <a:spcAft>
+                <a:spcPts val="0"/>
+              </a:spcAft>
+              <a:buNone/>
+            </a:pPr>
+            <a:fld id="{00000000-1234-1234-1234-123412341234}" type="slidenum">
+              <a:rPr lang="en"/>
+              <a:t>‹#›</a:t>
+            </a:fld>
+            <a:endParaRPr/>
+          </a:p>
+          <a:p>
+            <a:pPr indent="0" lvl="0" marL="0" rtl="0" algn="r">
+              <a:spcBef>
+                <a:spcPts val="0"/>
+              </a:spcBef>
+              <a:spcAft>
+                <a:spcPts val="0"/>
+              </a:spcAft>
+              <a:buNone/>
+            </a:pPr>
+            <a:r>
+              <a:rPr b="0" lang="en" sz="1000" u="sng">
+                <a:solidFill>
+                  <a:schemeClr val="hlink"/>
+                </a:solidFill>
+                <a:hlinkClick r:id="rId3"/>
+              </a:rPr>
+              <a:t>uni1.de/nyt</a:t>
+            </a:r>
+            <a:r>
+              <a:rPr b="0" lang="en" sz="1000"/>
+              <a:t> </a:t>
+            </a:r>
+            <a:endParaRPr b="0" sz="1000"/>
+          </a:p>
+        </p:txBody>
+      </p:sp>
+    </p:spTree>
+  </p:cSld>
+  <p:clrMapOvr>
+    <a:masterClrMapping/>
+  </p:clrMapOvr>
+</p:sld>
+</file>
+
+<file path=ppt/slides/slide51.xml><?xml version="1.0" encoding="utf-8"?>
 <p:sld xmlns:a="http://schemas.openxmlformats.org/drawingml/2006/main" xmlns:r="http://schemas.openxmlformats.org/officeDocument/2006/relationships" xmlns:mc="http://schemas.openxmlformats.org/markup-compatibility/2006" xmlns:mv="urn:schemas-microsoft-com:mac:vml" xmlns:p="http://schemas.openxmlformats.org/presentationml/2006/main" xmlns:c="http://schemas.openxmlformats.org/drawingml/2006/chart" xmlns:dgm="http://schemas.openxmlformats.org/drawingml/2006/diagram" xmlns:o="urn:schemas-microsoft-com:office:office" xmlns:v="urn:schemas-microsoft-com:vml" xmlns:pvml="urn:schemas-microsoft-com:office:powerpoint" xmlns:com="http://schemas.openxmlformats.org/drawingml/2006/compatibility" xmlns:p14="http://schemas.microsoft.com/office/powerpoint/2010/main" xmlns:p15="http://schemas.microsoft.com/office/powerpoint/2012/main" xmlns:ahyp="http://schemas.microsoft.com/office/drawing/2018/hyperlinkcolor">
   <p:cSld>
     <p:spTree>
@@ -20546,7 +20553,7 @@
       </p:grpSpPr>
       <p:sp>
         <p:nvSpPr>
-          <p:cNvPr id="381" name="Google Shape;381;p57"/>
+          <p:cNvPr id="381" name="Google Shape;381;p58"/>
           <p:cNvSpPr txBox="1"/>
           <p:nvPr>
             <p:ph idx="1" type="body"/>
@@ -20567,85 +20574,119 @@
           </a:bodyPr>
           <a:lstStyle/>
           <a:p>
+            <a:pPr indent="-342900" lvl="0" marL="457200" rtl="0" algn="l">
+              <a:spcBef>
+                <a:spcPts val="0"/>
+              </a:spcBef>
+              <a:spcAft>
+                <a:spcPts val="0"/>
+              </a:spcAft>
+              <a:buSzPts val="1800"/>
+              <a:buAutoNum type="arabicPeriod"/>
+            </a:pPr>
+            <a:r>
+              <a:rPr lang="en"/>
+              <a:t>Action research</a:t>
+            </a:r>
+            <a:endParaRPr/>
+          </a:p>
+          <a:p>
+            <a:pPr indent="-342900" lvl="0" marL="457200" rtl="0" algn="l">
+              <a:spcBef>
+                <a:spcPts val="0"/>
+              </a:spcBef>
+              <a:spcAft>
+                <a:spcPts val="0"/>
+              </a:spcAft>
+              <a:buSzPts val="1800"/>
+              <a:buAutoNum type="arabicPeriod"/>
+            </a:pPr>
+            <a:r>
+              <a:rPr lang="en"/>
+              <a:t>Participatory action research</a:t>
+            </a:r>
+            <a:endParaRPr/>
+          </a:p>
+          <a:p>
+            <a:pPr indent="-342900" lvl="0" marL="457200" rtl="0" algn="l">
+              <a:spcBef>
+                <a:spcPts val="0"/>
+              </a:spcBef>
+              <a:spcAft>
+                <a:spcPts val="0"/>
+              </a:spcAft>
+              <a:buSzPts val="1800"/>
+              <a:buAutoNum type="arabicPeriod"/>
+            </a:pPr>
+            <a:r>
+              <a:rPr lang="en"/>
+              <a:t>Problem identification</a:t>
+            </a:r>
+            <a:endParaRPr/>
+          </a:p>
+          <a:p>
+            <a:pPr indent="-342900" lvl="0" marL="457200" rtl="0" algn="l">
+              <a:spcBef>
+                <a:spcPts val="0"/>
+              </a:spcBef>
+              <a:spcAft>
+                <a:spcPts val="0"/>
+              </a:spcAft>
+              <a:buSzPts val="1800"/>
+              <a:buAutoNum type="arabicPeriod"/>
+            </a:pPr>
+            <a:r>
+              <a:rPr lang="en"/>
+              <a:t>Research design</a:t>
+            </a:r>
+            <a:endParaRPr/>
+          </a:p>
+          <a:p>
+            <a:pPr indent="-342900" lvl="0" marL="457200" rtl="0" algn="l">
+              <a:spcBef>
+                <a:spcPts val="0"/>
+              </a:spcBef>
+              <a:spcAft>
+                <a:spcPts val="0"/>
+              </a:spcAft>
+              <a:buSzPts val="1800"/>
+              <a:buAutoNum type="arabicPeriod"/>
+            </a:pPr>
+            <a:r>
+              <a:rPr lang="en"/>
+              <a:t>The action-feedback loop</a:t>
+            </a:r>
+            <a:endParaRPr/>
+          </a:p>
+          <a:p>
+            <a:pPr indent="-342900" lvl="0" marL="457200" rtl="0" algn="l">
+              <a:spcBef>
+                <a:spcPts val="0"/>
+              </a:spcBef>
+              <a:spcAft>
+                <a:spcPts val="0"/>
+              </a:spcAft>
+              <a:buSzPts val="1800"/>
+              <a:buAutoNum type="arabicPeriod"/>
+            </a:pPr>
+            <a:r>
+              <a:rPr lang="en"/>
+              <a:t>Quality assurance</a:t>
+            </a:r>
+            <a:endParaRPr/>
+          </a:p>
+          <a:p>
             <a:pPr indent="0" lvl="0" marL="0" rtl="0" algn="l">
               <a:spcBef>
-                <a:spcPts val="0"/>
-              </a:spcBef>
-              <a:spcAft>
-                <a:spcPts val="0"/>
-              </a:spcAft>
-              <a:buNone/>
-            </a:pPr>
-            <a:r>
-              <a:rPr lang="en"/>
-              <a:t>Quality assurance is closely tied to the research methods employed</a:t>
-            </a:r>
-            <a:endParaRPr/>
-          </a:p>
-          <a:p>
-            <a:pPr indent="0" lvl="0" marL="0" rtl="0" algn="l">
-              <a:spcBef>
                 <a:spcPts val="1200"/>
               </a:spcBef>
               <a:spcAft>
-                <a:spcPts val="0"/>
-              </a:spcAft>
-              <a:buNone/>
-            </a:pPr>
-            <a:r>
-              <a:rPr lang="en"/>
-              <a:t>In our example (open source governance) these were</a:t>
-            </a:r>
-            <a:endParaRPr/>
-          </a:p>
-          <a:p>
-            <a:pPr indent="-342900" lvl="0" marL="457200" rtl="0" algn="l">
-              <a:spcBef>
                 <a:spcPts val="1200"/>
-              </a:spcBef>
-              <a:spcAft>
-                <a:spcPts val="0"/>
-              </a:spcAft>
-              <a:buSzPts val="1800"/>
-              <a:buChar char="●"/>
-            </a:pPr>
-            <a:r>
-              <a:rPr lang="en"/>
-              <a:t>Participant observation</a:t>
-            </a:r>
-            <a:endParaRPr/>
-          </a:p>
-          <a:p>
-            <a:pPr indent="-342900" lvl="0" marL="457200" rtl="0" algn="l">
-              <a:spcBef>
-                <a:spcPts val="0"/>
-              </a:spcBef>
-              <a:spcAft>
-                <a:spcPts val="0"/>
-              </a:spcAft>
-              <a:buSzPts val="1800"/>
-              <a:buChar char="●"/>
-            </a:pPr>
-            <a:r>
-              <a:rPr lang="en"/>
-              <a:t>Practitioner interviews</a:t>
-            </a:r>
-            <a:endParaRPr/>
-          </a:p>
-          <a:p>
-            <a:pPr indent="-342900" lvl="0" marL="457200" rtl="0" algn="l">
-              <a:spcBef>
-                <a:spcPts val="0"/>
-              </a:spcBef>
-              <a:spcAft>
-                <a:spcPts val="0"/>
-              </a:spcAft>
-              <a:buSzPts val="1800"/>
-              <a:buChar char="●"/>
-            </a:pPr>
-            <a:r>
-              <a:rPr lang="en"/>
-              <a:t>Qualitative data analysis</a:t>
+              </a:spcAft>
+              <a:buNone/>
+            </a:pPr>
+            <a:r>
+              <a:t/>
             </a:r>
             <a:endParaRPr/>
           </a:p>
@@ -20653,7 +20694,7 @@
       </p:sp>
       <p:sp>
         <p:nvSpPr>
-          <p:cNvPr id="382" name="Google Shape;382;p57"/>
+          <p:cNvPr id="382" name="Google Shape;382;p58"/>
           <p:cNvSpPr txBox="1"/>
           <p:nvPr>
             <p:ph type="title"/>
@@ -20685,7 +20726,7 @@
             </a:pPr>
             <a:r>
               <a:rPr lang="en"/>
-              <a:t>Quality Assurance</a:t>
+              <a:t>Summary</a:t>
             </a:r>
             <a:endParaRPr/>
           </a:p>
@@ -20693,7 +20734,7 @@
       </p:sp>
       <p:sp>
         <p:nvSpPr>
-          <p:cNvPr id="383" name="Google Shape;383;p57"/>
+          <p:cNvPr id="383" name="Google Shape;383;p58"/>
           <p:cNvSpPr txBox="1"/>
           <p:nvPr>
             <p:ph idx="12" type="sldNum"/>
@@ -20764,7 +20805,7 @@
 </p:sld>
 </file>
 
-<file path=ppt/slides/slide51.xml><?xml version="1.0" encoding="utf-8"?>
+<file path=ppt/slides/slide52.xml><?xml version="1.0" encoding="utf-8"?>
 <p:sld xmlns:a="http://schemas.openxmlformats.org/drawingml/2006/main" xmlns:r="http://schemas.openxmlformats.org/officeDocument/2006/relationships" xmlns:mc="http://schemas.openxmlformats.org/markup-compatibility/2006" xmlns:mv="urn:schemas-microsoft-com:mac:vml" xmlns:p="http://schemas.openxmlformats.org/presentationml/2006/main" xmlns:c="http://schemas.openxmlformats.org/drawingml/2006/chart" xmlns:dgm="http://schemas.openxmlformats.org/drawingml/2006/diagram" xmlns:o="urn:schemas-microsoft-com:office:office" xmlns:v="urn:schemas-microsoft-com:vml" xmlns:pvml="urn:schemas-microsoft-com:office:powerpoint" xmlns:com="http://schemas.openxmlformats.org/drawingml/2006/compatibility" xmlns:p14="http://schemas.microsoft.com/office/powerpoint/2010/main" xmlns:p15="http://schemas.microsoft.com/office/powerpoint/2012/main" xmlns:ahyp="http://schemas.microsoft.com/office/drawing/2018/hyperlinkcolor">
   <p:cSld>
     <p:spTree>
@@ -20783,278 +20824,7 @@
       </p:grpSpPr>
       <p:sp>
         <p:nvSpPr>
-          <p:cNvPr id="388" name="Google Shape;388;p58"/>
-          <p:cNvSpPr txBox="1"/>
-          <p:nvPr>
-            <p:ph idx="1" type="body"/>
-          </p:nvPr>
-        </p:nvSpPr>
-        <p:spPr>
-          <a:xfrm>
-            <a:off x="274320" y="914400"/>
-            <a:ext cx="8595300" cy="4114800"/>
-          </a:xfrm>
-          <a:prstGeom prst="rect">
-            <a:avLst/>
-          </a:prstGeom>
-        </p:spPr>
-        <p:txBody>
-          <a:bodyPr anchorCtr="0" anchor="t" bIns="0" lIns="0" spcFirstLastPara="1" rIns="0" wrap="square" tIns="0">
-            <a:noAutofit/>
-          </a:bodyPr>
-          <a:lstStyle/>
-          <a:p>
-            <a:pPr indent="-342900" lvl="0" marL="457200" rtl="0" algn="l">
-              <a:spcBef>
-                <a:spcPts val="0"/>
-              </a:spcBef>
-              <a:spcAft>
-                <a:spcPts val="0"/>
-              </a:spcAft>
-              <a:buSzPts val="1800"/>
-              <a:buAutoNum type="arabicPeriod"/>
-            </a:pPr>
-            <a:r>
-              <a:rPr lang="en"/>
-              <a:t>Action research</a:t>
-            </a:r>
-            <a:endParaRPr/>
-          </a:p>
-          <a:p>
-            <a:pPr indent="-342900" lvl="0" marL="457200" rtl="0" algn="l">
-              <a:spcBef>
-                <a:spcPts val="0"/>
-              </a:spcBef>
-              <a:spcAft>
-                <a:spcPts val="0"/>
-              </a:spcAft>
-              <a:buSzPts val="1800"/>
-              <a:buAutoNum type="arabicPeriod"/>
-            </a:pPr>
-            <a:r>
-              <a:rPr lang="en"/>
-              <a:t>Participatory action research</a:t>
-            </a:r>
-            <a:endParaRPr/>
-          </a:p>
-          <a:p>
-            <a:pPr indent="-342900" lvl="0" marL="457200" rtl="0" algn="l">
-              <a:spcBef>
-                <a:spcPts val="0"/>
-              </a:spcBef>
-              <a:spcAft>
-                <a:spcPts val="0"/>
-              </a:spcAft>
-              <a:buSzPts val="1800"/>
-              <a:buAutoNum type="arabicPeriod"/>
-            </a:pPr>
-            <a:r>
-              <a:rPr lang="en"/>
-              <a:t>Problem identification</a:t>
-            </a:r>
-            <a:endParaRPr/>
-          </a:p>
-          <a:p>
-            <a:pPr indent="-342900" lvl="0" marL="457200" rtl="0" algn="l">
-              <a:spcBef>
-                <a:spcPts val="0"/>
-              </a:spcBef>
-              <a:spcAft>
-                <a:spcPts val="0"/>
-              </a:spcAft>
-              <a:buSzPts val="1800"/>
-              <a:buAutoNum type="arabicPeriod"/>
-            </a:pPr>
-            <a:r>
-              <a:rPr lang="en"/>
-              <a:t>Research design</a:t>
-            </a:r>
-            <a:endParaRPr/>
-          </a:p>
-          <a:p>
-            <a:pPr indent="-342900" lvl="0" marL="457200" rtl="0" algn="l">
-              <a:spcBef>
-                <a:spcPts val="0"/>
-              </a:spcBef>
-              <a:spcAft>
-                <a:spcPts val="0"/>
-              </a:spcAft>
-              <a:buSzPts val="1800"/>
-              <a:buAutoNum type="arabicPeriod"/>
-            </a:pPr>
-            <a:r>
-              <a:rPr lang="en"/>
-              <a:t>The action-feedback loop</a:t>
-            </a:r>
-            <a:endParaRPr/>
-          </a:p>
-          <a:p>
-            <a:pPr indent="-342900" lvl="0" marL="457200" rtl="0" algn="l">
-              <a:spcBef>
-                <a:spcPts val="0"/>
-              </a:spcBef>
-              <a:spcAft>
-                <a:spcPts val="0"/>
-              </a:spcAft>
-              <a:buSzPts val="1800"/>
-              <a:buAutoNum type="arabicPeriod"/>
-            </a:pPr>
-            <a:r>
-              <a:rPr lang="en"/>
-              <a:t>Quality assurance</a:t>
-            </a:r>
-            <a:endParaRPr/>
-          </a:p>
-          <a:p>
-            <a:pPr indent="0" lvl="0" marL="0" rtl="0" algn="l">
-              <a:spcBef>
-                <a:spcPts val="1200"/>
-              </a:spcBef>
-              <a:spcAft>
-                <a:spcPts val="1200"/>
-              </a:spcAft>
-              <a:buNone/>
-            </a:pPr>
-            <a:r>
-              <a:t/>
-            </a:r>
-            <a:endParaRPr/>
-          </a:p>
-        </p:txBody>
-      </p:sp>
-      <p:sp>
-        <p:nvSpPr>
-          <p:cNvPr id="389" name="Google Shape;389;p58"/>
-          <p:cNvSpPr txBox="1"/>
-          <p:nvPr>
-            <p:ph type="title"/>
-          </p:nvPr>
-        </p:nvSpPr>
-        <p:spPr>
-          <a:xfrm>
-            <a:off x="0" y="0"/>
-            <a:ext cx="9144000" cy="685800"/>
-          </a:xfrm>
-          <a:prstGeom prst="rect">
-            <a:avLst/>
-          </a:prstGeom>
-        </p:spPr>
-        <p:txBody>
-          <a:bodyPr anchorCtr="0" anchor="ctr" bIns="91425" lIns="274300" spcFirstLastPara="1" rIns="91425" wrap="square" tIns="91425">
-            <a:noAutofit/>
-          </a:bodyPr>
-          <a:lstStyle/>
-          <a:p>
-            <a:pPr indent="0" lvl="0" marL="0" rtl="0" algn="l">
-              <a:spcBef>
-                <a:spcPts val="0"/>
-              </a:spcBef>
-              <a:spcAft>
-                <a:spcPts val="0"/>
-              </a:spcAft>
-              <a:buNone/>
-            </a:pPr>
-            <a:r>
-              <a:rPr lang="en"/>
-              <a:t>Summary</a:t>
-            </a:r>
-            <a:endParaRPr/>
-          </a:p>
-        </p:txBody>
-      </p:sp>
-      <p:sp>
-        <p:nvSpPr>
-          <p:cNvPr id="390" name="Google Shape;390;p58"/>
-          <p:cNvSpPr txBox="1"/>
-          <p:nvPr>
-            <p:ph idx="12" type="sldNum"/>
-          </p:nvPr>
-        </p:nvSpPr>
-        <p:spPr>
-          <a:xfrm>
-            <a:off x="7315209" y="4229101"/>
-            <a:ext cx="1828800" cy="914400"/>
-          </a:xfrm>
-          <a:prstGeom prst="rect">
-            <a:avLst/>
-          </a:prstGeom>
-        </p:spPr>
-        <p:txBody>
-          <a:bodyPr anchorCtr="0" anchor="b" bIns="91425" lIns="91425" spcFirstLastPara="1" rIns="91425" wrap="square" tIns="91425">
-            <a:noAutofit/>
-          </a:bodyPr>
-          <a:lstStyle/>
-          <a:p>
-            <a:pPr indent="0" lvl="0" marL="0" rtl="0" algn="r">
-              <a:spcBef>
-                <a:spcPts val="0"/>
-              </a:spcBef>
-              <a:spcAft>
-                <a:spcPts val="0"/>
-              </a:spcAft>
-              <a:buNone/>
-            </a:pPr>
-            <a:fld id="{00000000-1234-1234-1234-123412341234}" type="slidenum">
-              <a:rPr lang="en"/>
-              <a:t>‹#›</a:t>
-            </a:fld>
-            <a:endParaRPr/>
-          </a:p>
-          <a:p>
-            <a:pPr indent="0" lvl="0" marL="0" rtl="0" algn="r">
-              <a:spcBef>
-                <a:spcPts val="0"/>
-              </a:spcBef>
-              <a:spcAft>
-                <a:spcPts val="0"/>
-              </a:spcAft>
-              <a:buNone/>
-            </a:pPr>
-            <a:r>
-              <a:rPr b="0" lang="en" sz="1000" u="sng">
-                <a:solidFill>
-                  <a:schemeClr val="hlink"/>
-                </a:solidFill>
-                <a:hlinkClick r:id="rId3"/>
-              </a:rPr>
-              <a:t>uni1.de/nyt</a:t>
-            </a:r>
-            <a:r>
-              <a:rPr b="0" lang="en" sz="1000"/>
-              <a:t> </a:t>
-            </a:r>
-            <a:endParaRPr b="0" sz="1000"/>
-          </a:p>
-        </p:txBody>
-      </p:sp>
-    </p:spTree>
-  </p:cSld>
-  <p:clrMapOvr>
-    <a:masterClrMapping/>
-  </p:clrMapOvr>
-</p:sld>
-</file>
-
-<file path=ppt/slides/slide52.xml><?xml version="1.0" encoding="utf-8"?>
-<p:sld xmlns:a="http://schemas.openxmlformats.org/drawingml/2006/main" xmlns:r="http://schemas.openxmlformats.org/officeDocument/2006/relationships" xmlns:mc="http://schemas.openxmlformats.org/markup-compatibility/2006" xmlns:mv="urn:schemas-microsoft-com:mac:vml" xmlns:p="http://schemas.openxmlformats.org/presentationml/2006/main" xmlns:c="http://schemas.openxmlformats.org/drawingml/2006/chart" xmlns:dgm="http://schemas.openxmlformats.org/drawingml/2006/diagram" xmlns:o="urn:schemas-microsoft-com:office:office" xmlns:v="urn:schemas-microsoft-com:vml" xmlns:pvml="urn:schemas-microsoft-com:office:powerpoint" xmlns:com="http://schemas.openxmlformats.org/drawingml/2006/compatibility" xmlns:p14="http://schemas.microsoft.com/office/powerpoint/2010/main" xmlns:p15="http://schemas.microsoft.com/office/powerpoint/2012/main" xmlns:ahyp="http://schemas.microsoft.com/office/drawing/2018/hyperlinkcolor">
-  <p:cSld>
-    <p:spTree>
-      <p:nvGrpSpPr>
-        <p:cNvPr id="394" name="Shape 394"/>
-        <p:cNvGrpSpPr/>
-        <p:nvPr/>
-      </p:nvGrpSpPr>
-      <p:grpSpPr>
-        <a:xfrm>
-          <a:off x="0" y="0"/>
-          <a:ext cx="0" cy="0"/>
-          <a:chOff x="0" y="0"/>
-          <a:chExt cx="0" cy="0"/>
-        </a:xfrm>
-      </p:grpSpPr>
-      <p:sp>
-        <p:nvSpPr>
-          <p:cNvPr id="395" name="Google Shape;395;p59"/>
+          <p:cNvPr id="388" name="Google Shape;388;p59"/>
           <p:cNvSpPr txBox="1"/>
           <p:nvPr>
             <p:ph type="ctrTitle"/>
@@ -21094,7 +20864,7 @@
       </p:sp>
       <p:sp>
         <p:nvSpPr>
-          <p:cNvPr id="396" name="Google Shape;396;p59"/>
+          <p:cNvPr id="389" name="Google Shape;389;p59"/>
           <p:cNvSpPr txBox="1"/>
           <p:nvPr>
             <p:ph idx="1" type="subTitle"/>
@@ -21224,7 +20994,7 @@
   <p:cSld>
     <p:spTree>
       <p:nvGrpSpPr>
-        <p:cNvPr id="400" name="Shape 400"/>
+        <p:cNvPr id="393" name="Shape 393"/>
         <p:cNvGrpSpPr/>
         <p:nvPr/>
       </p:nvGrpSpPr>
@@ -21238,7 +21008,7 @@
       </p:grpSpPr>
       <p:sp>
         <p:nvSpPr>
-          <p:cNvPr id="401" name="Google Shape;401;p60"/>
+          <p:cNvPr id="394" name="Google Shape;394;p60"/>
           <p:cNvSpPr txBox="1"/>
           <p:nvPr>
             <p:ph type="title"/>
@@ -21278,7 +21048,7 @@
       </p:sp>
       <p:sp>
         <p:nvSpPr>
-          <p:cNvPr id="402" name="Google Shape;402;p60"/>
+          <p:cNvPr id="395" name="Google Shape;395;p60"/>
           <p:cNvSpPr txBox="1"/>
           <p:nvPr>
             <p:ph idx="12" type="sldNum"/>
@@ -21325,33 +21095,25 @@
               <a:buNone/>
             </a:pPr>
             <a:r>
-              <a:rPr b="0" lang="en" sz="900" u="sng">
+              <a:rPr b="0" lang="en" sz="1000" u="sng">
                 <a:solidFill>
                   <a:schemeClr val="hlink"/>
                 </a:solidFill>
                 <a:hlinkClick r:id="rId3"/>
               </a:rPr>
-              <a:t>https://profriehle.com</a:t>
-            </a:r>
-            <a:r>
-              <a:rPr b="0" lang="en" sz="900">
-                <a:solidFill>
-                  <a:schemeClr val="dk2"/>
-                </a:solidFill>
-              </a:rPr>
+              <a:t>uni1.de/nyt</a:t>
+            </a:r>
+            <a:r>
+              <a:rPr b="0" lang="en" sz="1000"/>
               <a:t> </a:t>
             </a:r>
-            <a:endParaRPr b="0" sz="900">
-              <a:solidFill>
-                <a:schemeClr val="dk2"/>
-              </a:solidFill>
-            </a:endParaRPr>
+            <a:endParaRPr b="0" sz="1000"/>
           </a:p>
         </p:txBody>
       </p:sp>
       <p:sp>
         <p:nvSpPr>
-          <p:cNvPr id="403" name="Google Shape;403;p60"/>
+          <p:cNvPr id="396" name="Google Shape;396;p60"/>
           <p:cNvSpPr txBox="1"/>
           <p:nvPr>
             <p:ph idx="1" type="body"/>
@@ -21446,7 +21208,7 @@
             </a:pPr>
             <a:r>
               <a:rPr lang="en"/>
-              <a:t>© 2012, 2023, 2024 Dirk Riehle, some rights reserved</a:t>
+              <a:t>© 2012-2025 Dirk Riehle, some rights reserved</a:t>
             </a:r>
             <a:endParaRPr/>
           </a:p>
@@ -21480,7 +21242,7 @@
   <p:cSld>
     <p:spTree>
       <p:nvGrpSpPr>
-        <p:cNvPr id="68" name="Shape 68"/>
+        <p:cNvPr id="67" name="Shape 67"/>
         <p:cNvGrpSpPr/>
         <p:nvPr/>
       </p:nvGrpSpPr>
@@ -21494,7 +21256,7 @@
       </p:grpSpPr>
       <p:sp>
         <p:nvSpPr>
-          <p:cNvPr id="69" name="Google Shape;69;p13"/>
+          <p:cNvPr id="68" name="Google Shape;68;p13"/>
           <p:cNvSpPr txBox="1"/>
           <p:nvPr>
             <p:ph type="title"/>
@@ -21534,7 +21296,7 @@
       </p:sp>
       <p:sp>
         <p:nvSpPr>
-          <p:cNvPr id="70" name="Google Shape;70;p13"/>
+          <p:cNvPr id="69" name="Google Shape;69;p13"/>
           <p:cNvSpPr txBox="1"/>
           <p:nvPr>
             <p:ph idx="1" type="body"/>
@@ -21608,7 +21370,7 @@
       </p:sp>
       <p:sp>
         <p:nvSpPr>
-          <p:cNvPr id="71" name="Google Shape;71;p13"/>
+          <p:cNvPr id="70" name="Google Shape;70;p13"/>
           <p:cNvSpPr txBox="1"/>
           <p:nvPr>
             <p:ph idx="12" type="sldNum"/>
@@ -21684,7 +21446,7 @@
   <p:cSld>
     <p:spTree>
       <p:nvGrpSpPr>
-        <p:cNvPr id="75" name="Shape 75"/>
+        <p:cNvPr id="74" name="Shape 74"/>
         <p:cNvGrpSpPr/>
         <p:nvPr/>
       </p:nvGrpSpPr>
@@ -21698,7 +21460,7 @@
       </p:grpSpPr>
       <p:sp>
         <p:nvSpPr>
-          <p:cNvPr id="76" name="Google Shape;76;p14"/>
+          <p:cNvPr id="75" name="Google Shape;75;p14"/>
           <p:cNvSpPr txBox="1"/>
           <p:nvPr>
             <p:ph type="title"/>
@@ -21738,7 +21500,7 @@
       </p:sp>
       <p:sp>
         <p:nvSpPr>
-          <p:cNvPr id="77" name="Google Shape;77;p14"/>
+          <p:cNvPr id="76" name="Google Shape;76;p14"/>
           <p:cNvSpPr txBox="1"/>
           <p:nvPr>
             <p:ph idx="12" type="sldNum"/>
@@ -21803,7 +21565,7 @@
       </p:sp>
       <p:sp>
         <p:nvSpPr>
-          <p:cNvPr id="78" name="Google Shape;78;p14"/>
+          <p:cNvPr id="77" name="Google Shape;77;p14"/>
           <p:cNvSpPr txBox="1"/>
           <p:nvPr>
             <p:ph idx="1" type="body"/>
@@ -22008,7 +21770,7 @@
             </a:pPr>
             <a:r>
               <a:rPr lang="en"/>
-              <a:t>Report from findings</a:t>
+              <a:t>Report findings</a:t>
             </a:r>
             <a:endParaRPr/>
           </a:p>
@@ -22016,7 +21778,7 @@
       </p:sp>
       <p:pic>
         <p:nvPicPr>
-          <p:cNvPr id="79" name="Google Shape;79;p14"/>
+          <p:cNvPr id="78" name="Google Shape;78;p14"/>
           <p:cNvPicPr preferRelativeResize="0"/>
           <p:nvPr/>
         </p:nvPicPr>
@@ -22055,7 +21817,7 @@
   <p:cSld>
     <p:spTree>
       <p:nvGrpSpPr>
-        <p:cNvPr id="83" name="Shape 83"/>
+        <p:cNvPr id="82" name="Shape 82"/>
         <p:cNvGrpSpPr/>
         <p:nvPr/>
       </p:nvGrpSpPr>
@@ -22069,7 +21831,7 @@
       </p:grpSpPr>
       <p:sp>
         <p:nvSpPr>
-          <p:cNvPr id="84" name="Google Shape;84;p15"/>
+          <p:cNvPr id="83" name="Google Shape;83;p15"/>
           <p:cNvSpPr txBox="1"/>
           <p:nvPr>
             <p:ph type="title"/>
@@ -22109,7 +21871,7 @@
       </p:sp>
       <p:sp>
         <p:nvSpPr>
-          <p:cNvPr id="85" name="Google Shape;85;p15"/>
+          <p:cNvPr id="84" name="Google Shape;84;p15"/>
           <p:cNvSpPr txBox="1"/>
           <p:nvPr>
             <p:ph idx="1" type="body"/>
@@ -22244,7 +22006,7 @@
       </p:sp>
       <p:sp>
         <p:nvSpPr>
-          <p:cNvPr id="86" name="Google Shape;86;p15"/>
+          <p:cNvPr id="85" name="Google Shape;85;p15"/>
           <p:cNvSpPr txBox="1"/>
           <p:nvPr>
             <p:ph idx="12" type="sldNum"/>
@@ -22320,7 +22082,7 @@
   <p:cSld>
     <p:spTree>
       <p:nvGrpSpPr>
-        <p:cNvPr id="90" name="Shape 90"/>
+        <p:cNvPr id="89" name="Shape 89"/>
         <p:cNvGrpSpPr/>
         <p:nvPr/>
       </p:nvGrpSpPr>
@@ -22334,7 +22096,7 @@
       </p:grpSpPr>
       <p:sp>
         <p:nvSpPr>
-          <p:cNvPr id="91" name="Google Shape;91;p16"/>
+          <p:cNvPr id="90" name="Google Shape;90;p16"/>
           <p:cNvSpPr txBox="1"/>
           <p:nvPr>
             <p:ph idx="1" type="body"/>
@@ -22502,7 +22264,7 @@
       </p:sp>
       <p:sp>
         <p:nvSpPr>
-          <p:cNvPr id="92" name="Google Shape;92;p16"/>
+          <p:cNvPr id="91" name="Google Shape;91;p16"/>
           <p:cNvSpPr txBox="1"/>
           <p:nvPr>
             <p:ph type="title"/>
@@ -22542,7 +22304,7 @@
       </p:sp>
       <p:sp>
         <p:nvSpPr>
-          <p:cNvPr id="93" name="Google Shape;93;p16"/>
+          <p:cNvPr id="92" name="Google Shape;92;p16"/>
           <p:cNvSpPr txBox="1"/>
           <p:nvPr>
             <p:ph idx="12" type="sldNum"/>
@@ -22607,7 +22369,7 @@
       </p:sp>
       <p:sp>
         <p:nvSpPr>
-          <p:cNvPr id="94" name="Google Shape;94;p16"/>
+          <p:cNvPr id="93" name="Google Shape;93;p16"/>
           <p:cNvSpPr txBox="1"/>
           <p:nvPr/>
         </p:nvSpPr>
